--- a/dist/downloads/Ali_Bayoumi_Project_Controls_Case_Study.pptx
+++ b/dist/downloads/Ali_Bayoumi_Project_Controls_Case_Study.pptx
@@ -2,27 +2,30 @@
 <file path=ppt/presentation.xml><?xml version="1.0" encoding="utf-8"?>
 <p:presentation xmlns:p="http://schemas.openxmlformats.org/presentationml/2006/main">
   <p:sldMasterIdLst>
-    <p:sldMasterId xmlns:r="http://schemas.openxmlformats.org/officeDocument/2006/relationships" id="2147483648" r:id="R59ac93ce66f84a96"/>
+    <p:sldMasterId xmlns:r="http://schemas.openxmlformats.org/officeDocument/2006/relationships" id="2147483648" r:id="R0a89c7131f5241ad"/>
   </p:sldMasterIdLst>
   <p:notesMasterIdLst>
-    <p:notesMasterId xmlns:r="http://schemas.openxmlformats.org/officeDocument/2006/relationships" r:id="R9ad15a49f5a143c8"/>
+    <p:notesMasterId xmlns:r="http://schemas.openxmlformats.org/officeDocument/2006/relationships" r:id="R9044d0e99789423a"/>
   </p:notesMasterIdLst>
   <p:sldIdLst>
-    <p:sldId xmlns:r="http://schemas.openxmlformats.org/officeDocument/2006/relationships" id="256" r:id="R5e6926a90fc84ffa"/>
-    <p:sldId xmlns:r="http://schemas.openxmlformats.org/officeDocument/2006/relationships" id="257" r:id="Ref75984abe4c4486"/>
-    <p:sldId xmlns:r="http://schemas.openxmlformats.org/officeDocument/2006/relationships" id="258" r:id="R61f806a69eb64aee"/>
-    <p:sldId xmlns:r="http://schemas.openxmlformats.org/officeDocument/2006/relationships" id="259" r:id="Rb6632bc98ba540e1"/>
-    <p:sldId xmlns:r="http://schemas.openxmlformats.org/officeDocument/2006/relationships" id="260" r:id="R45c85b26fca04ded"/>
-    <p:sldId xmlns:r="http://schemas.openxmlformats.org/officeDocument/2006/relationships" id="261" r:id="Rd7608251abf04922"/>
-    <p:sldId xmlns:r="http://schemas.openxmlformats.org/officeDocument/2006/relationships" id="262" r:id="Rc74646a5c6cd4fc8"/>
-    <p:sldId xmlns:r="http://schemas.openxmlformats.org/officeDocument/2006/relationships" id="263" r:id="R31b20ca67b194c1d"/>
-    <p:sldId xmlns:r="http://schemas.openxmlformats.org/officeDocument/2006/relationships" id="264" r:id="R8ff17d32557c42a0"/>
-    <p:sldId xmlns:r="http://schemas.openxmlformats.org/officeDocument/2006/relationships" id="265" r:id="R328d9f6692464c96"/>
-    <p:sldId xmlns:r="http://schemas.openxmlformats.org/officeDocument/2006/relationships" id="266" r:id="R3f556c974fea4016"/>
-    <p:sldId xmlns:r="http://schemas.openxmlformats.org/officeDocument/2006/relationships" id="267" r:id="R6a69d2376b9045ba"/>
-    <p:sldId xmlns:r="http://schemas.openxmlformats.org/officeDocument/2006/relationships" id="268" r:id="R9bc7cd35b2a84153"/>
-    <p:sldId xmlns:r="http://schemas.openxmlformats.org/officeDocument/2006/relationships" id="269" r:id="R44878474272840a3"/>
-    <p:sldId xmlns:r="http://schemas.openxmlformats.org/officeDocument/2006/relationships" id="270" r:id="Re7a553f75dc14e38"/>
+    <p:sldId xmlns:r="http://schemas.openxmlformats.org/officeDocument/2006/relationships" id="256" r:id="R2ea449d6e3b14091"/>
+    <p:sldId xmlns:r="http://schemas.openxmlformats.org/officeDocument/2006/relationships" id="257" r:id="R697ef9c78f064ab6"/>
+    <p:sldId xmlns:r="http://schemas.openxmlformats.org/officeDocument/2006/relationships" id="258" r:id="R83ae6be15b1b4cec"/>
+    <p:sldId xmlns:r="http://schemas.openxmlformats.org/officeDocument/2006/relationships" id="259" r:id="R8b71cb4bd34a41f9"/>
+    <p:sldId xmlns:r="http://schemas.openxmlformats.org/officeDocument/2006/relationships" id="260" r:id="R9a90d7f264b54162"/>
+    <p:sldId xmlns:r="http://schemas.openxmlformats.org/officeDocument/2006/relationships" id="261" r:id="R3e12ed27925841e3"/>
+    <p:sldId xmlns:r="http://schemas.openxmlformats.org/officeDocument/2006/relationships" id="262" r:id="Ra6c457e143e843bd"/>
+    <p:sldId xmlns:r="http://schemas.openxmlformats.org/officeDocument/2006/relationships" id="263" r:id="R2c849d6cca3e4231"/>
+    <p:sldId xmlns:r="http://schemas.openxmlformats.org/officeDocument/2006/relationships" id="264" r:id="Re0f5b27bf7a646da"/>
+    <p:sldId xmlns:r="http://schemas.openxmlformats.org/officeDocument/2006/relationships" id="265" r:id="Rd6d9834b3f2743cd"/>
+    <p:sldId xmlns:r="http://schemas.openxmlformats.org/officeDocument/2006/relationships" id="266" r:id="Rac8fde8dda3d4d02"/>
+    <p:sldId xmlns:r="http://schemas.openxmlformats.org/officeDocument/2006/relationships" id="267" r:id="R1f10c71b280e4883"/>
+    <p:sldId xmlns:r="http://schemas.openxmlformats.org/officeDocument/2006/relationships" id="268" r:id="R37d95ea74ce5405b"/>
+    <p:sldId xmlns:r="http://schemas.openxmlformats.org/officeDocument/2006/relationships" id="269" r:id="Re9b6e6d1dec943ed"/>
+    <p:sldId xmlns:r="http://schemas.openxmlformats.org/officeDocument/2006/relationships" id="270" r:id="R1fc4f87525ca4876"/>
+    <p:sldId xmlns:r="http://schemas.openxmlformats.org/officeDocument/2006/relationships" id="271" r:id="R1b29fcb16e8643aa"/>
+    <p:sldId xmlns:r="http://schemas.openxmlformats.org/officeDocument/2006/relationships" id="272" r:id="Rfb8b1434fe014186"/>
+    <p:sldId xmlns:r="http://schemas.openxmlformats.org/officeDocument/2006/relationships" id="273" r:id="R409953231bd7450f"/>
   </p:sldIdLst>
   <p:sldSz cx="12192000" cy="6858000"/>
   <p:notesSz cx="6858000" cy="9144000"/>
@@ -1136,6 +1139,351 @@
 </p:notes>
 </file>
 
+<file path=ppt/notesSlides/notesSlide16.xml><?xml version="1.0" encoding="utf-8"?>
+<p:notes xmlns:p="http://schemas.openxmlformats.org/presentationml/2006/main">
+  <p:cSld>
+    <p:spTree>
+      <p:nvGrpSpPr>
+        <p:cNvPr id="1" name=""/>
+        <p:cNvGrpSpPr/>
+        <p:nvPr/>
+      </p:nvGrpSpPr>
+      <p:grpSpPr>
+        <a:xfrm xmlns:a="http://schemas.openxmlformats.org/drawingml/2006/main"/>
+      </p:grpSpPr>
+      <p:sp>
+        <p:nvSpPr>
+          <p:cNvPr id="2" name="Slide Image Placeholder 1"/>
+          <p:cNvSpPr>
+            <a:spLocks xmlns:a="http://schemas.openxmlformats.org/drawingml/2006/main" noGrp="1"/>
+          </p:cNvSpPr>
+          <p:nvPr>
+            <p:ph type="sldImg" idx="0"/>
+          </p:nvPr>
+        </p:nvSpPr>
+        <p:spPr/>
+      </p:sp>
+      <p:sp>
+        <p:nvSpPr>
+          <p:cNvPr id="3" name="Notes Placeholder 2"/>
+          <p:cNvSpPr>
+            <a:spLocks xmlns:a="http://schemas.openxmlformats.org/drawingml/2006/main" noGrp="1"/>
+          </p:cNvSpPr>
+          <p:nvPr>
+            <p:ph type="body" idx="1"/>
+          </p:nvPr>
+        </p:nvSpPr>
+        <p:spPr/>
+        <p:txBody>
+          <a:bodyPr xmlns:a="http://schemas.openxmlformats.org/drawingml/2006/main"/>
+          <a:lstStyle xmlns:a="http://schemas.openxmlformats.org/drawingml/2006/main"/>
+          <a:p xmlns:a="http://schemas.openxmlformats.org/drawingml/2006/main">
+            <a:r>
+              <a:t>Source: existing portfolio slide 12 and its speaker notes, preserved simulated update dated 01 Apr 2027. The review comment and response deadline below are training additions.</a:t>
+            </a:r>
+          </a:p>
+          <a:p xmlns:a="http://schemas.openxmlformats.org/drawingml/2006/main">
+            <a:r>
+              <a:t/>
+            </a:r>
+          </a:p>
+          <a:p xmlns:a="http://schemas.openxmlformats.org/drawingml/2006/main">
+            <a:r>
+              <a:t>Talk track: I would first confirm whether the omission is intentional. Continuous curing and site labor can legitimately use different calendars. I request approved working-time assumptions before inserting holidays. I preserve the submitted programme, update a separate copy and compare the same milestone after a native schedule run. I record the response and retain the calculation log. A missing exception is a review query, not proof of a specific completion delay. I have not rerun the full P6 model for this exercise.</a:t>
+            </a:r>
+          </a:p>
+          <a:p xmlns:a="http://schemas.openxmlformats.org/drawingml/2006/main">
+            <a:r>
+              <a:t/>
+            </a:r>
+          </a:p>
+          <a:p xmlns:a="http://schemas.openxmlformats.org/drawingml/2006/main">
+            <a:r>
+              <a:t>Question: How many days does this finding delay handover? Answer: The saved evidence does not establish that. The approved calendar, affected activities and recalculated controlling path are needed.</a:t>
+            </a:r>
+          </a:p>
+          <a:p xmlns:a="http://schemas.openxmlformats.org/drawingml/2006/main">
+            <a:r>
+              <a:t/>
+            </a:r>
+          </a:p>
+          <a:p xmlns:a="http://schemas.openxmlformats.org/drawingml/2006/main">
+            <a:r>
+              <a:t>Independent training exercise using assumed events and data; not a live contractual claim.</a:t>
+            </a:r>
+          </a:p>
+        </p:txBody>
+      </p:sp>
+      <p:sp>
+        <p:nvSpPr>
+          <p:cNvPr id="4" name="Slide Number Placeholder 3"/>
+          <p:cNvSpPr>
+            <a:spLocks xmlns:a="http://schemas.openxmlformats.org/drawingml/2006/main" noGrp="1"/>
+          </p:cNvSpPr>
+          <p:nvPr>
+            <p:ph type="sldNum" idx="5"/>
+          </p:nvPr>
+        </p:nvSpPr>
+        <p:spPr/>
+        <p:txBody>
+          <a:bodyPr xmlns:a="http://schemas.openxmlformats.org/drawingml/2006/main"/>
+          <a:lstStyle xmlns:a="http://schemas.openxmlformats.org/drawingml/2006/main"/>
+          <a:p xmlns:a="http://schemas.openxmlformats.org/drawingml/2006/main"/>
+        </p:txBody>
+      </p:sp>
+    </p:spTree>
+  </p:cSld>
+  <p:clrMapOvr>
+    <a:masterClrMapping xmlns:a="http://schemas.openxmlformats.org/drawingml/2006/main"/>
+  </p:clrMapOvr>
+</p:notes>
+</file>
+
+<file path=ppt/notesSlides/notesSlide17.xml><?xml version="1.0" encoding="utf-8"?>
+<p:notes xmlns:p="http://schemas.openxmlformats.org/presentationml/2006/main">
+  <p:cSld>
+    <p:spTree>
+      <p:nvGrpSpPr>
+        <p:cNvPr id="1" name=""/>
+        <p:cNvGrpSpPr/>
+        <p:nvPr/>
+      </p:nvGrpSpPr>
+      <p:grpSpPr>
+        <a:xfrm xmlns:a="http://schemas.openxmlformats.org/drawingml/2006/main"/>
+      </p:grpSpPr>
+      <p:sp>
+        <p:nvSpPr>
+          <p:cNvPr id="2" name="Slide Image Placeholder 1"/>
+          <p:cNvSpPr>
+            <a:spLocks xmlns:a="http://schemas.openxmlformats.org/drawingml/2006/main" noGrp="1"/>
+          </p:cNvSpPr>
+          <p:nvPr>
+            <p:ph type="sldImg" idx="0"/>
+          </p:nvPr>
+        </p:nvSpPr>
+        <p:spPr/>
+      </p:sp>
+      <p:sp>
+        <p:nvSpPr>
+          <p:cNvPr id="3" name="Notes Placeholder 2"/>
+          <p:cNvSpPr>
+            <a:spLocks xmlns:a="http://schemas.openxmlformats.org/drawingml/2006/main" noGrp="1"/>
+          </p:cNvSpPr>
+          <p:nvPr>
+            <p:ph type="body" idx="1"/>
+          </p:nvPr>
+        </p:nvSpPr>
+        <p:spPr/>
+        <p:txBody>
+          <a:bodyPr xmlns:a="http://schemas.openxmlformats.org/drawingml/2006/main"/>
+          <a:lstStyle xmlns:a="http://schemas.openxmlformats.org/drawingml/2006/main"/>
+          <a:p xmlns:a="http://schemas.openxmlformats.org/drawingml/2006/main">
+            <a:r>
+              <a:t>All quantities, record IDs, actions and dates on this slide are assumed training data. Mock Q-001 is an assumed jointly measured quantity sheet totalling 160 m³. Mock IR-001 is an assumed inspection release covering that quantity. No real or fabricated signed records are supplied.</a:t>
+            </a:r>
+          </a:p>
+          <a:p xmlns:a="http://schemas.openxmlformats.org/drawingml/2006/main">
+            <a:r>
+              <a:t/>
+            </a:r>
+          </a:p>
+          <a:p xmlns:a="http://schemas.openxmlformats.org/drawingml/2006/main">
+            <a:r>
+              <a:t>Calculation: planned 200/400 = 50%; reported 180/400 = 45%; verified 160/400 = 40%. Verified minus planned = -10 percentage points, or -40 m³. Reported minus verified = 20 m³. The unverified quantity is not automatically rejected work. Reconcile the measurement and acceptance cut-off before recognising it. Both log entries remain open.</a:t>
+            </a:r>
+          </a:p>
+          <a:p xmlns:a="http://schemas.openxmlformats.org/drawingml/2006/main">
+            <a:r>
+              <a:t/>
+            </a:r>
+          </a:p>
+          <a:p xmlns:a="http://schemas.openxmlformats.org/drawingml/2006/main">
+            <a:r>
+              <a:t>Measurement rule: recognise installed and accepted concrete quantities against the same 400 m³ scope. Reconcile delivery tickets, location-tagged daily records, measurements and inspection releases. Do not mix unaccepted quantities with accepted quantities or compare different cut-offs.</a:t>
+            </a:r>
+          </a:p>
+          <a:p xmlns:a="http://schemas.openxmlformats.org/drawingml/2006/main">
+            <a:r>
+              <a:t/>
+            </a:r>
+          </a:p>
+          <a:p xmlns:a="http://schemas.openxmlformats.org/drawingml/2006/main">
+            <a:r>
+              <a:t>Question: Does 40% describe the whole P6 project? Answer: No. It is only the assumed slab package. Whole-project progress needs documented weighting across packages and consistent measurement rules. The existing P6 EV is duration-based, so this physical percentage does not replace its earned-value calculation. A production shortfall alone does not establish a delay to handover.</a:t>
+            </a:r>
+          </a:p>
+          <a:p xmlns:a="http://schemas.openxmlformats.org/drawingml/2006/main">
+            <a:r>
+              <a:t/>
+            </a:r>
+          </a:p>
+          <a:p xmlns:a="http://schemas.openxmlformats.org/drawingml/2006/main">
+            <a:r>
+              <a:t>Independent training exercise using assumed events and data; not a live contractual claim.</a:t>
+            </a:r>
+          </a:p>
+        </p:txBody>
+      </p:sp>
+      <p:sp>
+        <p:nvSpPr>
+          <p:cNvPr id="4" name="Slide Number Placeholder 3"/>
+          <p:cNvSpPr>
+            <a:spLocks xmlns:a="http://schemas.openxmlformats.org/drawingml/2006/main" noGrp="1"/>
+          </p:cNvSpPr>
+          <p:nvPr>
+            <p:ph type="sldNum" idx="5"/>
+          </p:nvPr>
+        </p:nvSpPr>
+        <p:spPr/>
+        <p:txBody>
+          <a:bodyPr xmlns:a="http://schemas.openxmlformats.org/drawingml/2006/main"/>
+          <a:lstStyle xmlns:a="http://schemas.openxmlformats.org/drawingml/2006/main"/>
+          <a:p xmlns:a="http://schemas.openxmlformats.org/drawingml/2006/main"/>
+        </p:txBody>
+      </p:sp>
+    </p:spTree>
+  </p:cSld>
+  <p:clrMapOvr>
+    <a:masterClrMapping xmlns:a="http://schemas.openxmlformats.org/drawingml/2006/main"/>
+  </p:clrMapOvr>
+</p:notes>
+</file>
+
+<file path=ppt/notesSlides/notesSlide18.xml><?xml version="1.0" encoding="utf-8"?>
+<p:notes xmlns:p="http://schemas.openxmlformats.org/presentationml/2006/main">
+  <p:cSld>
+    <p:spTree>
+      <p:nvGrpSpPr>
+        <p:cNvPr id="1" name=""/>
+        <p:cNvGrpSpPr/>
+        <p:nvPr/>
+      </p:nvGrpSpPr>
+      <p:grpSpPr>
+        <a:xfrm xmlns:a="http://schemas.openxmlformats.org/drawingml/2006/main"/>
+      </p:grpSpPr>
+      <p:sp>
+        <p:nvSpPr>
+          <p:cNvPr id="2" name="Slide Image Placeholder 1"/>
+          <p:cNvSpPr>
+            <a:spLocks xmlns:a="http://schemas.openxmlformats.org/drawingml/2006/main" noGrp="1"/>
+          </p:cNvSpPr>
+          <p:nvPr>
+            <p:ph type="sldImg" idx="0"/>
+          </p:nvPr>
+        </p:nvSpPr>
+        <p:spPr/>
+      </p:sp>
+      <p:sp>
+        <p:nvSpPr>
+          <p:cNvPr id="3" name="Notes Placeholder 2"/>
+          <p:cNvSpPr>
+            <a:spLocks xmlns:a="http://schemas.openxmlformats.org/drawingml/2006/main" noGrp="1"/>
+          </p:cNvSpPr>
+          <p:nvPr>
+            <p:ph type="body" idx="1"/>
+          </p:nvPr>
+        </p:nvSpPr>
+        <p:spPr/>
+        <p:txBody>
+          <a:bodyPr xmlns:a="http://schemas.openxmlformats.org/drawingml/2006/main"/>
+          <a:lstStyle xmlns:a="http://schemas.openxmlformats.org/drawingml/2006/main"/>
+          <a:p xmlns:a="http://schemas.openxmlformats.org/drawingml/2006/main">
+            <a:r>
+              <a:t>This simplified prospective TIA uses an assumed current update, not the original 1,206-activity P6 programme. No change to HO-023 or the main project forecast is asserted. The output is an independently calculated CPM training model, not a native P6 scheduling run.</a:t>
+            </a:r>
+          </a:p>
+          <a:p xmlns:a="http://schemas.openxmlformats.org/drawingml/2006/main">
+            <a:r>
+              <a:t/>
+            </a:r>
+          </a:p>
+          <a:p xmlns:a="http://schemas.openxmlformats.org/drawingml/2006/main">
+            <a:r>
+              <a:t>Assumptions: data date 05 Apr 2027 at 08:00; enabling work before this date is complete. All remaining activities are unstarted. Monday–Friday calendar, 08:00–12:00 and 13:00–17:00, no holidays. FS links with zero lag, no date constraints, no resource limits or leveling, no concurrency, mitigation or acceleration. A parallel documentation activity takes 8 working days from release, finishes 14 Apr 2027 and must also precede handover. Its float is 5 working days before the event and 9 afterwards.</a:t>
+            </a:r>
+          </a:p>
+          <a:p xmlns:a="http://schemas.openxmlformats.org/drawingml/2006/main">
+            <a:r>
+              <a:t/>
+            </a:r>
+          </a:p>
+          <a:p xmlns:a="http://schemas.openxmlformats.org/drawingml/2006/main">
+            <a:r>
+              <a:t>Network before: release to installation (10d), testing (3d), M-TR01 handover. Parallel release to documentation (8d) to handover. Network after: insert E-01 design clarification (4 working days, 05–08 Apr) between release and installation. Documentation stays unchanged. Original remaining controlling duration max(10+3,8)=13 days. Impacted duration max(4+10+3,8)=17 days. Difference=4 working days. Handover moves from 21 Apr at 17:00 to 27 Apr at 17:00, six calendar days.</a:t>
+            </a:r>
+          </a:p>
+          <a:p xmlns:a="http://schemas.openxmlformats.org/drawingml/2006/main">
+            <a:r>
+              <a:t/>
+            </a:r>
+          </a:p>
+          <a:p xmlns:a="http://schemas.openxmlformats.org/drawingml/2006/main">
+            <a:r>
+              <a:t>Question: Does any four-day event cause four days of completion delay? Answer: No. Here the insertion affects the controlling path with zero float. Float, parallel paths, calendar changes and mitigation can change the result.</a:t>
+            </a:r>
+          </a:p>
+          <a:p xmlns:a="http://schemas.openxmlformats.org/drawingml/2006/main">
+            <a:r>
+              <a:t/>
+            </a:r>
+          </a:p>
+          <a:p xmlns:a="http://schemas.openxmlformats.org/drawingml/2006/main">
+            <a:r>
+              <a:t>Procedure learning scope: Introductory knowledge of FIDIC-based contract procedures. Identify the contract form, edition and Particular Conditions before checking event allocation, notices, records and assessment. No clause numbers or notice periods are assumed. The model supports EOT review but does not establish entitlement or compensation.</a:t>
+            </a:r>
+          </a:p>
+          <a:p xmlns:a="http://schemas.openxmlformats.org/drawingml/2006/main">
+            <a:r>
+              <a:t/>
+            </a:r>
+          </a:p>
+          <a:p xmlns:a="http://schemas.openxmlformats.org/drawingml/2006/main">
+            <a:r>
+              <a:t>Method reference: Society of Construction Law, Delay and Disruption Protocol, 2nd edition (2017), Part B 4.3 and 11.6(b): https://www.scl.org.uk/sites/default/files/documents/SCL_Delay_Protocol_2nd_Edition_Final.pdf</a:t>
+            </a:r>
+          </a:p>
+          <a:p xmlns:a="http://schemas.openxmlformats.org/drawingml/2006/main">
+            <a:r>
+              <a:t>Contract context: FIDIC Golden Principles (2019), discussion of Particular Conditions: https://fidic.org/books/fidic-golden-principles-2019</a:t>
+            </a:r>
+          </a:p>
+          <a:p xmlns:a="http://schemas.openxmlformats.org/drawingml/2006/main">
+            <a:r>
+              <a:t/>
+            </a:r>
+          </a:p>
+          <a:p xmlns:a="http://schemas.openxmlformats.org/drawingml/2006/main">
+            <a:r>
+              <a:t>Independent training exercise using assumed events and data; not a live contractual claim.</a:t>
+            </a:r>
+          </a:p>
+        </p:txBody>
+      </p:sp>
+      <p:sp>
+        <p:nvSpPr>
+          <p:cNvPr id="4" name="Slide Number Placeholder 3"/>
+          <p:cNvSpPr>
+            <a:spLocks xmlns:a="http://schemas.openxmlformats.org/drawingml/2006/main" noGrp="1"/>
+          </p:cNvSpPr>
+          <p:nvPr>
+            <p:ph type="sldNum" idx="5"/>
+          </p:nvPr>
+        </p:nvSpPr>
+        <p:spPr/>
+        <p:txBody>
+          <a:bodyPr xmlns:a="http://schemas.openxmlformats.org/drawingml/2006/main"/>
+          <a:lstStyle xmlns:a="http://schemas.openxmlformats.org/drawingml/2006/main"/>
+          <a:p xmlns:a="http://schemas.openxmlformats.org/drawingml/2006/main"/>
+        </p:txBody>
+      </p:sp>
+    </p:spTree>
+  </p:cSld>
+  <p:clrMapOvr>
+    <a:masterClrMapping xmlns:a="http://schemas.openxmlformats.org/drawingml/2006/main"/>
+  </p:clrMapOvr>
+</p:notes>
+</file>
+
 <file path=ppt/notesSlides/notesSlide2.xml><?xml version="1.0" encoding="utf-8"?>
 <p:notes xmlns:p="http://schemas.openxmlformats.org/presentationml/2006/main">
   <p:cSld>
@@ -1974,7 +2322,7 @@
   </p:cSld>
   <p:clrMap bg1="lt1" tx1="dk1" bg2="lt2" tx2="dk2" accent1="accent1" accent2="accent2" accent3="accent3" accent4="accent4" accent5="accent5" accent6="accent6" hlink="hlink" folHlink="folHlink"/>
   <p:sldLayoutIdLst>
-    <p:sldLayoutId xmlns:r="http://schemas.openxmlformats.org/officeDocument/2006/relationships" id="2147483649" r:id="R4e1969d6e6df42c9"/>
+    <p:sldLayoutId xmlns:r="http://schemas.openxmlformats.org/officeDocument/2006/relationships" id="2147483649" r:id="Redcc21befc3e4c75"/>
   </p:sldLayoutIdLst>
   <p:txStyles>
     <p:titleStyle>
@@ -2502,7 +2850,7 @@
 </file>
 
 <file path=ppt/slides/charts/chart1.xml><?xml version="1.0" encoding="utf-8"?>
-<c:chartSpace xmlns:c="http://schemas.openxmlformats.org/drawingml/2006/chart">
+<c:chartSpace xmlns:c="http://schemas.openxmlformats.org/drawingml/2006/chart" xmlns:r="http://schemas.openxmlformats.org/officeDocument/2006/relationships">
   <c:lang val="en-US"/>
   <c:chart>
     <c:plotArea>
@@ -2549,33 +2897,39 @@
             </c:spPr>
           </c:dPt>
           <c:cat>
-            <c:strLit>
-              <c:ptCount val="3"/>
-              <c:pt idx="0">
-                <c:v>Complete</c:v>
-              </c:pt>
-              <c:pt idx="1">
-                <c:v>In progress</c:v>
-              </c:pt>
-              <c:pt idx="2">
-                <c:v>Not started</c:v>
-              </c:pt>
-            </c:strLit>
+            <c:strRef>
+              <c:f>'Chart Data'!$A$2:$A$4</c:f>
+              <c:strCache>
+                <c:ptCount val="3"/>
+                <c:pt idx="0">
+                  <c:v>Complete</c:v>
+                </c:pt>
+                <c:pt idx="1">
+                  <c:v>In progress</c:v>
+                </c:pt>
+                <c:pt idx="2">
+                  <c:v>Not started</c:v>
+                </c:pt>
+              </c:strCache>
+            </c:strRef>
           </c:cat>
           <c:val>
-            <c:numLit>
-              <c:formatCode>#,##0</c:formatCode>
-              <c:ptCount val="3"/>
-              <c:pt idx="0">
-                <c:v>276</c:v>
-              </c:pt>
-              <c:pt idx="1">
-                <c:v>9</c:v>
-              </c:pt>
-              <c:pt idx="2">
-                <c:v>921</c:v>
-              </c:pt>
-            </c:numLit>
+            <c:numRef>
+              <c:f>'Chart Data'!$B$2:$B$4</c:f>
+              <c:numCache>
+                <c:formatCode>#,##0</c:formatCode>
+                <c:ptCount val="3"/>
+                <c:pt idx="0">
+                  <c:v>276</c:v>
+                </c:pt>
+                <c:pt idx="1">
+                  <c:v>9</c:v>
+                </c:pt>
+                <c:pt idx="2">
+                  <c:v>921</c:v>
+                </c:pt>
+              </c:numCache>
+            </c:numRef>
           </c:val>
         </c:ser>
         <c:dLbls>
@@ -2697,11 +3051,14 @@
       <a:noFill/>
     </a:ln>
   </c:spPr>
+  <c:externalData r:id="rIdChartSnapshot1">
+    <c:autoUpdate val="0"/>
+  </c:externalData>
 </c:chartSpace>
 </file>
 
 <file path=ppt/slides/charts/chart2.xml><?xml version="1.0" encoding="utf-8"?>
-<c:chartSpace xmlns:c="http://schemas.openxmlformats.org/drawingml/2006/chart">
+<c:chartSpace xmlns:c="http://schemas.openxmlformats.org/drawingml/2006/chart" xmlns:r="http://schemas.openxmlformats.org/officeDocument/2006/relationships">
   <c:lang val="en-US"/>
   <c:chart>
     <c:plotArea>
@@ -2748,33 +3105,39 @@
             </c:spPr>
           </c:dPt>
           <c:cat>
-            <c:strLit>
-              <c:ptCount val="3"/>
-              <c:pt idx="0">
-                <c:v>PV</c:v>
-              </c:pt>
-              <c:pt idx="1">
-                <c:v>EV</c:v>
-              </c:pt>
-              <c:pt idx="2">
-                <c:v>AC</c:v>
-              </c:pt>
-            </c:strLit>
+            <c:strRef>
+              <c:f>'Chart Data'!$A$2:$A$4</c:f>
+              <c:strCache>
+                <c:ptCount val="3"/>
+                <c:pt idx="0">
+                  <c:v>PV</c:v>
+                </c:pt>
+                <c:pt idx="1">
+                  <c:v>EV</c:v>
+                </c:pt>
+                <c:pt idx="2">
+                  <c:v>AC</c:v>
+                </c:pt>
+              </c:strCache>
+            </c:strRef>
           </c:cat>
           <c:val>
-            <c:numLit>
-              <c:formatCode>0.0</c:formatCode>
-              <c:ptCount val="3"/>
-              <c:pt idx="0">
-                <c:v>923.04233</c:v>
-              </c:pt>
-              <c:pt idx="1">
-                <c:v>927.47692</c:v>
-              </c:pt>
-              <c:pt idx="2">
-                <c:v>940.04233</c:v>
-              </c:pt>
-            </c:numLit>
+            <c:numRef>
+              <c:f>'Chart Data'!$B$2:$B$4</c:f>
+              <c:numCache>
+                <c:formatCode>0.0</c:formatCode>
+                <c:ptCount val="3"/>
+                <c:pt idx="0">
+                  <c:v>923.04233</c:v>
+                </c:pt>
+                <c:pt idx="1">
+                  <c:v>927.47692</c:v>
+                </c:pt>
+                <c:pt idx="2">
+                  <c:v>940.04233</c:v>
+                </c:pt>
+              </c:numCache>
+            </c:numRef>
           </c:val>
         </c:ser>
         <c:dLbls>
@@ -2896,11 +3259,14 @@
       <a:noFill/>
     </a:ln>
   </c:spPr>
+  <c:externalData r:id="rIdChartSnapshot1">
+    <c:autoUpdate val="0"/>
+  </c:externalData>
 </c:chartSpace>
 </file>
 
 <file path=ppt/slides/charts/chart3.xml><?xml version="1.0" encoding="utf-8"?>
-<c:chartSpace xmlns:c="http://schemas.openxmlformats.org/drawingml/2006/chart">
+<c:chartSpace xmlns:c="http://schemas.openxmlformats.org/drawingml/2006/chart" xmlns:r="http://schemas.openxmlformats.org/officeDocument/2006/relationships">
   <c:lang val="en-US"/>
   <c:chart>
     <c:plotArea>
@@ -2920,27 +3286,33 @@
             </a:solidFill>
           </c:spPr>
           <c:cat>
-            <c:strLit>
-              <c:ptCount val="2"/>
-              <c:pt idx="0">
-                <c:v>CIV-013</c:v>
-              </c:pt>
-              <c:pt idx="1">
-                <c:v>CIV-017</c:v>
-              </c:pt>
-            </c:strLit>
+            <c:strRef>
+              <c:f>'Chart Data'!$A$2:$A$3</c:f>
+              <c:strCache>
+                <c:ptCount val="2"/>
+                <c:pt idx="0">
+                  <c:v>CIV-013</c:v>
+                </c:pt>
+                <c:pt idx="1">
+                  <c:v>CIV-017</c:v>
+                </c:pt>
+              </c:strCache>
+            </c:strRef>
           </c:cat>
           <c:val>
-            <c:numLit>
-              <c:formatCode>#,##0</c:formatCode>
-              <c:ptCount val="2"/>
-              <c:pt idx="0">
-                <c:v>53368</c:v>
-              </c:pt>
-              <c:pt idx="1">
-                <c:v>63022</c:v>
-              </c:pt>
-            </c:numLit>
+            <c:numRef>
+              <c:f>'Chart Data'!$B$2:$B$3</c:f>
+              <c:numCache>
+                <c:formatCode>#,##0</c:formatCode>
+                <c:ptCount val="2"/>
+                <c:pt idx="0">
+                  <c:v>53368</c:v>
+                </c:pt>
+                <c:pt idx="1">
+                  <c:v>63022</c:v>
+                </c:pt>
+              </c:numCache>
+            </c:numRef>
           </c:val>
         </c:ser>
         <c:ser>
@@ -2955,27 +3327,33 @@
             </a:solidFill>
           </c:spPr>
           <c:cat>
-            <c:strLit>
-              <c:ptCount val="2"/>
-              <c:pt idx="0">
-                <c:v>CIV-013</c:v>
-              </c:pt>
-              <c:pt idx="1">
-                <c:v>CIV-017</c:v>
-              </c:pt>
-            </c:strLit>
+            <c:strRef>
+              <c:f>'Chart Data'!$C$2:$C$3</c:f>
+              <c:strCache>
+                <c:ptCount val="2"/>
+                <c:pt idx="0">
+                  <c:v>CIV-013</c:v>
+                </c:pt>
+                <c:pt idx="1">
+                  <c:v>CIV-017</c:v>
+                </c:pt>
+              </c:strCache>
+            </c:strRef>
           </c:cat>
           <c:val>
-            <c:numLit>
-              <c:formatCode>#,##0</c:formatCode>
-              <c:ptCount val="2"/>
-              <c:pt idx="0">
-                <c:v>60868</c:v>
-              </c:pt>
-              <c:pt idx="1">
-                <c:v>72522</c:v>
-              </c:pt>
-            </c:numLit>
+            <c:numRef>
+              <c:f>'Chart Data'!$D$2:$D$3</c:f>
+              <c:numCache>
+                <c:formatCode>#,##0</c:formatCode>
+                <c:ptCount val="2"/>
+                <c:pt idx="0">
+                  <c:v>60868</c:v>
+                </c:pt>
+                <c:pt idx="1">
+                  <c:v>72522</c:v>
+                </c:pt>
+              </c:numCache>
+            </c:numRef>
           </c:val>
         </c:ser>
         <c:dLbls>
@@ -3114,11 +3492,14 @@
       <a:noFill/>
     </a:ln>
   </c:spPr>
+  <c:externalData r:id="rIdChartSnapshot1">
+    <c:autoUpdate val="0"/>
+  </c:externalData>
 </c:chartSpace>
 </file>
 
 <file path=ppt/slides/charts/chart4.xml><?xml version="1.0" encoding="utf-8"?>
-<c:chartSpace xmlns:c="http://schemas.openxmlformats.org/drawingml/2006/chart">
+<c:chartSpace xmlns:c="http://schemas.openxmlformats.org/drawingml/2006/chart" xmlns:r="http://schemas.openxmlformats.org/officeDocument/2006/relationships">
   <c:lang val="en-US"/>
   <c:chart>
     <c:plotArea>
@@ -3165,33 +3546,39 @@
             </c:spPr>
           </c:dPt>
           <c:cat>
-            <c:strLit>
-              <c:ptCount val="3"/>
-              <c:pt idx="0">
-                <c:v>Labor crews</c:v>
-              </c:pt>
-              <c:pt idx="1">
-                <c:v>Equipment</c:v>
-              </c:pt>
-              <c:pt idx="2">
-                <c:v>Materials</c:v>
-              </c:pt>
-            </c:strLit>
+            <c:strRef>
+              <c:f>'Chart Data'!$A$2:$A$4</c:f>
+              <c:strCache>
+                <c:ptCount val="3"/>
+                <c:pt idx="0">
+                  <c:v>Labor crews</c:v>
+                </c:pt>
+                <c:pt idx="1">
+                  <c:v>Equipment</c:v>
+                </c:pt>
+                <c:pt idx="2">
+                  <c:v>Materials</c:v>
+                </c:pt>
+              </c:strCache>
+            </c:strRef>
           </c:cat>
           <c:val>
-            <c:numLit>
-              <c:formatCode>#,##0</c:formatCode>
-              <c:ptCount val="3"/>
-              <c:pt idx="0">
-                <c:v>19</c:v>
-              </c:pt>
-              <c:pt idx="1">
-                <c:v>4</c:v>
-              </c:pt>
-              <c:pt idx="2">
-                <c:v>10</c:v>
-              </c:pt>
-            </c:numLit>
+            <c:numRef>
+              <c:f>'Chart Data'!$B$2:$B$4</c:f>
+              <c:numCache>
+                <c:formatCode>#,##0</c:formatCode>
+                <c:ptCount val="3"/>
+                <c:pt idx="0">
+                  <c:v>19</c:v>
+                </c:pt>
+                <c:pt idx="1">
+                  <c:v>4</c:v>
+                </c:pt>
+                <c:pt idx="2">
+                  <c:v>10</c:v>
+                </c:pt>
+              </c:numCache>
+            </c:numRef>
           </c:val>
         </c:ser>
         <c:dLbls>
@@ -3313,6 +3700,9 @@
       <a:noFill/>
     </a:ln>
   </c:spPr>
+  <c:externalData r:id="rIdChartSnapshot1">
+    <c:autoUpdate val="0"/>
+  </c:externalData>
 </c:chartSpace>
 </file>
 
@@ -3369,6 +3759,7 @@
           <a:lstStyle xmlns:a="http://schemas.openxmlformats.org/drawingml/2006/main"/>
           <a:p xmlns:a="http://schemas.openxmlformats.org/drawingml/2006/main">
             <a:pPr algn="l">
+              <a:buNone/>
               <a:defRPr sz="2250" b="1">
                 <a:solidFill>
                   <a:srgbClr val="111111"/>
@@ -3426,6 +3817,7 @@
           <a:lstStyle xmlns:a="http://schemas.openxmlformats.org/drawingml/2006/main"/>
           <a:p xmlns:a="http://schemas.openxmlformats.org/drawingml/2006/main">
             <a:pPr algn="l">
+              <a:buNone/>
               <a:defRPr sz="1650" b="0">
                 <a:solidFill>
                   <a:srgbClr val="2563EB"/>
@@ -3483,6 +3875,7 @@
           <a:lstStyle xmlns:a="http://schemas.openxmlformats.org/drawingml/2006/main"/>
           <a:p xmlns:a="http://schemas.openxmlformats.org/drawingml/2006/main">
             <a:pPr algn="l">
+              <a:buNone/>
               <a:defRPr sz="6600" b="1">
                 <a:solidFill>
                   <a:srgbClr val="111111"/>
@@ -3506,6 +3899,7 @@
           </a:p>
           <a:p xmlns:a="http://schemas.openxmlformats.org/drawingml/2006/main">
             <a:pPr algn="l">
+              <a:buNone/>
               <a:defRPr sz="6600" b="1">
                 <a:solidFill>
                   <a:srgbClr val="111111"/>
@@ -3594,6 +3988,7 @@
           <a:lstStyle xmlns:a="http://schemas.openxmlformats.org/drawingml/2006/main"/>
           <a:p xmlns:a="http://schemas.openxmlformats.org/drawingml/2006/main">
             <a:pPr algn="l">
+              <a:buNone/>
               <a:defRPr sz="2400" b="0">
                 <a:solidFill>
                   <a:srgbClr val="111111"/>
@@ -3651,6 +4046,7 @@
           <a:lstStyle xmlns:a="http://schemas.openxmlformats.org/drawingml/2006/main"/>
           <a:p xmlns:a="http://schemas.openxmlformats.org/drawingml/2006/main">
             <a:pPr algn="l">
+              <a:buNone/>
               <a:defRPr sz="1800" b="0">
                 <a:solidFill>
                   <a:srgbClr val="565E68"/>
@@ -3708,6 +4104,7 @@
           <a:lstStyle xmlns:a="http://schemas.openxmlformats.org/drawingml/2006/main"/>
           <a:p xmlns:a="http://schemas.openxmlformats.org/drawingml/2006/main">
             <a:pPr algn="l">
+              <a:buNone/>
               <a:defRPr sz="1275" b="0">
                 <a:solidFill>
                   <a:srgbClr val="565E68"/>
@@ -3794,6 +4191,7 @@
           <a:lstStyle xmlns:a="http://schemas.openxmlformats.org/drawingml/2006/main"/>
           <a:p xmlns:a="http://schemas.openxmlformats.org/drawingml/2006/main">
             <a:pPr algn="l">
+              <a:buNone/>
               <a:defRPr sz="1275" b="1">
                 <a:solidFill>
                   <a:srgbClr val="2563EB"/>
@@ -3851,6 +4249,7 @@
           <a:lstStyle xmlns:a="http://schemas.openxmlformats.org/drawingml/2006/main"/>
           <a:p xmlns:a="http://schemas.openxmlformats.org/drawingml/2006/main">
             <a:pPr algn="l">
+              <a:buNone/>
               <a:defRPr sz="3600" b="1">
                 <a:solidFill>
                   <a:srgbClr val="111111"/>
@@ -3939,6 +4338,7 @@
           <a:lstStyle xmlns:a="http://schemas.openxmlformats.org/drawingml/2006/main"/>
           <a:p xmlns:a="http://schemas.openxmlformats.org/drawingml/2006/main">
             <a:pPr algn="l">
+              <a:buNone/>
               <a:defRPr sz="975" b="0">
                 <a:solidFill>
                   <a:srgbClr val="565E68"/>
@@ -3996,6 +4396,7 @@
           <a:lstStyle xmlns:a="http://schemas.openxmlformats.org/drawingml/2006/main"/>
           <a:p xmlns:a="http://schemas.openxmlformats.org/drawingml/2006/main">
             <a:pPr algn="r">
+              <a:buNone/>
               <a:defRPr sz="975" b="0">
                 <a:solidFill>
                   <a:srgbClr val="565E68"/>
@@ -4053,6 +4454,7 @@
           <a:lstStyle xmlns:a="http://schemas.openxmlformats.org/drawingml/2006/main"/>
           <a:p xmlns:a="http://schemas.openxmlformats.org/drawingml/2006/main">
             <a:pPr algn="r">
+              <a:buNone/>
               <a:defRPr sz="1350" b="0">
                 <a:solidFill>
                   <a:srgbClr val="111111"/>
@@ -4110,6 +4512,7 @@
           <a:lstStyle xmlns:a="http://schemas.openxmlformats.org/drawingml/2006/main"/>
           <a:p xmlns:a="http://schemas.openxmlformats.org/drawingml/2006/main">
             <a:pPr algn="l">
+              <a:buNone/>
               <a:defRPr sz="1650" b="0">
                 <a:solidFill>
                   <a:srgbClr val="565E68"/>
@@ -4135,7 +4538,7 @@
       </p:sp>
       <p:graphicFrame>
         <p:nvGraphicFramePr>
-          <p:cNvPr id="21" name="Chart"/>
+          <p:cNvPr id="23" name="Chart"/>
           <p:cNvGraphicFramePr/>
           <p:nvPr/>
         </p:nvGraphicFramePr>
@@ -4145,7 +4548,7 @@
         </p:xfrm>
         <a:graphic xmlns:a="http://schemas.openxmlformats.org/drawingml/2006/main">
           <a:graphicData uri="http://schemas.openxmlformats.org/drawingml/2006/chart">
-            <c:chart xmlns:r="http://schemas.openxmlformats.org/officeDocument/2006/relationships" xmlns:c="http://schemas.openxmlformats.org/drawingml/2006/chart" r:id="R7f58312e5b4840ea"/>
+            <c:chart xmlns:r="http://schemas.openxmlformats.org/officeDocument/2006/relationships" xmlns:c="http://schemas.openxmlformats.org/drawingml/2006/chart" r:id="R65ee3b142f1449a9"/>
           </a:graphicData>
         </a:graphic>
       </p:graphicFrame>
@@ -4183,6 +4586,7 @@
           <a:lstStyle xmlns:a="http://schemas.openxmlformats.org/drawingml/2006/main"/>
           <a:p xmlns:a="http://schemas.openxmlformats.org/drawingml/2006/main">
             <a:pPr algn="l">
+              <a:buNone/>
               <a:defRPr sz="6150" b="1">
                 <a:solidFill>
                   <a:srgbClr val="111111"/>
@@ -4240,6 +4644,7 @@
           <a:lstStyle xmlns:a="http://schemas.openxmlformats.org/drawingml/2006/main"/>
           <a:p xmlns:a="http://schemas.openxmlformats.org/drawingml/2006/main">
             <a:pPr algn="l">
+              <a:buNone/>
               <a:defRPr sz="1650" b="0">
                 <a:solidFill>
                   <a:srgbClr val="565E68"/>
@@ -4297,6 +4702,7 @@
           <a:lstStyle xmlns:a="http://schemas.openxmlformats.org/drawingml/2006/main"/>
           <a:p xmlns:a="http://schemas.openxmlformats.org/drawingml/2006/main">
             <a:pPr algn="l">
+              <a:buNone/>
               <a:defRPr sz="6150" b="1">
                 <a:solidFill>
                   <a:srgbClr val="111111"/>
@@ -4354,6 +4760,7 @@
           <a:lstStyle xmlns:a="http://schemas.openxmlformats.org/drawingml/2006/main"/>
           <a:p xmlns:a="http://schemas.openxmlformats.org/drawingml/2006/main">
             <a:pPr algn="l">
+              <a:buNone/>
               <a:defRPr sz="1725" b="0">
                 <a:solidFill>
                   <a:srgbClr val="565E68"/>
@@ -4377,6 +4784,7 @@
           </a:p>
           <a:p xmlns:a="http://schemas.openxmlformats.org/drawingml/2006/main">
             <a:pPr algn="l">
+              <a:buNone/>
               <a:defRPr sz="1725" b="0">
                 <a:solidFill>
                   <a:srgbClr val="565E68"/>
@@ -4434,6 +4842,7 @@
           <a:lstStyle xmlns:a="http://schemas.openxmlformats.org/drawingml/2006/main"/>
           <a:p xmlns:a="http://schemas.openxmlformats.org/drawingml/2006/main">
             <a:pPr algn="l">
+              <a:buNone/>
               <a:defRPr sz="1650" b="0">
                 <a:solidFill>
                   <a:srgbClr val="565E68"/>
@@ -4520,6 +4929,7 @@
           <a:lstStyle xmlns:a="http://schemas.openxmlformats.org/drawingml/2006/main"/>
           <a:p xmlns:a="http://schemas.openxmlformats.org/drawingml/2006/main">
             <a:pPr algn="l">
+              <a:buNone/>
               <a:defRPr sz="1275" b="1">
                 <a:solidFill>
                   <a:srgbClr val="2563EB"/>
@@ -4577,6 +4987,7 @@
           <a:lstStyle xmlns:a="http://schemas.openxmlformats.org/drawingml/2006/main"/>
           <a:p xmlns:a="http://schemas.openxmlformats.org/drawingml/2006/main">
             <a:pPr algn="l">
+              <a:buNone/>
               <a:defRPr sz="3600" b="1">
                 <a:solidFill>
                   <a:srgbClr val="111111"/>
@@ -4665,6 +5076,7 @@
           <a:lstStyle xmlns:a="http://schemas.openxmlformats.org/drawingml/2006/main"/>
           <a:p xmlns:a="http://schemas.openxmlformats.org/drawingml/2006/main">
             <a:pPr algn="l">
+              <a:buNone/>
               <a:defRPr sz="975" b="0">
                 <a:solidFill>
                   <a:srgbClr val="565E68"/>
@@ -4722,6 +5134,7 @@
           <a:lstStyle xmlns:a="http://schemas.openxmlformats.org/drawingml/2006/main"/>
           <a:p xmlns:a="http://schemas.openxmlformats.org/drawingml/2006/main">
             <a:pPr algn="r">
+              <a:buNone/>
               <a:defRPr sz="975" b="0">
                 <a:solidFill>
                   <a:srgbClr val="565E68"/>
@@ -4779,6 +5192,7 @@
           <a:lstStyle xmlns:a="http://schemas.openxmlformats.org/drawingml/2006/main"/>
           <a:p xmlns:a="http://schemas.openxmlformats.org/drawingml/2006/main">
             <a:pPr algn="r">
+              <a:buNone/>
               <a:defRPr sz="1350" b="0">
                 <a:solidFill>
                   <a:srgbClr val="111111"/>
@@ -4836,6 +5250,7 @@
           <a:lstStyle xmlns:a="http://schemas.openxmlformats.org/drawingml/2006/main"/>
           <a:p xmlns:a="http://schemas.openxmlformats.org/drawingml/2006/main">
             <a:pPr algn="l">
+              <a:buNone/>
               <a:defRPr sz="2400" b="1">
                 <a:solidFill>
                   <a:srgbClr val="111111"/>
@@ -4893,6 +5308,7 @@
           <a:lstStyle xmlns:a="http://schemas.openxmlformats.org/drawingml/2006/main"/>
           <a:p xmlns:a="http://schemas.openxmlformats.org/drawingml/2006/main">
             <a:pPr algn="r">
+              <a:buNone/>
               <a:defRPr sz="2400" b="1">
                 <a:solidFill>
                   <a:srgbClr val="2563EB"/>
@@ -4950,6 +5366,7 @@
           <a:lstStyle xmlns:a="http://schemas.openxmlformats.org/drawingml/2006/main"/>
           <a:p xmlns:a="http://schemas.openxmlformats.org/drawingml/2006/main">
             <a:pPr algn="l">
+              <a:buNone/>
               <a:defRPr sz="1875" b="0">
                 <a:solidFill>
                   <a:srgbClr val="565E68"/>
@@ -4975,7 +5392,7 @@
       </p:sp>
       <p:graphicFrame>
         <p:nvGraphicFramePr>
-          <p:cNvPr id="21" name=""/>
+          <p:cNvPr id="23" name=""/>
           <p:cNvGraphicFramePr/>
           <p:nvPr/>
         </p:nvGraphicFramePr>
@@ -5411,6 +5828,7 @@
           <a:lstStyle xmlns:a="http://schemas.openxmlformats.org/drawingml/2006/main"/>
           <a:p xmlns:a="http://schemas.openxmlformats.org/drawingml/2006/main">
             <a:pPr algn="l">
+              <a:buNone/>
               <a:defRPr sz="1950" b="0">
                 <a:solidFill>
                   <a:srgbClr val="565E68"/>
@@ -5497,6 +5915,7 @@
           <a:lstStyle xmlns:a="http://schemas.openxmlformats.org/drawingml/2006/main"/>
           <a:p xmlns:a="http://schemas.openxmlformats.org/drawingml/2006/main">
             <a:pPr algn="l">
+              <a:buNone/>
               <a:defRPr sz="1275" b="1">
                 <a:solidFill>
                   <a:srgbClr val="2563EB"/>
@@ -5554,6 +5973,7 @@
           <a:lstStyle xmlns:a="http://schemas.openxmlformats.org/drawingml/2006/main"/>
           <a:p xmlns:a="http://schemas.openxmlformats.org/drawingml/2006/main">
             <a:pPr algn="l">
+              <a:buNone/>
               <a:defRPr sz="3600" b="1">
                 <a:solidFill>
                   <a:srgbClr val="111111"/>
@@ -5642,6 +6062,7 @@
           <a:lstStyle xmlns:a="http://schemas.openxmlformats.org/drawingml/2006/main"/>
           <a:p xmlns:a="http://schemas.openxmlformats.org/drawingml/2006/main">
             <a:pPr algn="l">
+              <a:buNone/>
               <a:defRPr sz="975" b="0">
                 <a:solidFill>
                   <a:srgbClr val="565E68"/>
@@ -5699,6 +6120,7 @@
           <a:lstStyle xmlns:a="http://schemas.openxmlformats.org/drawingml/2006/main"/>
           <a:p xmlns:a="http://schemas.openxmlformats.org/drawingml/2006/main">
             <a:pPr algn="r">
+              <a:buNone/>
               <a:defRPr sz="975" b="0">
                 <a:solidFill>
                   <a:srgbClr val="565E68"/>
@@ -5756,6 +6178,7 @@
           <a:lstStyle xmlns:a="http://schemas.openxmlformats.org/drawingml/2006/main"/>
           <a:p xmlns:a="http://schemas.openxmlformats.org/drawingml/2006/main">
             <a:pPr algn="r">
+              <a:buNone/>
               <a:defRPr sz="1350" b="0">
                 <a:solidFill>
                   <a:srgbClr val="111111"/>
@@ -5781,7 +6204,7 @@
       </p:sp>
       <p:graphicFrame>
         <p:nvGraphicFramePr>
-          <p:cNvPr id="15" name=""/>
+          <p:cNvPr id="17" name=""/>
           <p:cNvGraphicFramePr/>
           <p:nvPr/>
         </p:nvGraphicFramePr>
@@ -6280,6 +6703,7 @@
           <a:lstStyle xmlns:a="http://schemas.openxmlformats.org/drawingml/2006/main"/>
           <a:p xmlns:a="http://schemas.openxmlformats.org/drawingml/2006/main">
             <a:pPr algn="l">
+              <a:buNone/>
               <a:defRPr sz="1650" b="0">
                 <a:solidFill>
                   <a:srgbClr val="565E68"/>
@@ -6366,6 +6790,7 @@
           <a:lstStyle xmlns:a="http://schemas.openxmlformats.org/drawingml/2006/main"/>
           <a:p xmlns:a="http://schemas.openxmlformats.org/drawingml/2006/main">
             <a:pPr algn="l">
+              <a:buNone/>
               <a:defRPr sz="1275" b="1">
                 <a:solidFill>
                   <a:srgbClr val="2563EB"/>
@@ -6423,6 +6848,7 @@
           <a:lstStyle xmlns:a="http://schemas.openxmlformats.org/drawingml/2006/main"/>
           <a:p xmlns:a="http://schemas.openxmlformats.org/drawingml/2006/main">
             <a:pPr algn="l">
+              <a:buNone/>
               <a:defRPr sz="3600" b="1">
                 <a:solidFill>
                   <a:srgbClr val="111111"/>
@@ -6511,6 +6937,7 @@
           <a:lstStyle xmlns:a="http://schemas.openxmlformats.org/drawingml/2006/main"/>
           <a:p xmlns:a="http://schemas.openxmlformats.org/drawingml/2006/main">
             <a:pPr algn="l">
+              <a:buNone/>
               <a:defRPr sz="975" b="0">
                 <a:solidFill>
                   <a:srgbClr val="565E68"/>
@@ -6568,6 +6995,7 @@
           <a:lstStyle xmlns:a="http://schemas.openxmlformats.org/drawingml/2006/main"/>
           <a:p xmlns:a="http://schemas.openxmlformats.org/drawingml/2006/main">
             <a:pPr algn="r">
+              <a:buNone/>
               <a:defRPr sz="975" b="0">
                 <a:solidFill>
                   <a:srgbClr val="565E68"/>
@@ -6625,6 +7053,7 @@
           <a:lstStyle xmlns:a="http://schemas.openxmlformats.org/drawingml/2006/main"/>
           <a:p xmlns:a="http://schemas.openxmlformats.org/drawingml/2006/main">
             <a:pPr algn="r">
+              <a:buNone/>
               <a:defRPr sz="1350" b="0">
                 <a:solidFill>
                   <a:srgbClr val="111111"/>
@@ -6682,6 +7111,7 @@
           <a:lstStyle xmlns:a="http://schemas.openxmlformats.org/drawingml/2006/main"/>
           <a:p xmlns:a="http://schemas.openxmlformats.org/drawingml/2006/main">
             <a:pPr algn="l">
+              <a:buNone/>
               <a:defRPr sz="5250" b="1">
                 <a:solidFill>
                   <a:srgbClr val="2563EB"/>
@@ -6770,6 +7200,7 @@
           <a:lstStyle xmlns:a="http://schemas.openxmlformats.org/drawingml/2006/main"/>
           <a:p xmlns:a="http://schemas.openxmlformats.org/drawingml/2006/main">
             <a:pPr algn="l">
+              <a:buNone/>
               <a:defRPr sz="2400" b="1">
                 <a:solidFill>
                   <a:srgbClr val="111111"/>
@@ -6827,6 +7258,7 @@
           <a:lstStyle xmlns:a="http://schemas.openxmlformats.org/drawingml/2006/main"/>
           <a:p xmlns:a="http://schemas.openxmlformats.org/drawingml/2006/main">
             <a:pPr algn="l">
+              <a:buNone/>
               <a:defRPr sz="1950" b="0">
                 <a:solidFill>
                   <a:srgbClr val="565E68"/>
@@ -6884,6 +7316,7 @@
           <a:lstStyle xmlns:a="http://schemas.openxmlformats.org/drawingml/2006/main"/>
           <a:p xmlns:a="http://schemas.openxmlformats.org/drawingml/2006/main">
             <a:pPr algn="l">
+              <a:buNone/>
               <a:defRPr sz="5250" b="1">
                 <a:solidFill>
                   <a:srgbClr val="2563EB"/>
@@ -6972,6 +7405,7 @@
           <a:lstStyle xmlns:a="http://schemas.openxmlformats.org/drawingml/2006/main"/>
           <a:p xmlns:a="http://schemas.openxmlformats.org/drawingml/2006/main">
             <a:pPr algn="l">
+              <a:buNone/>
               <a:defRPr sz="2400" b="1">
                 <a:solidFill>
                   <a:srgbClr val="111111"/>
@@ -7029,6 +7463,7 @@
           <a:lstStyle xmlns:a="http://schemas.openxmlformats.org/drawingml/2006/main"/>
           <a:p xmlns:a="http://schemas.openxmlformats.org/drawingml/2006/main">
             <a:pPr algn="l">
+              <a:buNone/>
               <a:defRPr sz="1950" b="0">
                 <a:solidFill>
                   <a:srgbClr val="565E68"/>
@@ -7086,6 +7521,7 @@
           <a:lstStyle xmlns:a="http://schemas.openxmlformats.org/drawingml/2006/main"/>
           <a:p xmlns:a="http://schemas.openxmlformats.org/drawingml/2006/main">
             <a:pPr algn="l">
+              <a:buNone/>
               <a:defRPr sz="5250" b="1">
                 <a:solidFill>
                   <a:srgbClr val="2563EB"/>
@@ -7174,6 +7610,7 @@
           <a:lstStyle xmlns:a="http://schemas.openxmlformats.org/drawingml/2006/main"/>
           <a:p xmlns:a="http://schemas.openxmlformats.org/drawingml/2006/main">
             <a:pPr algn="l">
+              <a:buNone/>
               <a:defRPr sz="2400" b="1">
                 <a:solidFill>
                   <a:srgbClr val="111111"/>
@@ -7231,6 +7668,7 @@
           <a:lstStyle xmlns:a="http://schemas.openxmlformats.org/drawingml/2006/main"/>
           <a:p xmlns:a="http://schemas.openxmlformats.org/drawingml/2006/main">
             <a:pPr algn="l">
+              <a:buNone/>
               <a:defRPr sz="1950" b="0">
                 <a:solidFill>
                   <a:srgbClr val="565E68"/>
@@ -7317,6 +7755,7 @@
           <a:lstStyle xmlns:a="http://schemas.openxmlformats.org/drawingml/2006/main"/>
           <a:p xmlns:a="http://schemas.openxmlformats.org/drawingml/2006/main">
             <a:pPr algn="l">
+              <a:buNone/>
               <a:defRPr sz="1275" b="1">
                 <a:solidFill>
                   <a:srgbClr val="2563EB"/>
@@ -7374,6 +7813,7 @@
           <a:lstStyle xmlns:a="http://schemas.openxmlformats.org/drawingml/2006/main"/>
           <a:p xmlns:a="http://schemas.openxmlformats.org/drawingml/2006/main">
             <a:pPr algn="l">
+              <a:buNone/>
               <a:defRPr sz="3600" b="1">
                 <a:solidFill>
                   <a:srgbClr val="111111"/>
@@ -7462,6 +7902,7 @@
           <a:lstStyle xmlns:a="http://schemas.openxmlformats.org/drawingml/2006/main"/>
           <a:p xmlns:a="http://schemas.openxmlformats.org/drawingml/2006/main">
             <a:pPr algn="l">
+              <a:buNone/>
               <a:defRPr sz="975" b="0">
                 <a:solidFill>
                   <a:srgbClr val="565E68"/>
@@ -7519,6 +7960,7 @@
           <a:lstStyle xmlns:a="http://schemas.openxmlformats.org/drawingml/2006/main"/>
           <a:p xmlns:a="http://schemas.openxmlformats.org/drawingml/2006/main">
             <a:pPr algn="r">
+              <a:buNone/>
               <a:defRPr sz="975" b="0">
                 <a:solidFill>
                   <a:srgbClr val="565E68"/>
@@ -7576,6 +8018,7 @@
           <a:lstStyle xmlns:a="http://schemas.openxmlformats.org/drawingml/2006/main"/>
           <a:p xmlns:a="http://schemas.openxmlformats.org/drawingml/2006/main">
             <a:pPr algn="r">
+              <a:buNone/>
               <a:defRPr sz="1350" b="0">
                 <a:solidFill>
                   <a:srgbClr val="111111"/>
@@ -7633,6 +8076,7 @@
           <a:lstStyle xmlns:a="http://schemas.openxmlformats.org/drawingml/2006/main"/>
           <a:p xmlns:a="http://schemas.openxmlformats.org/drawingml/2006/main">
             <a:pPr algn="l">
+              <a:buNone/>
               <a:defRPr sz="2400" b="1">
                 <a:solidFill>
                   <a:srgbClr val="111111"/>
@@ -7690,6 +8134,7 @@
           <a:lstStyle xmlns:a="http://schemas.openxmlformats.org/drawingml/2006/main"/>
           <a:p xmlns:a="http://schemas.openxmlformats.org/drawingml/2006/main">
             <a:pPr algn="l">
+              <a:buNone/>
               <a:defRPr sz="1650" b="0">
                 <a:solidFill>
                   <a:srgbClr val="565E68"/>
@@ -7715,15 +8160,15 @@
       </p:sp>
       <p:pic>
         <p:nvPicPr>
-          <p:cNvPr id="22" name=""/>
+          <p:cNvPr id="24" name=""/>
           <p:cNvPicPr>
             <a:picLocks xmlns:a="http://schemas.openxmlformats.org/drawingml/2006/main" noChangeAspect="1"/>
           </p:cNvPicPr>
           <p:nvPr/>
         </p:nvPicPr>
         <p:blipFill>
-          <a:blip xmlns:r="http://schemas.openxmlformats.org/officeDocument/2006/relationships" xmlns:a="http://schemas.openxmlformats.org/drawingml/2006/main" r:embed="Rc949578ce61f4198"/>
-          <ns0:srcRect xmlns:ns0="http://schemas.openxmlformats.org/drawingml/2006/main" l="13462" t="60000" r="67872" b="0"/>
+          <a:blip xmlns:r="http://schemas.openxmlformats.org/officeDocument/2006/relationships" xmlns:a="http://schemas.openxmlformats.org/drawingml/2006/main" r:embed="R5c3f85f17fb44d96"/>
+          <a:srcRect xmlns:a="http://schemas.openxmlformats.org/drawingml/2006/main" l="13462" t="60000" r="67872" b="0"/>
           <a:stretch xmlns:a="http://schemas.openxmlformats.org/drawingml/2006/main">
             <a:fillRect l="0" t="0" r="0" b="0"/>
           </a:stretch>
@@ -7772,6 +8217,7 @@
           <a:lstStyle xmlns:a="http://schemas.openxmlformats.org/drawingml/2006/main"/>
           <a:p xmlns:a="http://schemas.openxmlformats.org/drawingml/2006/main">
             <a:pPr algn="l">
+              <a:buNone/>
               <a:defRPr sz="1950" b="0">
                 <a:solidFill>
                   <a:srgbClr val="565E68"/>
@@ -7829,6 +8275,7 @@
           <a:lstStyle xmlns:a="http://schemas.openxmlformats.org/drawingml/2006/main"/>
           <a:p xmlns:a="http://schemas.openxmlformats.org/drawingml/2006/main">
             <a:pPr algn="l">
+              <a:buNone/>
               <a:defRPr sz="2400" b="1">
                 <a:solidFill>
                   <a:srgbClr val="111111"/>
@@ -7886,6 +8333,7 @@
           <a:lstStyle xmlns:a="http://schemas.openxmlformats.org/drawingml/2006/main"/>
           <a:p xmlns:a="http://schemas.openxmlformats.org/drawingml/2006/main">
             <a:pPr algn="l">
+              <a:buNone/>
               <a:defRPr sz="2025" b="0">
                 <a:solidFill>
                   <a:srgbClr val="565E68"/>
@@ -7909,6 +8357,7 @@
           </a:p>
           <a:p xmlns:a="http://schemas.openxmlformats.org/drawingml/2006/main">
             <a:pPr algn="l">
+              <a:buNone/>
               <a:defRPr sz="2025" b="0">
                 <a:solidFill>
                   <a:srgbClr val="565E68"/>
@@ -7932,6 +8381,7 @@
           </a:p>
           <a:p xmlns:a="http://schemas.openxmlformats.org/drawingml/2006/main">
             <a:pPr algn="l">
+              <a:buNone/>
               <a:defRPr sz="2025" b="0">
                 <a:solidFill>
                   <a:srgbClr val="565E68"/>
@@ -7955,6 +8405,7 @@
           </a:p>
           <a:p xmlns:a="http://schemas.openxmlformats.org/drawingml/2006/main">
             <a:pPr algn="l">
+              <a:buNone/>
               <a:defRPr sz="2025" b="0">
                 <a:solidFill>
                   <a:srgbClr val="565E68"/>
@@ -7978,6 +8429,7 @@
           </a:p>
           <a:p xmlns:a="http://schemas.openxmlformats.org/drawingml/2006/main">
             <a:pPr algn="l">
+              <a:buNone/>
               <a:defRPr sz="2025" b="0">
                 <a:solidFill>
                   <a:srgbClr val="565E68"/>
@@ -8035,6 +8487,7 @@
           <a:lstStyle xmlns:a="http://schemas.openxmlformats.org/drawingml/2006/main"/>
           <a:p xmlns:a="http://schemas.openxmlformats.org/drawingml/2006/main">
             <a:pPr algn="l">
+              <a:buNone/>
               <a:defRPr sz="1800" b="0">
                 <a:solidFill>
                   <a:srgbClr val="565E68"/>
@@ -8121,6 +8574,7 @@
           <a:lstStyle xmlns:a="http://schemas.openxmlformats.org/drawingml/2006/main"/>
           <a:p xmlns:a="http://schemas.openxmlformats.org/drawingml/2006/main">
             <a:pPr algn="l">
+              <a:buNone/>
               <a:defRPr sz="1275" b="1">
                 <a:solidFill>
                   <a:srgbClr val="2563EB"/>
@@ -8178,6 +8632,7 @@
           <a:lstStyle xmlns:a="http://schemas.openxmlformats.org/drawingml/2006/main"/>
           <a:p xmlns:a="http://schemas.openxmlformats.org/drawingml/2006/main">
             <a:pPr algn="l">
+              <a:buNone/>
               <a:defRPr sz="3600" b="1">
                 <a:solidFill>
                   <a:srgbClr val="111111"/>
@@ -8266,6 +8721,7 @@
           <a:lstStyle xmlns:a="http://schemas.openxmlformats.org/drawingml/2006/main"/>
           <a:p xmlns:a="http://schemas.openxmlformats.org/drawingml/2006/main">
             <a:pPr algn="l">
+              <a:buNone/>
               <a:defRPr sz="975" b="0">
                 <a:solidFill>
                   <a:srgbClr val="565E68"/>
@@ -8323,6 +8779,7 @@
           <a:lstStyle xmlns:a="http://schemas.openxmlformats.org/drawingml/2006/main"/>
           <a:p xmlns:a="http://schemas.openxmlformats.org/drawingml/2006/main">
             <a:pPr algn="r">
+              <a:buNone/>
               <a:defRPr sz="975" b="0">
                 <a:solidFill>
                   <a:srgbClr val="565E68"/>
@@ -8380,6 +8837,7 @@
           <a:lstStyle xmlns:a="http://schemas.openxmlformats.org/drawingml/2006/main"/>
           <a:p xmlns:a="http://schemas.openxmlformats.org/drawingml/2006/main">
             <a:pPr algn="r">
+              <a:buNone/>
               <a:defRPr sz="1350" b="0">
                 <a:solidFill>
                   <a:srgbClr val="111111"/>
@@ -8437,6 +8895,7 @@
           <a:lstStyle xmlns:a="http://schemas.openxmlformats.org/drawingml/2006/main"/>
           <a:p xmlns:a="http://schemas.openxmlformats.org/drawingml/2006/main">
             <a:pPr algn="l">
+              <a:buNone/>
               <a:defRPr sz="4500" b="1">
                 <a:solidFill>
                   <a:srgbClr val="111111"/>
@@ -8460,6 +8919,7 @@
           </a:p>
           <a:p xmlns:a="http://schemas.openxmlformats.org/drawingml/2006/main">
             <a:pPr algn="l">
+              <a:buNone/>
               <a:defRPr sz="4500" b="1">
                 <a:solidFill>
                   <a:srgbClr val="111111"/>
@@ -8483,6 +8943,7 @@
           </a:p>
           <a:p xmlns:a="http://schemas.openxmlformats.org/drawingml/2006/main">
             <a:pPr algn="l">
+              <a:buNone/>
               <a:defRPr sz="4500" b="1">
                 <a:solidFill>
                   <a:srgbClr val="111111"/>
@@ -8571,6 +9032,7 @@
           <a:lstStyle xmlns:a="http://schemas.openxmlformats.org/drawingml/2006/main"/>
           <a:p xmlns:a="http://schemas.openxmlformats.org/drawingml/2006/main">
             <a:pPr algn="l">
+              <a:buNone/>
               <a:defRPr sz="1650" b="1">
                 <a:solidFill>
                   <a:srgbClr val="2563EB"/>
@@ -8628,6 +9090,7 @@
           <a:lstStyle xmlns:a="http://schemas.openxmlformats.org/drawingml/2006/main"/>
           <a:p xmlns:a="http://schemas.openxmlformats.org/drawingml/2006/main">
             <a:pPr algn="l">
+              <a:buNone/>
               <a:defRPr sz="1800" b="0">
                 <a:solidFill>
                   <a:srgbClr val="565E68"/>
@@ -8651,6 +9114,7 @@
           </a:p>
           <a:p xmlns:a="http://schemas.openxmlformats.org/drawingml/2006/main">
             <a:pPr algn="l">
+              <a:buNone/>
               <a:defRPr sz="1800" b="0">
                 <a:solidFill>
                   <a:srgbClr val="565E68"/>
@@ -8708,6 +9172,7 @@
           <a:lstStyle xmlns:a="http://schemas.openxmlformats.org/drawingml/2006/main"/>
           <a:p xmlns:a="http://schemas.openxmlformats.org/drawingml/2006/main">
             <a:pPr algn="l">
+              <a:buNone/>
               <a:defRPr sz="1650" b="1">
                 <a:solidFill>
                   <a:srgbClr val="2563EB"/>
@@ -8765,6 +9230,7 @@
           <a:lstStyle xmlns:a="http://schemas.openxmlformats.org/drawingml/2006/main"/>
           <a:p xmlns:a="http://schemas.openxmlformats.org/drawingml/2006/main">
             <a:pPr algn="l">
+              <a:buNone/>
               <a:defRPr sz="1800" b="0">
                 <a:solidFill>
                   <a:srgbClr val="565E68"/>
@@ -8788,6 +9254,7 @@
           </a:p>
           <a:p xmlns:a="http://schemas.openxmlformats.org/drawingml/2006/main">
             <a:pPr algn="l">
+              <a:buNone/>
               <a:defRPr sz="1800" b="0">
                 <a:solidFill>
                   <a:srgbClr val="565E68"/>
@@ -8845,6 +9312,7 @@
           <a:lstStyle xmlns:a="http://schemas.openxmlformats.org/drawingml/2006/main"/>
           <a:p xmlns:a="http://schemas.openxmlformats.org/drawingml/2006/main">
             <a:pPr algn="l">
+              <a:buNone/>
               <a:defRPr sz="1650" b="1">
                 <a:solidFill>
                   <a:srgbClr val="2563EB"/>
@@ -8902,6 +9370,7 @@
           <a:lstStyle xmlns:a="http://schemas.openxmlformats.org/drawingml/2006/main"/>
           <a:p xmlns:a="http://schemas.openxmlformats.org/drawingml/2006/main">
             <a:pPr algn="l">
+              <a:buNone/>
               <a:defRPr sz="1800" b="0">
                 <a:solidFill>
                   <a:srgbClr val="565E68"/>
@@ -8925,6 +9394,7 @@
           </a:p>
           <a:p xmlns:a="http://schemas.openxmlformats.org/drawingml/2006/main">
             <a:pPr algn="l">
+              <a:buNone/>
               <a:defRPr sz="1800" b="0">
                 <a:solidFill>
                   <a:srgbClr val="565E68"/>
@@ -8952,6 +9422,3721 @@
     <p:extLst>
       <p:ext uri="{BB962C8B-B14F-4D97-AF65-F5344CB8AC3E}">
         <p14:creationId xmlns:p14="http://schemas.microsoft.com/office/powerpoint/2010/main" val="1749668531"/>
+      </p:ext>
+    </p:extLst>
+  </p:cSld>
+</p:sld>
+</file>
+
+<file path=ppt/slides/slide16.xml><?xml version="1.0" encoding="utf-8"?>
+<p:sld xmlns:p="http://schemas.openxmlformats.org/presentationml/2006/main">
+  <p:cSld>
+    <p:bg>
+      <p:bgPr>
+        <a:solidFill xmlns:a="http://schemas.openxmlformats.org/drawingml/2006/main">
+          <a:srgbClr val="FFFFFF"/>
+        </a:solidFill>
+      </p:bgPr>
+    </p:bg>
+    <p:spTree>
+      <p:nvGrpSpPr>
+        <p:cNvPr id="1" name=""/>
+        <p:cNvGrpSpPr/>
+        <p:nvPr/>
+      </p:nvGrpSpPr>
+      <p:grpSpPr>
+        <a:xfrm xmlns:a="http://schemas.openxmlformats.org/drawingml/2006/main"/>
+      </p:grpSpPr>
+      <p:sp>
+        <p:nvSpPr>
+          <p:cNvPr id="10" name="training-text-1">
+            <a:extLst xmlns:a="http://schemas.openxmlformats.org/drawingml/2006/main">
+              <a:ext uri="{FF2B5EF4-FFF2-40B4-BE49-F238E27FC236}">
+                <a16:creationId xmlns:a16="http://schemas.microsoft.com/office/drawing/2014/main" id="{F741CA7C-B65E-423C-A383-751E9EC64B00}"/>
+              </a:ext>
+            </a:extLst>
+          </p:cNvPr>
+          <p:cNvSpPr>
+            <a:spLocks xmlns:a="http://schemas.openxmlformats.org/drawingml/2006/main" noGrp="1"/>
+          </p:cNvSpPr>
+          <p:nvPr/>
+        </p:nvSpPr>
+        <p:spPr>
+          <a:xfrm xmlns:a="http://schemas.openxmlformats.org/drawingml/2006/main">
+            <a:off x="609600" y="323850"/>
+            <a:ext cx="10972800" cy="266700"/>
+          </a:xfrm>
+          <a:prstGeom xmlns:a="http://schemas.openxmlformats.org/drawingml/2006/main" prst="rect">
+            <a:avLst/>
+          </a:prstGeom>
+          <a:noFill xmlns:a="http://schemas.openxmlformats.org/drawingml/2006/main"/>
+          <a:ln xmlns:a="http://schemas.openxmlformats.org/drawingml/2006/main" w="0">
+            <a:noFill/>
+          </a:ln>
+        </p:spPr>
+        <p:txBody>
+          <a:bodyPr xmlns:a="http://schemas.openxmlformats.org/drawingml/2006/main" lIns="0" tIns="0" rIns="0" bIns="0" anchor="t">
+            <a:noAutofit/>
+          </a:bodyPr>
+          <a:lstStyle xmlns:a="http://schemas.openxmlformats.org/drawingml/2006/main"/>
+          <a:p xmlns:a="http://schemas.openxmlformats.org/drawingml/2006/main">
+            <a:pPr>
+              <a:defRPr sz="1275" b="1">
+                <a:solidFill>
+                  <a:srgbClr val="2563EB"/>
+                </a:solidFill>
+                <a:latin typeface="Arial"/>
+                <a:ea typeface="Arial"/>
+                <a:cs typeface="Arial"/>
+              </a:defRPr>
+            </a:pPr>
+            <a:r>
+              <a:rPr sz="1275" b="1">
+                <a:solidFill>
+                  <a:srgbClr val="2563EB"/>
+                </a:solidFill>
+                <a:latin typeface="Arial"/>
+                <a:ea typeface="Arial"/>
+                <a:cs typeface="Arial"/>
+              </a:rPr>
+              <a:t>TRAINING 01 / PRACTICE EXERCISE</a:t>
+            </a:r>
+          </a:p>
+        </p:txBody>
+      </p:sp>
+      <p:sp>
+        <p:nvSpPr>
+          <p:cNvPr id="2" name="training-text-2">
+            <a:extLst xmlns:a="http://schemas.openxmlformats.org/drawingml/2006/main">
+              <a:ext uri="{FF2B5EF4-FFF2-40B4-BE49-F238E27FC236}">
+                <a16:creationId xmlns:a16="http://schemas.microsoft.com/office/drawing/2014/main" id="{4FD4B678-5B8A-4AEA-846A-F3120266D3A1}"/>
+              </a:ext>
+            </a:extLst>
+          </p:cNvPr>
+          <p:cNvSpPr>
+            <a:spLocks xmlns:a="http://schemas.openxmlformats.org/drawingml/2006/main" noGrp="1"/>
+          </p:cNvSpPr>
+          <p:nvPr/>
+        </p:nvSpPr>
+        <p:spPr>
+          <a:xfrm xmlns:a="http://schemas.openxmlformats.org/drawingml/2006/main">
+            <a:off x="609600" y="800100"/>
+            <a:ext cx="10972800" cy="1028700"/>
+          </a:xfrm>
+          <a:prstGeom xmlns:a="http://schemas.openxmlformats.org/drawingml/2006/main" prst="rect">
+            <a:avLst/>
+          </a:prstGeom>
+          <a:noFill xmlns:a="http://schemas.openxmlformats.org/drawingml/2006/main"/>
+          <a:ln xmlns:a="http://schemas.openxmlformats.org/drawingml/2006/main" w="0">
+            <a:noFill/>
+          </a:ln>
+        </p:spPr>
+        <p:txBody>
+          <a:bodyPr xmlns:a="http://schemas.openxmlformats.org/drawingml/2006/main" lIns="0" tIns="0" rIns="0" bIns="0" anchor="t">
+            <a:noAutofit/>
+          </a:bodyPr>
+          <a:lstStyle xmlns:a="http://schemas.openxmlformats.org/drawingml/2006/main"/>
+          <a:p xmlns:a="http://schemas.openxmlformats.org/drawingml/2006/main">
+            <a:pPr>
+              <a:defRPr sz="3300" b="1">
+                <a:solidFill>
+                  <a:srgbClr val="111111"/>
+                </a:solidFill>
+                <a:latin typeface="Arial"/>
+                <a:ea typeface="Arial"/>
+                <a:cs typeface="Arial"/>
+              </a:defRPr>
+            </a:pPr>
+            <a:r>
+              <a:rPr sz="3300" b="1">
+                <a:solidFill>
+                  <a:srgbClr val="111111"/>
+                </a:solidFill>
+                <a:latin typeface="Arial"/>
+                <a:ea typeface="Arial"/>
+                <a:cs typeface="Arial"/>
+              </a:rPr>
+              <a:t>Contractor Programme Review</a:t>
+            </a:r>
+          </a:p>
+        </p:txBody>
+      </p:sp>
+      <p:sp>
+        <p:nvSpPr>
+          <p:cNvPr id="3" name="training-text-3">
+            <a:extLst xmlns:a="http://schemas.openxmlformats.org/drawingml/2006/main">
+              <a:ext uri="{FF2B5EF4-FFF2-40B4-BE49-F238E27FC236}">
+                <a16:creationId xmlns:a16="http://schemas.microsoft.com/office/drawing/2014/main" id="{1B2D210D-E701-4E1A-B932-B3A0A81A9671}"/>
+              </a:ext>
+            </a:extLst>
+          </p:cNvPr>
+          <p:cNvSpPr>
+            <a:spLocks xmlns:a="http://schemas.openxmlformats.org/drawingml/2006/main" noGrp="1"/>
+          </p:cNvSpPr>
+          <p:nvPr/>
+        </p:nvSpPr>
+        <p:spPr>
+          <a:xfrm xmlns:a="http://schemas.openxmlformats.org/drawingml/2006/main">
+            <a:off x="609600" y="6143625"/>
+            <a:ext cx="10972800" cy="247650"/>
+          </a:xfrm>
+          <a:prstGeom xmlns:a="http://schemas.openxmlformats.org/drawingml/2006/main" prst="rect">
+            <a:avLst/>
+          </a:prstGeom>
+          <a:noFill xmlns:a="http://schemas.openxmlformats.org/drawingml/2006/main"/>
+          <a:ln xmlns:a="http://schemas.openxmlformats.org/drawingml/2006/main" w="0">
+            <a:noFill/>
+          </a:ln>
+        </p:spPr>
+        <p:txBody>
+          <a:bodyPr xmlns:a="http://schemas.openxmlformats.org/drawingml/2006/main" lIns="0" tIns="0" rIns="0" bIns="0" anchor="t">
+            <a:noAutofit/>
+          </a:bodyPr>
+          <a:lstStyle xmlns:a="http://schemas.openxmlformats.org/drawingml/2006/main"/>
+          <a:p xmlns:a="http://schemas.openxmlformats.org/drawingml/2006/main">
+            <a:pPr>
+              <a:defRPr sz="1275" b="0">
+                <a:solidFill>
+                  <a:srgbClr val="565E68"/>
+                </a:solidFill>
+                <a:latin typeface="Arial"/>
+                <a:ea typeface="Arial"/>
+                <a:cs typeface="Arial"/>
+              </a:defRPr>
+            </a:pPr>
+            <a:r>
+              <a:rPr sz="1275" b="0">
+                <a:solidFill>
+                  <a:srgbClr val="565E68"/>
+                </a:solidFill>
+                <a:latin typeface="Arial"/>
+                <a:ea typeface="Arial"/>
+                <a:cs typeface="Arial"/>
+              </a:rPr>
+              <a:t>Independent training exercise using assumed events and data; not a live contractual claim.</a:t>
+            </a:r>
+          </a:p>
+        </p:txBody>
+      </p:sp>
+      <p:sp>
+        <p:nvSpPr>
+          <p:cNvPr id="4" name="">
+            <a:extLst xmlns:a="http://schemas.openxmlformats.org/drawingml/2006/main">
+              <a:ext uri="{FF2B5EF4-FFF2-40B4-BE49-F238E27FC236}">
+                <a16:creationId xmlns:a16="http://schemas.microsoft.com/office/drawing/2014/main" id="{4222C0CA-7788-493B-8410-6E057FFF5BF8}"/>
+              </a:ext>
+            </a:extLst>
+          </p:cNvPr>
+          <p:cNvSpPr>
+            <a:spLocks xmlns:a="http://schemas.openxmlformats.org/drawingml/2006/main" noGrp="1"/>
+          </p:cNvSpPr>
+          <p:nvPr/>
+        </p:nvSpPr>
+        <p:spPr>
+          <a:xfrm xmlns:a="http://schemas.openxmlformats.org/drawingml/2006/main">
+            <a:off x="609600" y="6457950"/>
+            <a:ext cx="10972800" cy="0"/>
+          </a:xfrm>
+          <a:prstGeom xmlns:a="http://schemas.openxmlformats.org/drawingml/2006/main" prst="line">
+            <a:avLst/>
+          </a:prstGeom>
+          <a:noFill xmlns:a="http://schemas.openxmlformats.org/drawingml/2006/main"/>
+          <a:ln xmlns:a="http://schemas.openxmlformats.org/drawingml/2006/main" w="9525">
+            <a:solidFill>
+              <a:srgbClr val="D8DDE3"/>
+            </a:solidFill>
+          </a:ln>
+        </p:spPr>
+      </p:sp>
+      <p:sp>
+        <p:nvSpPr>
+          <p:cNvPr id="5" name="training-text-4">
+            <a:extLst xmlns:a="http://schemas.openxmlformats.org/drawingml/2006/main">
+              <a:ext uri="{FF2B5EF4-FFF2-40B4-BE49-F238E27FC236}">
+                <a16:creationId xmlns:a16="http://schemas.microsoft.com/office/drawing/2014/main" id="{04629B1A-339B-493D-AC01-233F0D08B413}"/>
+              </a:ext>
+            </a:extLst>
+          </p:cNvPr>
+          <p:cNvSpPr>
+            <a:spLocks xmlns:a="http://schemas.openxmlformats.org/drawingml/2006/main" noGrp="1"/>
+          </p:cNvSpPr>
+          <p:nvPr/>
+        </p:nvSpPr>
+        <p:spPr>
+          <a:xfrm xmlns:a="http://schemas.openxmlformats.org/drawingml/2006/main">
+            <a:off x="609600" y="6572250"/>
+            <a:ext cx="9334500" cy="171450"/>
+          </a:xfrm>
+          <a:prstGeom xmlns:a="http://schemas.openxmlformats.org/drawingml/2006/main" prst="rect">
+            <a:avLst/>
+          </a:prstGeom>
+          <a:noFill xmlns:a="http://schemas.openxmlformats.org/drawingml/2006/main"/>
+          <a:ln xmlns:a="http://schemas.openxmlformats.org/drawingml/2006/main" w="0">
+            <a:noFill/>
+          </a:ln>
+        </p:spPr>
+        <p:txBody>
+          <a:bodyPr xmlns:a="http://schemas.openxmlformats.org/drawingml/2006/main" lIns="0" tIns="0" rIns="0" bIns="0" anchor="t">
+            <a:noAutofit/>
+          </a:bodyPr>
+          <a:lstStyle xmlns:a="http://schemas.openxmlformats.org/drawingml/2006/main"/>
+          <a:p xmlns:a="http://schemas.openxmlformats.org/drawingml/2006/main">
+            <a:pPr>
+              <a:defRPr sz="975" b="0">
+                <a:solidFill>
+                  <a:srgbClr val="565E68"/>
+                </a:solidFill>
+                <a:latin typeface="Arial"/>
+                <a:ea typeface="Arial"/>
+                <a:cs typeface="Arial"/>
+              </a:defRPr>
+            </a:pPr>
+            <a:r>
+              <a:rPr sz="975" b="0">
+                <a:solidFill>
+                  <a:srgbClr val="565E68"/>
+                </a:solidFill>
+                <a:latin typeface="Arial"/>
+                <a:ea typeface="Arial"/>
+                <a:cs typeface="Arial"/>
+              </a:rPr>
+              <a:t>ALI BAYOUMI  /  CONSULTANT REVIEW TRAINING</a:t>
+            </a:r>
+          </a:p>
+        </p:txBody>
+      </p:sp>
+      <p:sp>
+        <p:nvSpPr>
+          <p:cNvPr id="6" name="training-text-5">
+            <a:extLst xmlns:a="http://schemas.openxmlformats.org/drawingml/2006/main">
+              <a:ext uri="{FF2B5EF4-FFF2-40B4-BE49-F238E27FC236}">
+                <a16:creationId xmlns:a16="http://schemas.microsoft.com/office/drawing/2014/main" id="{7FFB0B12-F4C1-4114-9659-32D4C0CD7C99}"/>
+              </a:ext>
+            </a:extLst>
+          </p:cNvPr>
+          <p:cNvSpPr>
+            <a:spLocks xmlns:a="http://schemas.openxmlformats.org/drawingml/2006/main" noGrp="1"/>
+          </p:cNvSpPr>
+          <p:nvPr/>
+        </p:nvSpPr>
+        <p:spPr>
+          <a:xfrm xmlns:a="http://schemas.openxmlformats.org/drawingml/2006/main">
+            <a:off x="11144250" y="6524625"/>
+            <a:ext cx="438150" cy="247650"/>
+          </a:xfrm>
+          <a:prstGeom xmlns:a="http://schemas.openxmlformats.org/drawingml/2006/main" prst="rect">
+            <a:avLst/>
+          </a:prstGeom>
+          <a:noFill xmlns:a="http://schemas.openxmlformats.org/drawingml/2006/main"/>
+          <a:ln xmlns:a="http://schemas.openxmlformats.org/drawingml/2006/main" w="0">
+            <a:noFill/>
+          </a:ln>
+        </p:spPr>
+        <p:txBody>
+          <a:bodyPr xmlns:a="http://schemas.openxmlformats.org/drawingml/2006/main" lIns="0" tIns="0" rIns="0" bIns="0" anchor="t">
+            <a:noAutofit/>
+          </a:bodyPr>
+          <a:lstStyle xmlns:a="http://schemas.openxmlformats.org/drawingml/2006/main"/>
+          <a:p xmlns:a="http://schemas.openxmlformats.org/drawingml/2006/main">
+            <a:pPr>
+              <a:defRPr sz="1350" b="0">
+                <a:solidFill>
+                  <a:srgbClr val="111111"/>
+                </a:solidFill>
+                <a:latin typeface="Arial"/>
+                <a:ea typeface="Arial"/>
+                <a:cs typeface="Arial"/>
+              </a:defRPr>
+            </a:pPr>
+            <a:r>
+              <a:rPr sz="1350" b="0">
+                <a:solidFill>
+                  <a:srgbClr val="111111"/>
+                </a:solidFill>
+                <a:latin typeface="Arial"/>
+                <a:ea typeface="Arial"/>
+                <a:cs typeface="Arial"/>
+              </a:rPr>
+              <a:t>16</a:t>
+            </a:r>
+          </a:p>
+        </p:txBody>
+      </p:sp>
+      <p:sp>
+        <p:nvSpPr>
+          <p:cNvPr id="7" name="training-text-6">
+            <a:extLst xmlns:a="http://schemas.openxmlformats.org/drawingml/2006/main">
+              <a:ext uri="{FF2B5EF4-FFF2-40B4-BE49-F238E27FC236}">
+                <a16:creationId xmlns:a16="http://schemas.microsoft.com/office/drawing/2014/main" id="{EAD62946-90FC-4B1D-AA1A-B6493C26EBD2}"/>
+              </a:ext>
+            </a:extLst>
+          </p:cNvPr>
+          <p:cNvSpPr>
+            <a:spLocks xmlns:a="http://schemas.openxmlformats.org/drawingml/2006/main" noGrp="1"/>
+          </p:cNvSpPr>
+          <p:nvPr/>
+        </p:nvSpPr>
+        <p:spPr>
+          <a:xfrm xmlns:a="http://schemas.openxmlformats.org/drawingml/2006/main">
+            <a:off x="609600" y="1857375"/>
+            <a:ext cx="10972800" cy="457200"/>
+          </a:xfrm>
+          <a:prstGeom xmlns:a="http://schemas.openxmlformats.org/drawingml/2006/main" prst="rect">
+            <a:avLst/>
+          </a:prstGeom>
+          <a:noFill xmlns:a="http://schemas.openxmlformats.org/drawingml/2006/main"/>
+          <a:ln xmlns:a="http://schemas.openxmlformats.org/drawingml/2006/main" w="0">
+            <a:noFill/>
+          </a:ln>
+        </p:spPr>
+        <p:txBody>
+          <a:bodyPr xmlns:a="http://schemas.openxmlformats.org/drawingml/2006/main" lIns="0" tIns="0" rIns="0" bIns="0" anchor="t">
+            <a:noAutofit/>
+          </a:bodyPr>
+          <a:lstStyle xmlns:a="http://schemas.openxmlformats.org/drawingml/2006/main"/>
+          <a:p xmlns:a="http://schemas.openxmlformats.org/drawingml/2006/main">
+            <a:pPr>
+              <a:defRPr sz="2250" b="1">
+                <a:solidFill>
+                  <a:srgbClr val="111111"/>
+                </a:solidFill>
+                <a:latin typeface="Arial"/>
+                <a:ea typeface="Arial"/>
+                <a:cs typeface="Arial"/>
+              </a:defRPr>
+            </a:pPr>
+            <a:r>
+              <a:rPr sz="2250" b="1">
+                <a:solidFill>
+                  <a:srgbClr val="111111"/>
+                </a:solidFill>
+                <a:latin typeface="Arial"/>
+                <a:ea typeface="Arial"/>
+                <a:cs typeface="Arial"/>
+              </a:rPr>
+              <a:t>C-01  Calendar exceptions require confirmation</a:t>
+            </a:r>
+          </a:p>
+        </p:txBody>
+      </p:sp>
+      <p:graphicFrame>
+        <p:nvGraphicFramePr>
+          <p:cNvPr id="17" name=""/>
+          <p:cNvGraphicFramePr/>
+          <p:nvPr/>
+        </p:nvGraphicFramePr>
+        <p:xfrm>
+          <a:off xmlns:a="http://schemas.openxmlformats.org/drawingml/2006/main" x="609600" y="2543175"/>
+          <a:ext xmlns:a="http://schemas.openxmlformats.org/drawingml/2006/main" cx="10972800" cy="2771775"/>
+        </p:xfrm>
+        <a:graphic xmlns:a="http://schemas.openxmlformats.org/drawingml/2006/main">
+          <a:graphicData uri="http://schemas.openxmlformats.org/drawingml/2006/table">
+            <a:tbl>
+              <a:tblPr/>
+              <a:tblGrid>
+                <a:gridCol w="2476500"/>
+                <a:gridCol w="8496300"/>
+              </a:tblGrid>
+              <a:tr h="554355">
+                <a:tc>
+                  <a:txBody>
+                    <a:bodyPr lIns="114300" tIns="76200" rIns="95250" bIns="76200"/>
+                    <a:lstStyle/>
+                    <a:p>
+                      <a:r>
+                        <a:rPr sz="1800" b="1">
+                          <a:solidFill>
+                            <a:srgbClr val="FFFFFF"/>
+                          </a:solidFill>
+                          <a:latin typeface="Arial"/>
+                          <a:ea typeface="Arial"/>
+                          <a:cs typeface="Arial"/>
+                        </a:rPr>
+                        <a:t>Review item</a:t>
+                      </a:r>
+                    </a:p>
+                  </a:txBody>
+                  <a:tcPr marL="91440" marR="91440" marT="45720" marB="45720" anchor="ctr">
+                    <a:solidFill>
+                      <a:srgbClr val="111111"/>
+                    </a:solidFill>
+                  </a:tcPr>
+                </a:tc>
+                <a:tc>
+                  <a:txBody>
+                    <a:bodyPr lIns="114300" tIns="76200" rIns="95250" bIns="76200"/>
+                    <a:lstStyle/>
+                    <a:p>
+                      <a:r>
+                        <a:rPr sz="1800" b="1">
+                          <a:solidFill>
+                            <a:srgbClr val="FFFFFF"/>
+                          </a:solidFill>
+                          <a:latin typeface="Arial"/>
+                          <a:ea typeface="Arial"/>
+                          <a:cs typeface="Arial"/>
+                        </a:rPr>
+                        <a:t>Observation and requested response</a:t>
+                      </a:r>
+                    </a:p>
+                  </a:txBody>
+                  <a:tcPr marL="91440" marR="91440" marT="45720" marB="45720" anchor="ctr">
+                    <a:solidFill>
+                      <a:srgbClr val="111111"/>
+                    </a:solidFill>
+                  </a:tcPr>
+                </a:tc>
+              </a:tr>
+              <a:tr h="554355">
+                <a:tc>
+                  <a:txBody>
+                    <a:bodyPr lIns="114300" tIns="76200" rIns="95250" bIns="76200"/>
+                    <a:lstStyle/>
+                    <a:p>
+                      <a:r>
+                        <a:rPr sz="1800" b="0">
+                          <a:solidFill>
+                            <a:srgbClr val="111111"/>
+                          </a:solidFill>
+                          <a:latin typeface="Arial"/>
+                          <a:ea typeface="Arial"/>
+                          <a:cs typeface="Arial"/>
+                        </a:rPr>
+                        <a:t>Source finding</a:t>
+                      </a:r>
+                    </a:p>
+                  </a:txBody>
+                  <a:tcPr marL="91440" marR="91440" marT="45720" marB="45720" anchor="ctr">
+                    <a:solidFill>
+                      <a:srgbClr val="F2F3F5"/>
+                    </a:solidFill>
+                  </a:tcPr>
+                </a:tc>
+                <a:tc>
+                  <a:txBody>
+                    <a:bodyPr lIns="114300" tIns="76200" rIns="95250" bIns="76200"/>
+                    <a:lstStyle/>
+                    <a:p>
+                      <a:r>
+                        <a:rPr sz="1800" b="0">
+                          <a:solidFill>
+                            <a:srgbClr val="111111"/>
+                          </a:solidFill>
+                          <a:latin typeface="Arial"/>
+                          <a:ea typeface="Arial"/>
+                          <a:cs typeface="Arial"/>
+                        </a:rPr>
+                        <a:t>The saved programme has no holiday exceptions for 2026–2028.</a:t>
+                      </a:r>
+                    </a:p>
+                  </a:txBody>
+                  <a:tcPr marL="91440" marR="91440" marT="45720" marB="45720" anchor="ctr">
+                    <a:solidFill>
+                      <a:srgbClr val="F2F3F5"/>
+                    </a:solidFill>
+                  </a:tcPr>
+                </a:tc>
+              </a:tr>
+              <a:tr h="554355">
+                <a:tc>
+                  <a:txBody>
+                    <a:bodyPr lIns="114300" tIns="76200" rIns="95250" bIns="76200"/>
+                    <a:lstStyle/>
+                    <a:p>
+                      <a:r>
+                        <a:rPr sz="1800" b="0">
+                          <a:solidFill>
+                            <a:srgbClr val="111111"/>
+                          </a:solidFill>
+                          <a:latin typeface="Arial"/>
+                          <a:ea typeface="Arial"/>
+                          <a:cs typeface="Arial"/>
+                        </a:rPr>
+                        <a:t>Potential effect</a:t>
+                      </a:r>
+                    </a:p>
+                  </a:txBody>
+                  <a:tcPr marL="91440" marR="91440" marT="45720" marB="45720" anchor="ctr">
+                    <a:solidFill>
+                      <a:srgbClr val="FFFFFF"/>
+                    </a:solidFill>
+                  </a:tcPr>
+                </a:tc>
+                <a:tc>
+                  <a:txBody>
+                    <a:bodyPr lIns="114300" tIns="76200" rIns="95250" bIns="76200"/>
+                    <a:lstStyle/>
+                    <a:p>
+                      <a:r>
+                        <a:rPr sz="1800" b="0">
+                          <a:solidFill>
+                            <a:srgbClr val="111111"/>
+                          </a:solidFill>
+                          <a:latin typeface="Arial"/>
+                          <a:ea typeface="Arial"/>
+                          <a:cs typeface="Arial"/>
+                        </a:rPr>
+                        <a:t>Work could fall on dates when crews are unavailable. The time impact is unquantified.</a:t>
+                      </a:r>
+                    </a:p>
+                  </a:txBody>
+                  <a:tcPr marL="91440" marR="91440" marT="45720" marB="45720" anchor="ctr">
+                    <a:solidFill>
+                      <a:srgbClr val="FFFFFF"/>
+                    </a:solidFill>
+                  </a:tcPr>
+                </a:tc>
+              </a:tr>
+              <a:tr h="554355">
+                <a:tc>
+                  <a:txBody>
+                    <a:bodyPr lIns="114300" tIns="76200" rIns="95250" bIns="76200"/>
+                    <a:lstStyle/>
+                    <a:p>
+                      <a:r>
+                        <a:rPr sz="1800" b="0">
+                          <a:solidFill>
+                            <a:srgbClr val="111111"/>
+                          </a:solidFill>
+                          <a:latin typeface="Arial"/>
+                          <a:ea typeface="Arial"/>
+                          <a:cs typeface="Arial"/>
+                        </a:rPr>
+                        <a:t>Review comment</a:t>
+                      </a:r>
+                    </a:p>
+                  </a:txBody>
+                  <a:tcPr marL="91440" marR="91440" marT="45720" marB="45720" anchor="ctr">
+                    <a:solidFill>
+                      <a:srgbClr val="F2F3F5"/>
+                    </a:solidFill>
+                  </a:tcPr>
+                </a:tc>
+                <a:tc>
+                  <a:txBody>
+                    <a:bodyPr lIns="114300" tIns="76200" rIns="95250" bIns="76200"/>
+                    <a:lstStyle/>
+                    <a:p>
+                      <a:r>
+                        <a:rPr sz="1800" b="0">
+                          <a:solidFill>
+                            <a:srgbClr val="111111"/>
+                          </a:solidFill>
+                          <a:latin typeface="Arial"/>
+                          <a:ea typeface="Arial"/>
+                          <a:cs typeface="Arial"/>
+                        </a:rPr>
+                        <a:t>Submit the agreed holiday and shutdown calendar. Explain any continuous-work calendars.</a:t>
+                      </a:r>
+                    </a:p>
+                  </a:txBody>
+                  <a:tcPr marL="91440" marR="91440" marT="45720" marB="45720" anchor="ctr">
+                    <a:solidFill>
+                      <a:srgbClr val="F2F3F5"/>
+                    </a:solidFill>
+                  </a:tcPr>
+                </a:tc>
+              </a:tr>
+              <a:tr h="554355">
+                <a:tc>
+                  <a:txBody>
+                    <a:bodyPr lIns="114300" tIns="76200" rIns="95250" bIns="76200"/>
+                    <a:lstStyle/>
+                    <a:p>
+                      <a:r>
+                        <a:rPr sz="1800" b="0">
+                          <a:solidFill>
+                            <a:srgbClr val="111111"/>
+                          </a:solidFill>
+                          <a:latin typeface="Arial"/>
+                          <a:ea typeface="Arial"/>
+                          <a:cs typeface="Arial"/>
+                        </a:rPr>
+                        <a:t>Required action</a:t>
+                      </a:r>
+                    </a:p>
+                  </a:txBody>
+                  <a:tcPr marL="91440" marR="91440" marT="45720" marB="45720" anchor="ctr">
+                    <a:solidFill>
+                      <a:srgbClr val="FFFFFF"/>
+                    </a:solidFill>
+                  </a:tcPr>
+                </a:tc>
+                <a:tc>
+                  <a:txBody>
+                    <a:bodyPr lIns="114300" tIns="76200" rIns="95250" bIns="76200"/>
+                    <a:lstStyle/>
+                    <a:p>
+                      <a:r>
+                        <a:rPr sz="1800" b="0">
+                          <a:solidFill>
+                            <a:srgbClr val="111111"/>
+                          </a:solidFill>
+                          <a:latin typeface="Arial"/>
+                          <a:ea typeface="Arial"/>
+                          <a:cs typeface="Arial"/>
+                        </a:rPr>
+                        <a:t>Planner: update a copy, recalculate CPM and compare the same handover milestone.</a:t>
+                      </a:r>
+                    </a:p>
+                  </a:txBody>
+                  <a:tcPr marL="91440" marR="91440" marT="45720" marB="45720" anchor="ctr">
+                    <a:solidFill>
+                      <a:srgbClr val="FFFFFF"/>
+                    </a:solidFill>
+                  </a:tcPr>
+                </a:tc>
+              </a:tr>
+            </a:tbl>
+          </a:graphicData>
+        </a:graphic>
+      </p:graphicFrame>
+      <p:sp>
+        <p:nvSpPr>
+          <p:cNvPr id="9" name="training-text-7">
+            <a:extLst xmlns:a="http://schemas.openxmlformats.org/drawingml/2006/main">
+              <a:ext uri="{FF2B5EF4-FFF2-40B4-BE49-F238E27FC236}">
+                <a16:creationId xmlns:a16="http://schemas.microsoft.com/office/drawing/2014/main" id="{11E01E32-93E0-43D6-B2F2-A3DD7EB61611}"/>
+              </a:ext>
+            </a:extLst>
+          </p:cNvPr>
+          <p:cNvSpPr>
+            <a:spLocks xmlns:a="http://schemas.openxmlformats.org/drawingml/2006/main" noGrp="1"/>
+          </p:cNvSpPr>
+          <p:nvPr/>
+        </p:nvSpPr>
+        <p:spPr>
+          <a:xfrm xmlns:a="http://schemas.openxmlformats.org/drawingml/2006/main">
+            <a:off x="609600" y="5772150"/>
+            <a:ext cx="10972800" cy="285750"/>
+          </a:xfrm>
+          <a:prstGeom xmlns:a="http://schemas.openxmlformats.org/drawingml/2006/main" prst="rect">
+            <a:avLst/>
+          </a:prstGeom>
+          <a:noFill xmlns:a="http://schemas.openxmlformats.org/drawingml/2006/main"/>
+          <a:ln xmlns:a="http://schemas.openxmlformats.org/drawingml/2006/main" w="0">
+            <a:noFill/>
+          </a:ln>
+        </p:spPr>
+        <p:txBody>
+          <a:bodyPr xmlns:a="http://schemas.openxmlformats.org/drawingml/2006/main" lIns="0" tIns="0" rIns="0" bIns="0" anchor="t">
+            <a:noAutofit/>
+          </a:bodyPr>
+          <a:lstStyle xmlns:a="http://schemas.openxmlformats.org/drawingml/2006/main"/>
+          <a:p xmlns:a="http://schemas.openxmlformats.org/drawingml/2006/main">
+            <a:pPr>
+              <a:defRPr sz="1725" b="0">
+                <a:solidFill>
+                  <a:srgbClr val="565E68"/>
+                </a:solidFill>
+                <a:latin typeface="Arial"/>
+                <a:ea typeface="Arial"/>
+                <a:cs typeface="Arial"/>
+              </a:defRPr>
+            </a:pPr>
+            <a:r>
+              <a:rPr sz="1725" b="0">
+                <a:solidFill>
+                  <a:srgbClr val="565E68"/>
+                </a:solidFill>
+                <a:latin typeface="Arial"/>
+                <a:ea typeface="Arial"/>
+                <a:cs typeface="Arial"/>
+              </a:rPr>
+              <a:t>Training response due: 02 Apr 2027. Status: open pending evidence.</a:t>
+            </a:r>
+          </a:p>
+        </p:txBody>
+      </p:sp>
+    </p:spTree>
+    <p:extLst>
+      <p:ext uri="{BB962C8B-B14F-4D97-AF65-F5344CB8AC3E}">
+        <p14:creationId xmlns:p14="http://schemas.microsoft.com/office/powerpoint/2010/main" val="1025054133"/>
+      </p:ext>
+    </p:extLst>
+  </p:cSld>
+</p:sld>
+</file>
+
+<file path=ppt/slides/slide17.xml><?xml version="1.0" encoding="utf-8"?>
+<p:sld xmlns:p="http://schemas.openxmlformats.org/presentationml/2006/main">
+  <p:cSld>
+    <p:bg>
+      <p:bgPr>
+        <a:solidFill xmlns:a="http://schemas.openxmlformats.org/drawingml/2006/main">
+          <a:srgbClr val="FFFFFF"/>
+        </a:solidFill>
+      </p:bgPr>
+    </p:bg>
+    <p:spTree>
+      <p:nvGrpSpPr>
+        <p:cNvPr id="1" name=""/>
+        <p:cNvGrpSpPr/>
+        <p:nvPr/>
+      </p:nvGrpSpPr>
+      <p:grpSpPr>
+        <a:xfrm xmlns:a="http://schemas.openxmlformats.org/drawingml/2006/main"/>
+      </p:grpSpPr>
+      <p:sp>
+        <p:nvSpPr>
+          <p:cNvPr id="12" name="training-text-8">
+            <a:extLst xmlns:a="http://schemas.openxmlformats.org/drawingml/2006/main">
+              <a:ext uri="{FF2B5EF4-FFF2-40B4-BE49-F238E27FC236}">
+                <a16:creationId xmlns:a16="http://schemas.microsoft.com/office/drawing/2014/main" id="{B292C9B3-00C8-4A7B-9F82-B9CB40A53504}"/>
+              </a:ext>
+            </a:extLst>
+          </p:cNvPr>
+          <p:cNvSpPr>
+            <a:spLocks xmlns:a="http://schemas.openxmlformats.org/drawingml/2006/main" noGrp="1"/>
+          </p:cNvSpPr>
+          <p:nvPr/>
+        </p:nvSpPr>
+        <p:spPr>
+          <a:xfrm xmlns:a="http://schemas.openxmlformats.org/drawingml/2006/main">
+            <a:off x="609600" y="323850"/>
+            <a:ext cx="10972800" cy="266700"/>
+          </a:xfrm>
+          <a:prstGeom xmlns:a="http://schemas.openxmlformats.org/drawingml/2006/main" prst="rect">
+            <a:avLst/>
+          </a:prstGeom>
+          <a:noFill xmlns:a="http://schemas.openxmlformats.org/drawingml/2006/main"/>
+          <a:ln xmlns:a="http://schemas.openxmlformats.org/drawingml/2006/main" w="0">
+            <a:noFill/>
+          </a:ln>
+        </p:spPr>
+        <p:txBody>
+          <a:bodyPr xmlns:a="http://schemas.openxmlformats.org/drawingml/2006/main" lIns="0" tIns="0" rIns="0" bIns="0" anchor="t">
+            <a:noAutofit/>
+          </a:bodyPr>
+          <a:lstStyle xmlns:a="http://schemas.openxmlformats.org/drawingml/2006/main"/>
+          <a:p xmlns:a="http://schemas.openxmlformats.org/drawingml/2006/main">
+            <a:pPr>
+              <a:defRPr sz="1275" b="1">
+                <a:solidFill>
+                  <a:srgbClr val="2563EB"/>
+                </a:solidFill>
+                <a:latin typeface="Arial"/>
+                <a:ea typeface="Arial"/>
+                <a:cs typeface="Arial"/>
+              </a:defRPr>
+            </a:pPr>
+            <a:r>
+              <a:rPr sz="1275" b="1">
+                <a:solidFill>
+                  <a:srgbClr val="2563EB"/>
+                </a:solidFill>
+                <a:latin typeface="Arial"/>
+                <a:ea typeface="Arial"/>
+                <a:cs typeface="Arial"/>
+              </a:rPr>
+              <a:t>TRAINING 02 / ASSUMED QUANTITIES</a:t>
+            </a:r>
+          </a:p>
+        </p:txBody>
+      </p:sp>
+      <p:sp>
+        <p:nvSpPr>
+          <p:cNvPr id="2" name="training-text-9">
+            <a:extLst xmlns:a="http://schemas.openxmlformats.org/drawingml/2006/main">
+              <a:ext uri="{FF2B5EF4-FFF2-40B4-BE49-F238E27FC236}">
+                <a16:creationId xmlns:a16="http://schemas.microsoft.com/office/drawing/2014/main" id="{D71CE740-FF88-4ADD-BBC0-B1BC4DFF5A9C}"/>
+              </a:ext>
+            </a:extLst>
+          </p:cNvPr>
+          <p:cNvSpPr>
+            <a:spLocks xmlns:a="http://schemas.openxmlformats.org/drawingml/2006/main" noGrp="1"/>
+          </p:cNvSpPr>
+          <p:nvPr/>
+        </p:nvSpPr>
+        <p:spPr>
+          <a:xfrm xmlns:a="http://schemas.openxmlformats.org/drawingml/2006/main">
+            <a:off x="609600" y="800100"/>
+            <a:ext cx="10972800" cy="1028700"/>
+          </a:xfrm>
+          <a:prstGeom xmlns:a="http://schemas.openxmlformats.org/drawingml/2006/main" prst="rect">
+            <a:avLst/>
+          </a:prstGeom>
+          <a:noFill xmlns:a="http://schemas.openxmlformats.org/drawingml/2006/main"/>
+          <a:ln xmlns:a="http://schemas.openxmlformats.org/drawingml/2006/main" w="0">
+            <a:noFill/>
+          </a:ln>
+        </p:spPr>
+        <p:txBody>
+          <a:bodyPr xmlns:a="http://schemas.openxmlformats.org/drawingml/2006/main" lIns="0" tIns="0" rIns="0" bIns="0" anchor="t">
+            <a:noAutofit/>
+          </a:bodyPr>
+          <a:lstStyle xmlns:a="http://schemas.openxmlformats.org/drawingml/2006/main"/>
+          <a:p xmlns:a="http://schemas.openxmlformats.org/drawingml/2006/main">
+            <a:pPr>
+              <a:defRPr sz="3300" b="1">
+                <a:solidFill>
+                  <a:srgbClr val="111111"/>
+                </a:solidFill>
+                <a:latin typeface="Arial"/>
+                <a:ea typeface="Arial"/>
+                <a:cs typeface="Arial"/>
+              </a:defRPr>
+            </a:pPr>
+            <a:r>
+              <a:rPr sz="3300" b="1">
+                <a:solidFill>
+                  <a:srgbClr val="111111"/>
+                </a:solidFill>
+                <a:latin typeface="Arial"/>
+                <a:ea typeface="Arial"/>
+                <a:cs typeface="Arial"/>
+              </a:rPr>
+              <a:t>Progress Verification &amp; Reporting</a:t>
+            </a:r>
+          </a:p>
+        </p:txBody>
+      </p:sp>
+      <p:sp>
+        <p:nvSpPr>
+          <p:cNvPr id="3" name="training-text-10">
+            <a:extLst xmlns:a="http://schemas.openxmlformats.org/drawingml/2006/main">
+              <a:ext uri="{FF2B5EF4-FFF2-40B4-BE49-F238E27FC236}">
+                <a16:creationId xmlns:a16="http://schemas.microsoft.com/office/drawing/2014/main" id="{C54BC5F1-7740-45AD-BC85-4C380AC93BB2}"/>
+              </a:ext>
+            </a:extLst>
+          </p:cNvPr>
+          <p:cNvSpPr>
+            <a:spLocks xmlns:a="http://schemas.openxmlformats.org/drawingml/2006/main" noGrp="1"/>
+          </p:cNvSpPr>
+          <p:nvPr/>
+        </p:nvSpPr>
+        <p:spPr>
+          <a:xfrm xmlns:a="http://schemas.openxmlformats.org/drawingml/2006/main">
+            <a:off x="609600" y="6143625"/>
+            <a:ext cx="10972800" cy="247650"/>
+          </a:xfrm>
+          <a:prstGeom xmlns:a="http://schemas.openxmlformats.org/drawingml/2006/main" prst="rect">
+            <a:avLst/>
+          </a:prstGeom>
+          <a:noFill xmlns:a="http://schemas.openxmlformats.org/drawingml/2006/main"/>
+          <a:ln xmlns:a="http://schemas.openxmlformats.org/drawingml/2006/main" w="0">
+            <a:noFill/>
+          </a:ln>
+        </p:spPr>
+        <p:txBody>
+          <a:bodyPr xmlns:a="http://schemas.openxmlformats.org/drawingml/2006/main" lIns="0" tIns="0" rIns="0" bIns="0" anchor="t">
+            <a:noAutofit/>
+          </a:bodyPr>
+          <a:lstStyle xmlns:a="http://schemas.openxmlformats.org/drawingml/2006/main"/>
+          <a:p xmlns:a="http://schemas.openxmlformats.org/drawingml/2006/main">
+            <a:pPr>
+              <a:defRPr sz="1275" b="0">
+                <a:solidFill>
+                  <a:srgbClr val="565E68"/>
+                </a:solidFill>
+                <a:latin typeface="Arial"/>
+                <a:ea typeface="Arial"/>
+                <a:cs typeface="Arial"/>
+              </a:defRPr>
+            </a:pPr>
+            <a:r>
+              <a:rPr sz="1275" b="0">
+                <a:solidFill>
+                  <a:srgbClr val="565E68"/>
+                </a:solidFill>
+                <a:latin typeface="Arial"/>
+                <a:ea typeface="Arial"/>
+                <a:cs typeface="Arial"/>
+              </a:rPr>
+              <a:t>Independent training exercise using assumed events and data; not a live contractual claim.</a:t>
+            </a:r>
+          </a:p>
+        </p:txBody>
+      </p:sp>
+      <p:sp>
+        <p:nvSpPr>
+          <p:cNvPr id="4" name="">
+            <a:extLst xmlns:a="http://schemas.openxmlformats.org/drawingml/2006/main">
+              <a:ext uri="{FF2B5EF4-FFF2-40B4-BE49-F238E27FC236}">
+                <a16:creationId xmlns:a16="http://schemas.microsoft.com/office/drawing/2014/main" id="{C3306455-550E-48DA-8729-40DBB06F477C}"/>
+              </a:ext>
+            </a:extLst>
+          </p:cNvPr>
+          <p:cNvSpPr>
+            <a:spLocks xmlns:a="http://schemas.openxmlformats.org/drawingml/2006/main" noGrp="1"/>
+          </p:cNvSpPr>
+          <p:nvPr/>
+        </p:nvSpPr>
+        <p:spPr>
+          <a:xfrm xmlns:a="http://schemas.openxmlformats.org/drawingml/2006/main">
+            <a:off x="609600" y="6457950"/>
+            <a:ext cx="10972800" cy="0"/>
+          </a:xfrm>
+          <a:prstGeom xmlns:a="http://schemas.openxmlformats.org/drawingml/2006/main" prst="line">
+            <a:avLst/>
+          </a:prstGeom>
+          <a:noFill xmlns:a="http://schemas.openxmlformats.org/drawingml/2006/main"/>
+          <a:ln xmlns:a="http://schemas.openxmlformats.org/drawingml/2006/main" w="9525">
+            <a:solidFill>
+              <a:srgbClr val="D8DDE3"/>
+            </a:solidFill>
+          </a:ln>
+        </p:spPr>
+      </p:sp>
+      <p:sp>
+        <p:nvSpPr>
+          <p:cNvPr id="5" name="training-text-11">
+            <a:extLst xmlns:a="http://schemas.openxmlformats.org/drawingml/2006/main">
+              <a:ext uri="{FF2B5EF4-FFF2-40B4-BE49-F238E27FC236}">
+                <a16:creationId xmlns:a16="http://schemas.microsoft.com/office/drawing/2014/main" id="{5F506A5E-D530-428E-BF9C-4FDD10006977}"/>
+              </a:ext>
+            </a:extLst>
+          </p:cNvPr>
+          <p:cNvSpPr>
+            <a:spLocks xmlns:a="http://schemas.openxmlformats.org/drawingml/2006/main" noGrp="1"/>
+          </p:cNvSpPr>
+          <p:nvPr/>
+        </p:nvSpPr>
+        <p:spPr>
+          <a:xfrm xmlns:a="http://schemas.openxmlformats.org/drawingml/2006/main">
+            <a:off x="609600" y="6572250"/>
+            <a:ext cx="9334500" cy="171450"/>
+          </a:xfrm>
+          <a:prstGeom xmlns:a="http://schemas.openxmlformats.org/drawingml/2006/main" prst="rect">
+            <a:avLst/>
+          </a:prstGeom>
+          <a:noFill xmlns:a="http://schemas.openxmlformats.org/drawingml/2006/main"/>
+          <a:ln xmlns:a="http://schemas.openxmlformats.org/drawingml/2006/main" w="0">
+            <a:noFill/>
+          </a:ln>
+        </p:spPr>
+        <p:txBody>
+          <a:bodyPr xmlns:a="http://schemas.openxmlformats.org/drawingml/2006/main" lIns="0" tIns="0" rIns="0" bIns="0" anchor="t">
+            <a:noAutofit/>
+          </a:bodyPr>
+          <a:lstStyle xmlns:a="http://schemas.openxmlformats.org/drawingml/2006/main"/>
+          <a:p xmlns:a="http://schemas.openxmlformats.org/drawingml/2006/main">
+            <a:pPr>
+              <a:defRPr sz="975" b="0">
+                <a:solidFill>
+                  <a:srgbClr val="565E68"/>
+                </a:solidFill>
+                <a:latin typeface="Arial"/>
+                <a:ea typeface="Arial"/>
+                <a:cs typeface="Arial"/>
+              </a:defRPr>
+            </a:pPr>
+            <a:r>
+              <a:rPr sz="975" b="0">
+                <a:solidFill>
+                  <a:srgbClr val="565E68"/>
+                </a:solidFill>
+                <a:latin typeface="Arial"/>
+                <a:ea typeface="Arial"/>
+                <a:cs typeface="Arial"/>
+              </a:rPr>
+              <a:t>ALI BAYOUMI  /  CONSULTANT REVIEW TRAINING</a:t>
+            </a:r>
+          </a:p>
+        </p:txBody>
+      </p:sp>
+      <p:sp>
+        <p:nvSpPr>
+          <p:cNvPr id="6" name="training-text-12">
+            <a:extLst xmlns:a="http://schemas.openxmlformats.org/drawingml/2006/main">
+              <a:ext uri="{FF2B5EF4-FFF2-40B4-BE49-F238E27FC236}">
+                <a16:creationId xmlns:a16="http://schemas.microsoft.com/office/drawing/2014/main" id="{DE626E9E-2363-4113-8941-39F150D008D2}"/>
+              </a:ext>
+            </a:extLst>
+          </p:cNvPr>
+          <p:cNvSpPr>
+            <a:spLocks xmlns:a="http://schemas.openxmlformats.org/drawingml/2006/main" noGrp="1"/>
+          </p:cNvSpPr>
+          <p:nvPr/>
+        </p:nvSpPr>
+        <p:spPr>
+          <a:xfrm xmlns:a="http://schemas.openxmlformats.org/drawingml/2006/main">
+            <a:off x="11144250" y="6524625"/>
+            <a:ext cx="438150" cy="247650"/>
+          </a:xfrm>
+          <a:prstGeom xmlns:a="http://schemas.openxmlformats.org/drawingml/2006/main" prst="rect">
+            <a:avLst/>
+          </a:prstGeom>
+          <a:noFill xmlns:a="http://schemas.openxmlformats.org/drawingml/2006/main"/>
+          <a:ln xmlns:a="http://schemas.openxmlformats.org/drawingml/2006/main" w="0">
+            <a:noFill/>
+          </a:ln>
+        </p:spPr>
+        <p:txBody>
+          <a:bodyPr xmlns:a="http://schemas.openxmlformats.org/drawingml/2006/main" lIns="0" tIns="0" rIns="0" bIns="0" anchor="t">
+            <a:noAutofit/>
+          </a:bodyPr>
+          <a:lstStyle xmlns:a="http://schemas.openxmlformats.org/drawingml/2006/main"/>
+          <a:p xmlns:a="http://schemas.openxmlformats.org/drawingml/2006/main">
+            <a:pPr>
+              <a:defRPr sz="1350" b="0">
+                <a:solidFill>
+                  <a:srgbClr val="111111"/>
+                </a:solidFill>
+                <a:latin typeface="Arial"/>
+                <a:ea typeface="Arial"/>
+                <a:cs typeface="Arial"/>
+              </a:defRPr>
+            </a:pPr>
+            <a:r>
+              <a:rPr sz="1350" b="0">
+                <a:solidFill>
+                  <a:srgbClr val="111111"/>
+                </a:solidFill>
+                <a:latin typeface="Arial"/>
+                <a:ea typeface="Arial"/>
+                <a:cs typeface="Arial"/>
+              </a:rPr>
+              <a:t>17</a:t>
+            </a:r>
+          </a:p>
+        </p:txBody>
+      </p:sp>
+      <p:sp>
+        <p:nvSpPr>
+          <p:cNvPr id="7" name="training-text-13">
+            <a:extLst xmlns:a="http://schemas.openxmlformats.org/drawingml/2006/main">
+              <a:ext uri="{FF2B5EF4-FFF2-40B4-BE49-F238E27FC236}">
+                <a16:creationId xmlns:a16="http://schemas.microsoft.com/office/drawing/2014/main" id="{3AB05436-6A4E-4991-A830-17587C35C32D}"/>
+              </a:ext>
+            </a:extLst>
+          </p:cNvPr>
+          <p:cNvSpPr>
+            <a:spLocks xmlns:a="http://schemas.openxmlformats.org/drawingml/2006/main" noGrp="1"/>
+          </p:cNvSpPr>
+          <p:nvPr/>
+        </p:nvSpPr>
+        <p:spPr>
+          <a:xfrm xmlns:a="http://schemas.openxmlformats.org/drawingml/2006/main">
+            <a:off x="609600" y="1762125"/>
+            <a:ext cx="10972800" cy="400050"/>
+          </a:xfrm>
+          <a:prstGeom xmlns:a="http://schemas.openxmlformats.org/drawingml/2006/main" prst="rect">
+            <a:avLst/>
+          </a:prstGeom>
+          <a:noFill xmlns:a="http://schemas.openxmlformats.org/drawingml/2006/main"/>
+          <a:ln xmlns:a="http://schemas.openxmlformats.org/drawingml/2006/main" w="0">
+            <a:noFill/>
+          </a:ln>
+        </p:spPr>
+        <p:txBody>
+          <a:bodyPr xmlns:a="http://schemas.openxmlformats.org/drawingml/2006/main" lIns="0" tIns="0" rIns="0" bIns="0" anchor="t">
+            <a:noAutofit/>
+          </a:bodyPr>
+          <a:lstStyle xmlns:a="http://schemas.openxmlformats.org/drawingml/2006/main"/>
+          <a:p xmlns:a="http://schemas.openxmlformats.org/drawingml/2006/main">
+            <a:pPr>
+              <a:defRPr sz="1800" b="0">
+                <a:solidFill>
+                  <a:srgbClr val="565E68"/>
+                </a:solidFill>
+                <a:latin typeface="Arial"/>
+                <a:ea typeface="Arial"/>
+                <a:cs typeface="Arial"/>
+              </a:defRPr>
+            </a:pPr>
+            <a:r>
+              <a:rPr sz="1800" b="0">
+                <a:solidFill>
+                  <a:srgbClr val="565E68"/>
+                </a:solidFill>
+                <a:latin typeface="Arial"/>
+                <a:ea typeface="Arial"/>
+                <a:cs typeface="Arial"/>
+              </a:rPr>
+              <a:t>Slab package: 400 m³ total scope. Reporting cut: 01 Apr 2027.</a:t>
+            </a:r>
+          </a:p>
+        </p:txBody>
+      </p:sp>
+      <p:graphicFrame>
+        <p:nvGraphicFramePr>
+          <p:cNvPr id="19" name=""/>
+          <p:cNvGraphicFramePr/>
+          <p:nvPr/>
+        </p:nvGraphicFramePr>
+        <p:xfrm>
+          <a:off xmlns:a="http://schemas.openxmlformats.org/drawingml/2006/main" x="609600" y="2333625"/>
+          <a:ext xmlns:a="http://schemas.openxmlformats.org/drawingml/2006/main" cx="10972800" cy="1924050"/>
+        </p:xfrm>
+        <a:graphic xmlns:a="http://schemas.openxmlformats.org/drawingml/2006/main">
+          <a:graphicData uri="http://schemas.openxmlformats.org/drawingml/2006/table">
+            <a:tbl>
+              <a:tblPr/>
+              <a:tblGrid>
+                <a:gridCol w="3333750"/>
+                <a:gridCol w="1809750"/>
+                <a:gridCol w="1619250"/>
+                <a:gridCol w="4210050"/>
+              </a:tblGrid>
+              <a:tr h="481013">
+                <a:tc>
+                  <a:txBody>
+                    <a:bodyPr lIns="114300" tIns="76200" rIns="95250" bIns="76200"/>
+                    <a:lstStyle/>
+                    <a:p>
+                      <a:r>
+                        <a:rPr sz="1800" b="1">
+                          <a:solidFill>
+                            <a:srgbClr val="FFFFFF"/>
+                          </a:solidFill>
+                          <a:latin typeface="Arial"/>
+                          <a:ea typeface="Arial"/>
+                          <a:cs typeface="Arial"/>
+                        </a:rPr>
+                        <a:t>Reporting basis</a:t>
+                      </a:r>
+                    </a:p>
+                  </a:txBody>
+                  <a:tcPr marL="91440" marR="91440" marT="45720" marB="45720" anchor="ctr">
+                    <a:solidFill>
+                      <a:srgbClr val="111111"/>
+                    </a:solidFill>
+                  </a:tcPr>
+                </a:tc>
+                <a:tc>
+                  <a:txBody>
+                    <a:bodyPr lIns="114300" tIns="76200" rIns="95250" bIns="76200"/>
+                    <a:lstStyle/>
+                    <a:p>
+                      <a:r>
+                        <a:rPr sz="1800" b="1">
+                          <a:solidFill>
+                            <a:srgbClr val="FFFFFF"/>
+                          </a:solidFill>
+                          <a:latin typeface="Arial"/>
+                          <a:ea typeface="Arial"/>
+                          <a:cs typeface="Arial"/>
+                        </a:rPr>
+                        <a:t>Quantity</a:t>
+                      </a:r>
+                    </a:p>
+                  </a:txBody>
+                  <a:tcPr marL="91440" marR="91440" marT="45720" marB="45720" anchor="ctr">
+                    <a:solidFill>
+                      <a:srgbClr val="111111"/>
+                    </a:solidFill>
+                  </a:tcPr>
+                </a:tc>
+                <a:tc>
+                  <a:txBody>
+                    <a:bodyPr lIns="114300" tIns="76200" rIns="95250" bIns="76200"/>
+                    <a:lstStyle/>
+                    <a:p>
+                      <a:r>
+                        <a:rPr sz="1800" b="1">
+                          <a:solidFill>
+                            <a:srgbClr val="FFFFFF"/>
+                          </a:solidFill>
+                          <a:latin typeface="Arial"/>
+                          <a:ea typeface="Arial"/>
+                          <a:cs typeface="Arial"/>
+                        </a:rPr>
+                        <a:t>Progress</a:t>
+                      </a:r>
+                    </a:p>
+                  </a:txBody>
+                  <a:tcPr marL="91440" marR="91440" marT="45720" marB="45720" anchor="ctr">
+                    <a:solidFill>
+                      <a:srgbClr val="111111"/>
+                    </a:solidFill>
+                  </a:tcPr>
+                </a:tc>
+                <a:tc>
+                  <a:txBody>
+                    <a:bodyPr lIns="114300" tIns="76200" rIns="95250" bIns="76200"/>
+                    <a:lstStyle/>
+                    <a:p>
+                      <a:r>
+                        <a:rPr sz="1800" b="1">
+                          <a:solidFill>
+                            <a:srgbClr val="FFFFFF"/>
+                          </a:solidFill>
+                          <a:latin typeface="Arial"/>
+                          <a:ea typeface="Arial"/>
+                          <a:cs typeface="Arial"/>
+                        </a:rPr>
+                        <a:t>Training evidence</a:t>
+                      </a:r>
+                    </a:p>
+                  </a:txBody>
+                  <a:tcPr marL="91440" marR="91440" marT="45720" marB="45720" anchor="ctr">
+                    <a:solidFill>
+                      <a:srgbClr val="111111"/>
+                    </a:solidFill>
+                  </a:tcPr>
+                </a:tc>
+              </a:tr>
+              <a:tr h="481013">
+                <a:tc>
+                  <a:txBody>
+                    <a:bodyPr lIns="114300" tIns="76200" rIns="95250" bIns="76200"/>
+                    <a:lstStyle/>
+                    <a:p>
+                      <a:r>
+                        <a:rPr sz="1800" b="0">
+                          <a:solidFill>
+                            <a:srgbClr val="111111"/>
+                          </a:solidFill>
+                          <a:latin typeface="Arial"/>
+                          <a:ea typeface="Arial"/>
+                          <a:cs typeface="Arial"/>
+                        </a:rPr>
+                        <a:t>Planned to date</a:t>
+                      </a:r>
+                    </a:p>
+                  </a:txBody>
+                  <a:tcPr marL="91440" marR="91440" marT="45720" marB="45720" anchor="ctr">
+                    <a:solidFill>
+                      <a:srgbClr val="F2F3F5"/>
+                    </a:solidFill>
+                  </a:tcPr>
+                </a:tc>
+                <a:tc>
+                  <a:txBody>
+                    <a:bodyPr lIns="114300" tIns="76200" rIns="95250" bIns="76200"/>
+                    <a:lstStyle/>
+                    <a:p>
+                      <a:r>
+                        <a:rPr sz="1800" b="0">
+                          <a:solidFill>
+                            <a:srgbClr val="111111"/>
+                          </a:solidFill>
+                          <a:latin typeface="Arial"/>
+                          <a:ea typeface="Arial"/>
+                          <a:cs typeface="Arial"/>
+                        </a:rPr>
+                        <a:t>200 m³</a:t>
+                      </a:r>
+                    </a:p>
+                  </a:txBody>
+                  <a:tcPr marL="91440" marR="91440" marT="45720" marB="45720" anchor="ctr">
+                    <a:solidFill>
+                      <a:srgbClr val="F2F3F5"/>
+                    </a:solidFill>
+                  </a:tcPr>
+                </a:tc>
+                <a:tc>
+                  <a:txBody>
+                    <a:bodyPr lIns="114300" tIns="76200" rIns="95250" bIns="76200"/>
+                    <a:lstStyle/>
+                    <a:p>
+                      <a:r>
+                        <a:rPr sz="1800" b="0">
+                          <a:solidFill>
+                            <a:srgbClr val="111111"/>
+                          </a:solidFill>
+                          <a:latin typeface="Arial"/>
+                          <a:ea typeface="Arial"/>
+                          <a:cs typeface="Arial"/>
+                        </a:rPr>
+                        <a:t>50%</a:t>
+                      </a:r>
+                    </a:p>
+                  </a:txBody>
+                  <a:tcPr marL="91440" marR="91440" marT="45720" marB="45720" anchor="ctr">
+                    <a:solidFill>
+                      <a:srgbClr val="F2F3F5"/>
+                    </a:solidFill>
+                  </a:tcPr>
+                </a:tc>
+                <a:tc>
+                  <a:txBody>
+                    <a:bodyPr lIns="114300" tIns="76200" rIns="95250" bIns="76200"/>
+                    <a:lstStyle/>
+                    <a:p>
+                      <a:r>
+                        <a:rPr sz="1800" b="0">
+                          <a:solidFill>
+                            <a:srgbClr val="111111"/>
+                          </a:solidFill>
+                          <a:latin typeface="Arial"/>
+                          <a:ea typeface="Arial"/>
+                          <a:cs typeface="Arial"/>
+                        </a:rPr>
+                        <a:t>Assumed quantity plan</a:t>
+                      </a:r>
+                    </a:p>
+                  </a:txBody>
+                  <a:tcPr marL="91440" marR="91440" marT="45720" marB="45720" anchor="ctr">
+                    <a:solidFill>
+                      <a:srgbClr val="F2F3F5"/>
+                    </a:solidFill>
+                  </a:tcPr>
+                </a:tc>
+              </a:tr>
+              <a:tr h="481013">
+                <a:tc>
+                  <a:txBody>
+                    <a:bodyPr lIns="114300" tIns="76200" rIns="95250" bIns="76200"/>
+                    <a:lstStyle/>
+                    <a:p>
+                      <a:r>
+                        <a:rPr sz="1800" b="0">
+                          <a:solidFill>
+                            <a:srgbClr val="111111"/>
+                          </a:solidFill>
+                          <a:latin typeface="Arial"/>
+                          <a:ea typeface="Arial"/>
+                          <a:cs typeface="Arial"/>
+                        </a:rPr>
+                        <a:t>Contractor reported</a:t>
+                      </a:r>
+                    </a:p>
+                  </a:txBody>
+                  <a:tcPr marL="91440" marR="91440" marT="45720" marB="45720" anchor="ctr">
+                    <a:solidFill>
+                      <a:srgbClr val="FFFFFF"/>
+                    </a:solidFill>
+                  </a:tcPr>
+                </a:tc>
+                <a:tc>
+                  <a:txBody>
+                    <a:bodyPr lIns="114300" tIns="76200" rIns="95250" bIns="76200"/>
+                    <a:lstStyle/>
+                    <a:p>
+                      <a:r>
+                        <a:rPr sz="1800" b="0">
+                          <a:solidFill>
+                            <a:srgbClr val="111111"/>
+                          </a:solidFill>
+                          <a:latin typeface="Arial"/>
+                          <a:ea typeface="Arial"/>
+                          <a:cs typeface="Arial"/>
+                        </a:rPr>
+                        <a:t>180 m³</a:t>
+                      </a:r>
+                    </a:p>
+                  </a:txBody>
+                  <a:tcPr marL="91440" marR="91440" marT="45720" marB="45720" anchor="ctr">
+                    <a:solidFill>
+                      <a:srgbClr val="FFFFFF"/>
+                    </a:solidFill>
+                  </a:tcPr>
+                </a:tc>
+                <a:tc>
+                  <a:txBody>
+                    <a:bodyPr lIns="114300" tIns="76200" rIns="95250" bIns="76200"/>
+                    <a:lstStyle/>
+                    <a:p>
+                      <a:r>
+                        <a:rPr sz="1800" b="0">
+                          <a:solidFill>
+                            <a:srgbClr val="111111"/>
+                          </a:solidFill>
+                          <a:latin typeface="Arial"/>
+                          <a:ea typeface="Arial"/>
+                          <a:cs typeface="Arial"/>
+                        </a:rPr>
+                        <a:t>45%</a:t>
+                      </a:r>
+                    </a:p>
+                  </a:txBody>
+                  <a:tcPr marL="91440" marR="91440" marT="45720" marB="45720" anchor="ctr">
+                    <a:solidFill>
+                      <a:srgbClr val="FFFFFF"/>
+                    </a:solidFill>
+                  </a:tcPr>
+                </a:tc>
+                <a:tc>
+                  <a:txBody>
+                    <a:bodyPr lIns="114300" tIns="76200" rIns="95250" bIns="76200"/>
+                    <a:lstStyle/>
+                    <a:p>
+                      <a:r>
+                        <a:rPr sz="1800" b="0">
+                          <a:solidFill>
+                            <a:srgbClr val="111111"/>
+                          </a:solidFill>
+                          <a:latin typeface="Arial"/>
+                          <a:ea typeface="Arial"/>
+                          <a:cs typeface="Arial"/>
+                        </a:rPr>
+                        <a:t>Assumed daily report</a:t>
+                      </a:r>
+                    </a:p>
+                  </a:txBody>
+                  <a:tcPr marL="91440" marR="91440" marT="45720" marB="45720" anchor="ctr">
+                    <a:solidFill>
+                      <a:srgbClr val="FFFFFF"/>
+                    </a:solidFill>
+                  </a:tcPr>
+                </a:tc>
+              </a:tr>
+              <a:tr h="481013">
+                <a:tc>
+                  <a:txBody>
+                    <a:bodyPr lIns="114300" tIns="76200" rIns="95250" bIns="76200"/>
+                    <a:lstStyle/>
+                    <a:p>
+                      <a:r>
+                        <a:rPr sz="1800" b="0">
+                          <a:solidFill>
+                            <a:srgbClr val="111111"/>
+                          </a:solidFill>
+                          <a:latin typeface="Arial"/>
+                          <a:ea typeface="Arial"/>
+                          <a:cs typeface="Arial"/>
+                        </a:rPr>
+                        <a:t>Verified in exercise</a:t>
+                      </a:r>
+                    </a:p>
+                  </a:txBody>
+                  <a:tcPr marL="91440" marR="91440" marT="45720" marB="45720" anchor="ctr">
+                    <a:solidFill>
+                      <a:srgbClr val="F2F3F5"/>
+                    </a:solidFill>
+                  </a:tcPr>
+                </a:tc>
+                <a:tc>
+                  <a:txBody>
+                    <a:bodyPr lIns="114300" tIns="76200" rIns="95250" bIns="76200"/>
+                    <a:lstStyle/>
+                    <a:p>
+                      <a:r>
+                        <a:rPr sz="1800" b="0">
+                          <a:solidFill>
+                            <a:srgbClr val="111111"/>
+                          </a:solidFill>
+                          <a:latin typeface="Arial"/>
+                          <a:ea typeface="Arial"/>
+                          <a:cs typeface="Arial"/>
+                        </a:rPr>
+                        <a:t>160 m³</a:t>
+                      </a:r>
+                    </a:p>
+                  </a:txBody>
+                  <a:tcPr marL="91440" marR="91440" marT="45720" marB="45720" anchor="ctr">
+                    <a:solidFill>
+                      <a:srgbClr val="F2F3F5"/>
+                    </a:solidFill>
+                  </a:tcPr>
+                </a:tc>
+                <a:tc>
+                  <a:txBody>
+                    <a:bodyPr lIns="114300" tIns="76200" rIns="95250" bIns="76200"/>
+                    <a:lstStyle/>
+                    <a:p>
+                      <a:r>
+                        <a:rPr sz="1800" b="0">
+                          <a:solidFill>
+                            <a:srgbClr val="111111"/>
+                          </a:solidFill>
+                          <a:latin typeface="Arial"/>
+                          <a:ea typeface="Arial"/>
+                          <a:cs typeface="Arial"/>
+                        </a:rPr>
+                        <a:t>40%</a:t>
+                      </a:r>
+                    </a:p>
+                  </a:txBody>
+                  <a:tcPr marL="91440" marR="91440" marT="45720" marB="45720" anchor="ctr">
+                    <a:solidFill>
+                      <a:srgbClr val="F2F3F5"/>
+                    </a:solidFill>
+                  </a:tcPr>
+                </a:tc>
+                <a:tc>
+                  <a:txBody>
+                    <a:bodyPr lIns="114300" tIns="76200" rIns="95250" bIns="76200"/>
+                    <a:lstStyle/>
+                    <a:p>
+                      <a:r>
+                        <a:rPr sz="1800" b="0">
+                          <a:solidFill>
+                            <a:srgbClr val="111111"/>
+                          </a:solidFill>
+                          <a:latin typeface="Arial"/>
+                          <a:ea typeface="Arial"/>
+                          <a:cs typeface="Arial"/>
+                        </a:rPr>
+                        <a:t>Mock Q-001 + IR-001</a:t>
+                      </a:r>
+                    </a:p>
+                  </a:txBody>
+                  <a:tcPr marL="91440" marR="91440" marT="45720" marB="45720" anchor="ctr">
+                    <a:solidFill>
+                      <a:srgbClr val="F2F3F5"/>
+                    </a:solidFill>
+                  </a:tcPr>
+                </a:tc>
+              </a:tr>
+            </a:tbl>
+          </a:graphicData>
+        </a:graphic>
+      </p:graphicFrame>
+      <p:sp>
+        <p:nvSpPr>
+          <p:cNvPr id="9" name="training-text-14">
+            <a:extLst xmlns:a="http://schemas.openxmlformats.org/drawingml/2006/main">
+              <a:ext uri="{FF2B5EF4-FFF2-40B4-BE49-F238E27FC236}">
+                <a16:creationId xmlns:a16="http://schemas.microsoft.com/office/drawing/2014/main" id="{8D5BA9E4-6EE1-40FE-A5E0-493F00885187}"/>
+              </a:ext>
+            </a:extLst>
+          </p:cNvPr>
+          <p:cNvSpPr>
+            <a:spLocks xmlns:a="http://schemas.openxmlformats.org/drawingml/2006/main" noGrp="1"/>
+          </p:cNvSpPr>
+          <p:nvPr/>
+        </p:nvSpPr>
+        <p:spPr>
+          <a:xfrm xmlns:a="http://schemas.openxmlformats.org/drawingml/2006/main">
+            <a:off x="609600" y="4419600"/>
+            <a:ext cx="5143500" cy="438150"/>
+          </a:xfrm>
+          <a:prstGeom xmlns:a="http://schemas.openxmlformats.org/drawingml/2006/main" prst="rect">
+            <a:avLst/>
+          </a:prstGeom>
+          <a:noFill xmlns:a="http://schemas.openxmlformats.org/drawingml/2006/main"/>
+          <a:ln xmlns:a="http://schemas.openxmlformats.org/drawingml/2006/main" w="0">
+            <a:noFill/>
+          </a:ln>
+        </p:spPr>
+        <p:txBody>
+          <a:bodyPr xmlns:a="http://schemas.openxmlformats.org/drawingml/2006/main" lIns="0" tIns="0" rIns="0" bIns="0" anchor="t">
+            <a:noAutofit/>
+          </a:bodyPr>
+          <a:lstStyle xmlns:a="http://schemas.openxmlformats.org/drawingml/2006/main"/>
+          <a:p xmlns:a="http://schemas.openxmlformats.org/drawingml/2006/main">
+            <a:pPr>
+              <a:defRPr sz="2400" b="1">
+                <a:solidFill>
+                  <a:srgbClr val="2563EB"/>
+                </a:solidFill>
+                <a:latin typeface="Arial"/>
+                <a:ea typeface="Arial"/>
+                <a:cs typeface="Arial"/>
+              </a:defRPr>
+            </a:pPr>
+            <a:r>
+              <a:rPr sz="2400" b="1">
+                <a:solidFill>
+                  <a:srgbClr val="2563EB"/>
+                </a:solidFill>
+                <a:latin typeface="Arial"/>
+                <a:ea typeface="Arial"/>
+                <a:cs typeface="Arial"/>
+              </a:rPr>
+              <a:t>−10 percentage points</a:t>
+            </a:r>
+          </a:p>
+        </p:txBody>
+      </p:sp>
+      <p:sp>
+        <p:nvSpPr>
+          <p:cNvPr id="10" name="training-text-15">
+            <a:extLst xmlns:a="http://schemas.openxmlformats.org/drawingml/2006/main">
+              <a:ext uri="{FF2B5EF4-FFF2-40B4-BE49-F238E27FC236}">
+                <a16:creationId xmlns:a16="http://schemas.microsoft.com/office/drawing/2014/main" id="{D166D2E0-1E59-420F-94FD-BD5B1D3E44C1}"/>
+              </a:ext>
+            </a:extLst>
+          </p:cNvPr>
+          <p:cNvSpPr>
+            <a:spLocks xmlns:a="http://schemas.openxmlformats.org/drawingml/2006/main" noGrp="1"/>
+          </p:cNvSpPr>
+          <p:nvPr/>
+        </p:nvSpPr>
+        <p:spPr>
+          <a:xfrm xmlns:a="http://schemas.openxmlformats.org/drawingml/2006/main">
+            <a:off x="6096000" y="4495800"/>
+            <a:ext cx="5486400" cy="342900"/>
+          </a:xfrm>
+          <a:prstGeom xmlns:a="http://schemas.openxmlformats.org/drawingml/2006/main" prst="rect">
+            <a:avLst/>
+          </a:prstGeom>
+          <a:noFill xmlns:a="http://schemas.openxmlformats.org/drawingml/2006/main"/>
+          <a:ln xmlns:a="http://schemas.openxmlformats.org/drawingml/2006/main" w="0">
+            <a:noFill/>
+          </a:ln>
+        </p:spPr>
+        <p:txBody>
+          <a:bodyPr xmlns:a="http://schemas.openxmlformats.org/drawingml/2006/main" lIns="0" tIns="0" rIns="0" bIns="0" anchor="t">
+            <a:noAutofit/>
+          </a:bodyPr>
+          <a:lstStyle xmlns:a="http://schemas.openxmlformats.org/drawingml/2006/main"/>
+          <a:p xmlns:a="http://schemas.openxmlformats.org/drawingml/2006/main">
+            <a:pPr>
+              <a:defRPr sz="1725" b="0">
+                <a:solidFill>
+                  <a:srgbClr val="565E68"/>
+                </a:solidFill>
+                <a:latin typeface="Arial"/>
+                <a:ea typeface="Arial"/>
+                <a:cs typeface="Arial"/>
+              </a:defRPr>
+            </a:pPr>
+            <a:r>
+              <a:rPr sz="1725" b="0">
+                <a:solidFill>
+                  <a:srgbClr val="565E68"/>
+                </a:solidFill>
+                <a:latin typeface="Arial"/>
+                <a:ea typeface="Arial"/>
+                <a:cs typeface="Arial"/>
+              </a:rPr>
+              <a:t>Verified vs planned. Quantity shortfall: 40 m³.</a:t>
+            </a:r>
+          </a:p>
+        </p:txBody>
+      </p:sp>
+      <p:graphicFrame>
+        <p:nvGraphicFramePr>
+          <p:cNvPr id="22" name=""/>
+          <p:cNvGraphicFramePr/>
+          <p:nvPr/>
+        </p:nvGraphicFramePr>
+        <p:xfrm>
+          <a:off xmlns:a="http://schemas.openxmlformats.org/drawingml/2006/main" x="609600" y="4972050"/>
+          <a:ext xmlns:a="http://schemas.openxmlformats.org/drawingml/2006/main" cx="10972800" cy="1028700"/>
+        </p:xfrm>
+        <a:graphic xmlns:a="http://schemas.openxmlformats.org/drawingml/2006/main">
+          <a:graphicData uri="http://schemas.openxmlformats.org/drawingml/2006/table">
+            <a:tbl>
+              <a:tblPr/>
+              <a:tblGrid>
+                <a:gridCol w="857250"/>
+                <a:gridCol w="2571750"/>
+                <a:gridCol w="5524500"/>
+                <a:gridCol w="2019300"/>
+              </a:tblGrid>
+              <a:tr h="342900">
+                <a:tc>
+                  <a:txBody>
+                    <a:bodyPr lIns="114300" tIns="76200" rIns="95250" bIns="76200"/>
+                    <a:lstStyle/>
+                    <a:p>
+                      <a:r>
+                        <a:rPr sz="1425" b="1">
+                          <a:solidFill>
+                            <a:srgbClr val="FFFFFF"/>
+                          </a:solidFill>
+                          <a:latin typeface="Arial"/>
+                          <a:ea typeface="Arial"/>
+                          <a:cs typeface="Arial"/>
+                        </a:rPr>
+                        <a:t>Log</a:t>
+                      </a:r>
+                    </a:p>
+                  </a:txBody>
+                  <a:tcPr marL="91440" marR="91440" marT="45720" marB="45720" anchor="ctr">
+                    <a:solidFill>
+                      <a:srgbClr val="111111"/>
+                    </a:solidFill>
+                  </a:tcPr>
+                </a:tc>
+                <a:tc>
+                  <a:txBody>
+                    <a:bodyPr lIns="114300" tIns="76200" rIns="95250" bIns="76200"/>
+                    <a:lstStyle/>
+                    <a:p>
+                      <a:r>
+                        <a:rPr sz="1425" b="1">
+                          <a:solidFill>
+                            <a:srgbClr val="FFFFFF"/>
+                          </a:solidFill>
+                          <a:latin typeface="Arial"/>
+                          <a:ea typeface="Arial"/>
+                          <a:cs typeface="Arial"/>
+                        </a:rPr>
+                        <a:t>Finding</a:t>
+                      </a:r>
+                    </a:p>
+                  </a:txBody>
+                  <a:tcPr marL="91440" marR="91440" marT="45720" marB="45720" anchor="ctr">
+                    <a:solidFill>
+                      <a:srgbClr val="111111"/>
+                    </a:solidFill>
+                  </a:tcPr>
+                </a:tc>
+                <a:tc>
+                  <a:txBody>
+                    <a:bodyPr lIns="114300" tIns="76200" rIns="95250" bIns="76200"/>
+                    <a:lstStyle/>
+                    <a:p>
+                      <a:r>
+                        <a:rPr sz="1425" b="1">
+                          <a:solidFill>
+                            <a:srgbClr val="FFFFFF"/>
+                          </a:solidFill>
+                          <a:latin typeface="Arial"/>
+                          <a:ea typeface="Arial"/>
+                          <a:cs typeface="Arial"/>
+                        </a:rPr>
+                        <a:t>Action owner / response</a:t>
+                      </a:r>
+                    </a:p>
+                  </a:txBody>
+                  <a:tcPr marL="91440" marR="91440" marT="45720" marB="45720" anchor="ctr">
+                    <a:solidFill>
+                      <a:srgbClr val="111111"/>
+                    </a:solidFill>
+                  </a:tcPr>
+                </a:tc>
+                <a:tc>
+                  <a:txBody>
+                    <a:bodyPr lIns="114300" tIns="76200" rIns="95250" bIns="76200"/>
+                    <a:lstStyle/>
+                    <a:p>
+                      <a:r>
+                        <a:rPr sz="1425" b="1">
+                          <a:solidFill>
+                            <a:srgbClr val="FFFFFF"/>
+                          </a:solidFill>
+                          <a:latin typeface="Arial"/>
+                          <a:ea typeface="Arial"/>
+                          <a:cs typeface="Arial"/>
+                        </a:rPr>
+                        <a:t>Due</a:t>
+                      </a:r>
+                    </a:p>
+                  </a:txBody>
+                  <a:tcPr marL="91440" marR="91440" marT="45720" marB="45720" anchor="ctr">
+                    <a:solidFill>
+                      <a:srgbClr val="111111"/>
+                    </a:solidFill>
+                  </a:tcPr>
+                </a:tc>
+              </a:tr>
+              <a:tr h="342900">
+                <a:tc>
+                  <a:txBody>
+                    <a:bodyPr lIns="114300" tIns="76200" rIns="95250" bIns="76200"/>
+                    <a:lstStyle/>
+                    <a:p>
+                      <a:r>
+                        <a:rPr sz="1425" b="0">
+                          <a:solidFill>
+                            <a:srgbClr val="111111"/>
+                          </a:solidFill>
+                          <a:latin typeface="Arial"/>
+                          <a:ea typeface="Arial"/>
+                          <a:cs typeface="Arial"/>
+                        </a:rPr>
+                        <a:t>D-01</a:t>
+                      </a:r>
+                    </a:p>
+                  </a:txBody>
+                  <a:tcPr marL="91440" marR="91440" marT="45720" marB="45720" anchor="ctr">
+                    <a:solidFill>
+                      <a:srgbClr val="F2F3F5"/>
+                    </a:solidFill>
+                  </a:tcPr>
+                </a:tc>
+                <a:tc>
+                  <a:txBody>
+                    <a:bodyPr lIns="114300" tIns="76200" rIns="95250" bIns="76200"/>
+                    <a:lstStyle/>
+                    <a:p>
+                      <a:r>
+                        <a:rPr sz="1425" b="0">
+                          <a:solidFill>
+                            <a:srgbClr val="111111"/>
+                          </a:solidFill>
+                          <a:latin typeface="Arial"/>
+                          <a:ea typeface="Arial"/>
+                          <a:cs typeface="Arial"/>
+                        </a:rPr>
+                        <a:t>40 m³ below plan</a:t>
+                      </a:r>
+                    </a:p>
+                  </a:txBody>
+                  <a:tcPr marL="91440" marR="91440" marT="45720" marB="45720" anchor="ctr">
+                    <a:solidFill>
+                      <a:srgbClr val="F2F3F5"/>
+                    </a:solidFill>
+                  </a:tcPr>
+                </a:tc>
+                <a:tc>
+                  <a:txBody>
+                    <a:bodyPr lIns="114300" tIns="76200" rIns="95250" bIns="76200"/>
+                    <a:lstStyle/>
+                    <a:p>
+                      <a:r>
+                        <a:rPr sz="1425" b="0">
+                          <a:solidFill>
+                            <a:srgbClr val="111111"/>
+                          </a:solidFill>
+                          <a:latin typeface="Arial"/>
+                          <a:ea typeface="Arial"/>
+                          <a:cs typeface="Arial"/>
+                        </a:rPr>
+                        <a:t>Site manager: submit recovery plan</a:t>
+                      </a:r>
+                    </a:p>
+                  </a:txBody>
+                  <a:tcPr marL="91440" marR="91440" marT="45720" marB="45720" anchor="ctr">
+                    <a:solidFill>
+                      <a:srgbClr val="F2F3F5"/>
+                    </a:solidFill>
+                  </a:tcPr>
+                </a:tc>
+                <a:tc>
+                  <a:txBody>
+                    <a:bodyPr lIns="114300" tIns="76200" rIns="95250" bIns="76200"/>
+                    <a:lstStyle/>
+                    <a:p>
+                      <a:r>
+                        <a:rPr sz="1425" b="0">
+                          <a:solidFill>
+                            <a:srgbClr val="111111"/>
+                          </a:solidFill>
+                          <a:latin typeface="Arial"/>
+                          <a:ea typeface="Arial"/>
+                          <a:cs typeface="Arial"/>
+                        </a:rPr>
+                        <a:t>02 Apr 2027</a:t>
+                      </a:r>
+                    </a:p>
+                  </a:txBody>
+                  <a:tcPr marL="91440" marR="91440" marT="45720" marB="45720" anchor="ctr">
+                    <a:solidFill>
+                      <a:srgbClr val="F2F3F5"/>
+                    </a:solidFill>
+                  </a:tcPr>
+                </a:tc>
+              </a:tr>
+              <a:tr h="342900">
+                <a:tc>
+                  <a:txBody>
+                    <a:bodyPr lIns="114300" tIns="76200" rIns="95250" bIns="76200"/>
+                    <a:lstStyle/>
+                    <a:p>
+                      <a:r>
+                        <a:rPr sz="1425" b="0">
+                          <a:solidFill>
+                            <a:srgbClr val="111111"/>
+                          </a:solidFill>
+                          <a:latin typeface="Arial"/>
+                          <a:ea typeface="Arial"/>
+                          <a:cs typeface="Arial"/>
+                        </a:rPr>
+                        <a:t>V-01</a:t>
+                      </a:r>
+                    </a:p>
+                  </a:txBody>
+                  <a:tcPr marL="91440" marR="91440" marT="45720" marB="45720" anchor="ctr">
+                    <a:solidFill>
+                      <a:srgbClr val="FFFFFF"/>
+                    </a:solidFill>
+                  </a:tcPr>
+                </a:tc>
+                <a:tc>
+                  <a:txBody>
+                    <a:bodyPr lIns="114300" tIns="76200" rIns="95250" bIns="76200"/>
+                    <a:lstStyle/>
+                    <a:p>
+                      <a:r>
+                        <a:rPr sz="1425" b="0">
+                          <a:solidFill>
+                            <a:srgbClr val="111111"/>
+                          </a:solidFill>
+                          <a:latin typeface="Arial"/>
+                          <a:ea typeface="Arial"/>
+                          <a:cs typeface="Arial"/>
+                        </a:rPr>
+                        <a:t>20 m³ unverified</a:t>
+                      </a:r>
+                    </a:p>
+                  </a:txBody>
+                  <a:tcPr marL="91440" marR="91440" marT="45720" marB="45720" anchor="ctr">
+                    <a:solidFill>
+                      <a:srgbClr val="FFFFFF"/>
+                    </a:solidFill>
+                  </a:tcPr>
+                </a:tc>
+                <a:tc>
+                  <a:txBody>
+                    <a:bodyPr lIns="114300" tIns="76200" rIns="95250" bIns="76200"/>
+                    <a:lstStyle/>
+                    <a:p>
+                      <a:r>
+                        <a:rPr sz="1425" b="0">
+                          <a:solidFill>
+                            <a:srgbClr val="111111"/>
+                          </a:solidFill>
+                          <a:latin typeface="Arial"/>
+                          <a:ea typeface="Arial"/>
+                          <a:cs typeface="Arial"/>
+                        </a:rPr>
+                        <a:t>Site engineer: reconcile records</a:t>
+                      </a:r>
+                    </a:p>
+                  </a:txBody>
+                  <a:tcPr marL="91440" marR="91440" marT="45720" marB="45720" anchor="ctr">
+                    <a:solidFill>
+                      <a:srgbClr val="FFFFFF"/>
+                    </a:solidFill>
+                  </a:tcPr>
+                </a:tc>
+                <a:tc>
+                  <a:txBody>
+                    <a:bodyPr lIns="114300" tIns="76200" rIns="95250" bIns="76200"/>
+                    <a:lstStyle/>
+                    <a:p>
+                      <a:r>
+                        <a:rPr sz="1425" b="0">
+                          <a:solidFill>
+                            <a:srgbClr val="111111"/>
+                          </a:solidFill>
+                          <a:latin typeface="Arial"/>
+                          <a:ea typeface="Arial"/>
+                          <a:cs typeface="Arial"/>
+                        </a:rPr>
+                        <a:t>02 Apr 2027</a:t>
+                      </a:r>
+                    </a:p>
+                  </a:txBody>
+                  <a:tcPr marL="91440" marR="91440" marT="45720" marB="45720" anchor="ctr">
+                    <a:solidFill>
+                      <a:srgbClr val="FFFFFF"/>
+                    </a:solidFill>
+                  </a:tcPr>
+                </a:tc>
+              </a:tr>
+            </a:tbl>
+          </a:graphicData>
+        </a:graphic>
+      </p:graphicFrame>
+    </p:spTree>
+    <p:extLst>
+      <p:ext uri="{BB962C8B-B14F-4D97-AF65-F5344CB8AC3E}">
+        <p14:creationId xmlns:p14="http://schemas.microsoft.com/office/powerpoint/2010/main" val="1587971357"/>
+      </p:ext>
+    </p:extLst>
+  </p:cSld>
+</p:sld>
+</file>
+
+<file path=ppt/slides/slide18.xml><?xml version="1.0" encoding="utf-8"?>
+<p:sld xmlns:p="http://schemas.openxmlformats.org/presentationml/2006/main">
+  <p:cSld>
+    <p:bg>
+      <p:bgPr>
+        <a:solidFill xmlns:a="http://schemas.openxmlformats.org/drawingml/2006/main">
+          <a:srgbClr val="FFFFFF"/>
+        </a:solidFill>
+      </p:bgPr>
+    </p:bg>
+    <p:spTree>
+      <p:nvGrpSpPr>
+        <p:cNvPr id="1" name=""/>
+        <p:cNvGrpSpPr/>
+        <p:nvPr/>
+      </p:nvGrpSpPr>
+      <p:grpSpPr>
+        <a:xfrm xmlns:a="http://schemas.openxmlformats.org/drawingml/2006/main"/>
+      </p:grpSpPr>
+      <p:sp>
+        <p:nvSpPr>
+          <p:cNvPr id="27" name="training-text-16">
+            <a:extLst xmlns:a="http://schemas.openxmlformats.org/drawingml/2006/main">
+              <a:ext uri="{FF2B5EF4-FFF2-40B4-BE49-F238E27FC236}">
+                <a16:creationId xmlns:a16="http://schemas.microsoft.com/office/drawing/2014/main" id="{67D24B3F-7946-4BC7-AF54-7C254A2794E8}"/>
+              </a:ext>
+            </a:extLst>
+          </p:cNvPr>
+          <p:cNvSpPr>
+            <a:spLocks xmlns:a="http://schemas.openxmlformats.org/drawingml/2006/main" noGrp="1"/>
+          </p:cNvSpPr>
+          <p:nvPr/>
+        </p:nvSpPr>
+        <p:spPr>
+          <a:xfrm xmlns:a="http://schemas.openxmlformats.org/drawingml/2006/main">
+            <a:off x="609600" y="323850"/>
+            <a:ext cx="10972800" cy="266700"/>
+          </a:xfrm>
+          <a:prstGeom xmlns:a="http://schemas.openxmlformats.org/drawingml/2006/main" prst="rect">
+            <a:avLst/>
+          </a:prstGeom>
+          <a:noFill xmlns:a="http://schemas.openxmlformats.org/drawingml/2006/main"/>
+          <a:ln xmlns:a="http://schemas.openxmlformats.org/drawingml/2006/main" w="0">
+            <a:noFill/>
+          </a:ln>
+        </p:spPr>
+        <p:txBody>
+          <a:bodyPr xmlns:a="http://schemas.openxmlformats.org/drawingml/2006/main" lIns="0" tIns="0" rIns="0" bIns="0" anchor="t">
+            <a:noAutofit/>
+          </a:bodyPr>
+          <a:lstStyle xmlns:a="http://schemas.openxmlformats.org/drawingml/2006/main"/>
+          <a:p xmlns:a="http://schemas.openxmlformats.org/drawingml/2006/main">
+            <a:pPr>
+              <a:defRPr sz="1275" b="1">
+                <a:solidFill>
+                  <a:srgbClr val="2563EB"/>
+                </a:solidFill>
+                <a:latin typeface="Arial"/>
+                <a:ea typeface="Arial"/>
+                <a:cs typeface="Arial"/>
+              </a:defRPr>
+            </a:pPr>
+            <a:r>
+              <a:rPr sz="1275" b="1">
+                <a:solidFill>
+                  <a:srgbClr val="2563EB"/>
+                </a:solidFill>
+                <a:latin typeface="Arial"/>
+                <a:ea typeface="Arial"/>
+                <a:cs typeface="Arial"/>
+              </a:rPr>
+              <a:t>TRAINING 03 / ISOLATED CPM MODEL</a:t>
+            </a:r>
+          </a:p>
+        </p:txBody>
+      </p:sp>
+      <p:sp>
+        <p:nvSpPr>
+          <p:cNvPr id="2" name="training-text-17">
+            <a:extLst xmlns:a="http://schemas.openxmlformats.org/drawingml/2006/main">
+              <a:ext uri="{FF2B5EF4-FFF2-40B4-BE49-F238E27FC236}">
+                <a16:creationId xmlns:a16="http://schemas.microsoft.com/office/drawing/2014/main" id="{61EF46F7-8035-46B2-A8D6-16219552AC72}"/>
+              </a:ext>
+            </a:extLst>
+          </p:cNvPr>
+          <p:cNvSpPr>
+            <a:spLocks xmlns:a="http://schemas.openxmlformats.org/drawingml/2006/main" noGrp="1"/>
+          </p:cNvSpPr>
+          <p:nvPr/>
+        </p:nvSpPr>
+        <p:spPr>
+          <a:xfrm xmlns:a="http://schemas.openxmlformats.org/drawingml/2006/main">
+            <a:off x="609600" y="800100"/>
+            <a:ext cx="10972800" cy="1028700"/>
+          </a:xfrm>
+          <a:prstGeom xmlns:a="http://schemas.openxmlformats.org/drawingml/2006/main" prst="rect">
+            <a:avLst/>
+          </a:prstGeom>
+          <a:noFill xmlns:a="http://schemas.openxmlformats.org/drawingml/2006/main"/>
+          <a:ln xmlns:a="http://schemas.openxmlformats.org/drawingml/2006/main" w="0">
+            <a:noFill/>
+          </a:ln>
+        </p:spPr>
+        <p:txBody>
+          <a:bodyPr xmlns:a="http://schemas.openxmlformats.org/drawingml/2006/main" lIns="0" tIns="0" rIns="0" bIns="0" anchor="t">
+            <a:noAutofit/>
+          </a:bodyPr>
+          <a:lstStyle xmlns:a="http://schemas.openxmlformats.org/drawingml/2006/main"/>
+          <a:p xmlns:a="http://schemas.openxmlformats.org/drawingml/2006/main">
+            <a:pPr>
+              <a:defRPr sz="3300" b="1">
+                <a:solidFill>
+                  <a:srgbClr val="111111"/>
+                </a:solidFill>
+                <a:latin typeface="Arial"/>
+                <a:ea typeface="Arial"/>
+                <a:cs typeface="Arial"/>
+              </a:defRPr>
+            </a:pPr>
+            <a:r>
+              <a:rPr sz="3300" b="1">
+                <a:solidFill>
+                  <a:srgbClr val="111111"/>
+                </a:solidFill>
+                <a:latin typeface="Arial"/>
+                <a:ea typeface="Arial"/>
+                <a:cs typeface="Arial"/>
+              </a:rPr>
+              <a:t>Delay Analysis: Illustrative TIA</a:t>
+            </a:r>
+          </a:p>
+        </p:txBody>
+      </p:sp>
+      <p:sp>
+        <p:nvSpPr>
+          <p:cNvPr id="3" name="training-text-18">
+            <a:extLst xmlns:a="http://schemas.openxmlformats.org/drawingml/2006/main">
+              <a:ext uri="{FF2B5EF4-FFF2-40B4-BE49-F238E27FC236}">
+                <a16:creationId xmlns:a16="http://schemas.microsoft.com/office/drawing/2014/main" id="{D3C4EF49-C91A-426C-B992-C3EF4BFF7747}"/>
+              </a:ext>
+            </a:extLst>
+          </p:cNvPr>
+          <p:cNvSpPr>
+            <a:spLocks xmlns:a="http://schemas.openxmlformats.org/drawingml/2006/main" noGrp="1"/>
+          </p:cNvSpPr>
+          <p:nvPr/>
+        </p:nvSpPr>
+        <p:spPr>
+          <a:xfrm xmlns:a="http://schemas.openxmlformats.org/drawingml/2006/main">
+            <a:off x="609600" y="6143625"/>
+            <a:ext cx="10972800" cy="247650"/>
+          </a:xfrm>
+          <a:prstGeom xmlns:a="http://schemas.openxmlformats.org/drawingml/2006/main" prst="rect">
+            <a:avLst/>
+          </a:prstGeom>
+          <a:noFill xmlns:a="http://schemas.openxmlformats.org/drawingml/2006/main"/>
+          <a:ln xmlns:a="http://schemas.openxmlformats.org/drawingml/2006/main" w="0">
+            <a:noFill/>
+          </a:ln>
+        </p:spPr>
+        <p:txBody>
+          <a:bodyPr xmlns:a="http://schemas.openxmlformats.org/drawingml/2006/main" lIns="0" tIns="0" rIns="0" bIns="0" anchor="t">
+            <a:noAutofit/>
+          </a:bodyPr>
+          <a:lstStyle xmlns:a="http://schemas.openxmlformats.org/drawingml/2006/main"/>
+          <a:p xmlns:a="http://schemas.openxmlformats.org/drawingml/2006/main">
+            <a:pPr>
+              <a:defRPr sz="1275" b="0">
+                <a:solidFill>
+                  <a:srgbClr val="565E68"/>
+                </a:solidFill>
+                <a:latin typeface="Arial"/>
+                <a:ea typeface="Arial"/>
+                <a:cs typeface="Arial"/>
+              </a:defRPr>
+            </a:pPr>
+            <a:r>
+              <a:rPr sz="1275" b="0">
+                <a:solidFill>
+                  <a:srgbClr val="565E68"/>
+                </a:solidFill>
+                <a:latin typeface="Arial"/>
+                <a:ea typeface="Arial"/>
+                <a:cs typeface="Arial"/>
+              </a:rPr>
+              <a:t>Independent training exercise using assumed events and data; not a live contractual claim.</a:t>
+            </a:r>
+          </a:p>
+        </p:txBody>
+      </p:sp>
+      <p:sp>
+        <p:nvSpPr>
+          <p:cNvPr id="4" name="">
+            <a:extLst xmlns:a="http://schemas.openxmlformats.org/drawingml/2006/main">
+              <a:ext uri="{FF2B5EF4-FFF2-40B4-BE49-F238E27FC236}">
+                <a16:creationId xmlns:a16="http://schemas.microsoft.com/office/drawing/2014/main" id="{E23C74CB-C37C-4DA4-B36A-3CC37E606C0E}"/>
+              </a:ext>
+            </a:extLst>
+          </p:cNvPr>
+          <p:cNvSpPr>
+            <a:spLocks xmlns:a="http://schemas.openxmlformats.org/drawingml/2006/main" noGrp="1"/>
+          </p:cNvSpPr>
+          <p:nvPr/>
+        </p:nvSpPr>
+        <p:spPr>
+          <a:xfrm xmlns:a="http://schemas.openxmlformats.org/drawingml/2006/main">
+            <a:off x="609600" y="6457950"/>
+            <a:ext cx="10972800" cy="0"/>
+          </a:xfrm>
+          <a:prstGeom xmlns:a="http://schemas.openxmlformats.org/drawingml/2006/main" prst="line">
+            <a:avLst/>
+          </a:prstGeom>
+          <a:noFill xmlns:a="http://schemas.openxmlformats.org/drawingml/2006/main"/>
+          <a:ln xmlns:a="http://schemas.openxmlformats.org/drawingml/2006/main" w="9525">
+            <a:solidFill>
+              <a:srgbClr val="D8DDE3"/>
+            </a:solidFill>
+          </a:ln>
+        </p:spPr>
+      </p:sp>
+      <p:sp>
+        <p:nvSpPr>
+          <p:cNvPr id="5" name="training-text-19">
+            <a:extLst xmlns:a="http://schemas.openxmlformats.org/drawingml/2006/main">
+              <a:ext uri="{FF2B5EF4-FFF2-40B4-BE49-F238E27FC236}">
+                <a16:creationId xmlns:a16="http://schemas.microsoft.com/office/drawing/2014/main" id="{DBAFB714-32B0-430F-80F2-32CAAAC7CE3E}"/>
+              </a:ext>
+            </a:extLst>
+          </p:cNvPr>
+          <p:cNvSpPr>
+            <a:spLocks xmlns:a="http://schemas.openxmlformats.org/drawingml/2006/main" noGrp="1"/>
+          </p:cNvSpPr>
+          <p:nvPr/>
+        </p:nvSpPr>
+        <p:spPr>
+          <a:xfrm xmlns:a="http://schemas.openxmlformats.org/drawingml/2006/main">
+            <a:off x="609600" y="6572250"/>
+            <a:ext cx="9334500" cy="171450"/>
+          </a:xfrm>
+          <a:prstGeom xmlns:a="http://schemas.openxmlformats.org/drawingml/2006/main" prst="rect">
+            <a:avLst/>
+          </a:prstGeom>
+          <a:noFill xmlns:a="http://schemas.openxmlformats.org/drawingml/2006/main"/>
+          <a:ln xmlns:a="http://schemas.openxmlformats.org/drawingml/2006/main" w="0">
+            <a:noFill/>
+          </a:ln>
+        </p:spPr>
+        <p:txBody>
+          <a:bodyPr xmlns:a="http://schemas.openxmlformats.org/drawingml/2006/main" lIns="0" tIns="0" rIns="0" bIns="0" anchor="t">
+            <a:noAutofit/>
+          </a:bodyPr>
+          <a:lstStyle xmlns:a="http://schemas.openxmlformats.org/drawingml/2006/main"/>
+          <a:p xmlns:a="http://schemas.openxmlformats.org/drawingml/2006/main">
+            <a:pPr>
+              <a:defRPr sz="975" b="0">
+                <a:solidFill>
+                  <a:srgbClr val="565E68"/>
+                </a:solidFill>
+                <a:latin typeface="Arial"/>
+                <a:ea typeface="Arial"/>
+                <a:cs typeface="Arial"/>
+              </a:defRPr>
+            </a:pPr>
+            <a:r>
+              <a:rPr sz="975" b="0">
+                <a:solidFill>
+                  <a:srgbClr val="565E68"/>
+                </a:solidFill>
+                <a:latin typeface="Arial"/>
+                <a:ea typeface="Arial"/>
+                <a:cs typeface="Arial"/>
+              </a:rPr>
+              <a:t>ALI BAYOUMI  /  CONSULTANT REVIEW TRAINING</a:t>
+            </a:r>
+          </a:p>
+        </p:txBody>
+      </p:sp>
+      <p:sp>
+        <p:nvSpPr>
+          <p:cNvPr id="6" name="training-text-20">
+            <a:extLst xmlns:a="http://schemas.openxmlformats.org/drawingml/2006/main">
+              <a:ext uri="{FF2B5EF4-FFF2-40B4-BE49-F238E27FC236}">
+                <a16:creationId xmlns:a16="http://schemas.microsoft.com/office/drawing/2014/main" id="{1862C48E-9A8F-4108-AC4E-8EEB587E4295}"/>
+              </a:ext>
+            </a:extLst>
+          </p:cNvPr>
+          <p:cNvSpPr>
+            <a:spLocks xmlns:a="http://schemas.openxmlformats.org/drawingml/2006/main" noGrp="1"/>
+          </p:cNvSpPr>
+          <p:nvPr/>
+        </p:nvSpPr>
+        <p:spPr>
+          <a:xfrm xmlns:a="http://schemas.openxmlformats.org/drawingml/2006/main">
+            <a:off x="11144250" y="6524625"/>
+            <a:ext cx="438150" cy="247650"/>
+          </a:xfrm>
+          <a:prstGeom xmlns:a="http://schemas.openxmlformats.org/drawingml/2006/main" prst="rect">
+            <a:avLst/>
+          </a:prstGeom>
+          <a:noFill xmlns:a="http://schemas.openxmlformats.org/drawingml/2006/main"/>
+          <a:ln xmlns:a="http://schemas.openxmlformats.org/drawingml/2006/main" w="0">
+            <a:noFill/>
+          </a:ln>
+        </p:spPr>
+        <p:txBody>
+          <a:bodyPr xmlns:a="http://schemas.openxmlformats.org/drawingml/2006/main" lIns="0" tIns="0" rIns="0" bIns="0" anchor="t">
+            <a:noAutofit/>
+          </a:bodyPr>
+          <a:lstStyle xmlns:a="http://schemas.openxmlformats.org/drawingml/2006/main"/>
+          <a:p xmlns:a="http://schemas.openxmlformats.org/drawingml/2006/main">
+            <a:pPr>
+              <a:defRPr sz="1350" b="0">
+                <a:solidFill>
+                  <a:srgbClr val="111111"/>
+                </a:solidFill>
+                <a:latin typeface="Arial"/>
+                <a:ea typeface="Arial"/>
+                <a:cs typeface="Arial"/>
+              </a:defRPr>
+            </a:pPr>
+            <a:r>
+              <a:rPr sz="1350" b="0">
+                <a:solidFill>
+                  <a:srgbClr val="111111"/>
+                </a:solidFill>
+                <a:latin typeface="Arial"/>
+                <a:ea typeface="Arial"/>
+                <a:cs typeface="Arial"/>
+              </a:rPr>
+              <a:t>18</a:t>
+            </a:r>
+          </a:p>
+        </p:txBody>
+      </p:sp>
+      <p:sp>
+        <p:nvSpPr>
+          <p:cNvPr id="7" name="training-text-21">
+            <a:extLst xmlns:a="http://schemas.openxmlformats.org/drawingml/2006/main">
+              <a:ext uri="{FF2B5EF4-FFF2-40B4-BE49-F238E27FC236}">
+                <a16:creationId xmlns:a16="http://schemas.microsoft.com/office/drawing/2014/main" id="{7A00A156-5D96-4772-B72F-F0089B4520FE}"/>
+              </a:ext>
+            </a:extLst>
+          </p:cNvPr>
+          <p:cNvSpPr>
+            <a:spLocks xmlns:a="http://schemas.openxmlformats.org/drawingml/2006/main" noGrp="1"/>
+          </p:cNvSpPr>
+          <p:nvPr/>
+        </p:nvSpPr>
+        <p:spPr>
+          <a:xfrm xmlns:a="http://schemas.openxmlformats.org/drawingml/2006/main">
+            <a:off x="609600" y="1762125"/>
+            <a:ext cx="10972800" cy="323850"/>
+          </a:xfrm>
+          <a:prstGeom xmlns:a="http://schemas.openxmlformats.org/drawingml/2006/main" prst="rect">
+            <a:avLst/>
+          </a:prstGeom>
+          <a:noFill xmlns:a="http://schemas.openxmlformats.org/drawingml/2006/main"/>
+          <a:ln xmlns:a="http://schemas.openxmlformats.org/drawingml/2006/main" w="0">
+            <a:noFill/>
+          </a:ln>
+        </p:spPr>
+        <p:txBody>
+          <a:bodyPr xmlns:a="http://schemas.openxmlformats.org/drawingml/2006/main" lIns="0" tIns="0" rIns="0" bIns="0" anchor="t">
+            <a:noAutofit/>
+          </a:bodyPr>
+          <a:lstStyle xmlns:a="http://schemas.openxmlformats.org/drawingml/2006/main"/>
+          <a:p xmlns:a="http://schemas.openxmlformats.org/drawingml/2006/main">
+            <a:pPr>
+              <a:defRPr sz="1650" b="0">
+                <a:solidFill>
+                  <a:srgbClr val="565E68"/>
+                </a:solidFill>
+                <a:latin typeface="Arial"/>
+                <a:ea typeface="Arial"/>
+                <a:cs typeface="Arial"/>
+              </a:defRPr>
+            </a:pPr>
+            <a:r>
+              <a:rPr sz="1650" b="0">
+                <a:solidFill>
+                  <a:srgbClr val="565E68"/>
+                </a:solidFill>
+                <a:latin typeface="Arial"/>
+                <a:ea typeface="Arial"/>
+                <a:cs typeface="Arial"/>
+              </a:rPr>
+              <a:t>Model data date: 05 Apr 2027, 08:00. Mon–Fri, 8h/day, no holidays.</a:t>
+            </a:r>
+          </a:p>
+        </p:txBody>
+      </p:sp>
+      <p:sp>
+        <p:nvSpPr>
+          <p:cNvPr id="8" name="fragnet-node-0">
+            <a:extLst xmlns:a="http://schemas.openxmlformats.org/drawingml/2006/main">
+              <a:ext uri="{FF2B5EF4-FFF2-40B4-BE49-F238E27FC236}">
+                <a16:creationId xmlns:a16="http://schemas.microsoft.com/office/drawing/2014/main" id="{11A4F47D-0F3D-4357-86BA-1F67014DC3D4}"/>
+              </a:ext>
+            </a:extLst>
+          </p:cNvPr>
+          <p:cNvSpPr>
+            <a:spLocks xmlns:a="http://schemas.openxmlformats.org/drawingml/2006/main" noGrp="1"/>
+          </p:cNvSpPr>
+          <p:nvPr/>
+        </p:nvSpPr>
+        <p:spPr>
+          <a:xfrm xmlns:a="http://schemas.openxmlformats.org/drawingml/2006/main">
+            <a:off x="609600" y="2314575"/>
+            <a:ext cx="2000250" cy="647700"/>
+          </a:xfrm>
+          <a:prstGeom xmlns:a="http://schemas.openxmlformats.org/drawingml/2006/main" prst="rect">
+            <a:avLst/>
+          </a:prstGeom>
+          <a:solidFill xmlns:a="http://schemas.openxmlformats.org/drawingml/2006/main">
+            <a:srgbClr val="FFFFFF"/>
+          </a:solidFill>
+          <a:ln xmlns:a="http://schemas.openxmlformats.org/drawingml/2006/main" w="9525">
+            <a:solidFill>
+              <a:srgbClr val="D8DDE3"/>
+            </a:solidFill>
+          </a:ln>
+        </p:spPr>
+      </p:sp>
+      <p:sp>
+        <p:nvSpPr>
+          <p:cNvPr id="9" name="training-text-22">
+            <a:extLst xmlns:a="http://schemas.openxmlformats.org/drawingml/2006/main">
+              <a:ext uri="{FF2B5EF4-FFF2-40B4-BE49-F238E27FC236}">
+                <a16:creationId xmlns:a16="http://schemas.microsoft.com/office/drawing/2014/main" id="{B44C195A-141F-4309-BF5E-4A34649E4A98}"/>
+              </a:ext>
+            </a:extLst>
+          </p:cNvPr>
+          <p:cNvSpPr>
+            <a:spLocks xmlns:a="http://schemas.openxmlformats.org/drawingml/2006/main" noGrp="1"/>
+          </p:cNvSpPr>
+          <p:nvPr/>
+        </p:nvSpPr>
+        <p:spPr>
+          <a:xfrm xmlns:a="http://schemas.openxmlformats.org/drawingml/2006/main">
+            <a:off x="723900" y="2400300"/>
+            <a:ext cx="1771650" cy="514350"/>
+          </a:xfrm>
+          <a:prstGeom xmlns:a="http://schemas.openxmlformats.org/drawingml/2006/main" prst="rect">
+            <a:avLst/>
+          </a:prstGeom>
+          <a:noFill xmlns:a="http://schemas.openxmlformats.org/drawingml/2006/main"/>
+          <a:ln xmlns:a="http://schemas.openxmlformats.org/drawingml/2006/main" w="0">
+            <a:noFill/>
+          </a:ln>
+        </p:spPr>
+        <p:txBody>
+          <a:bodyPr xmlns:a="http://schemas.openxmlformats.org/drawingml/2006/main" lIns="0" tIns="0" rIns="0" bIns="0" anchor="t">
+            <a:noAutofit/>
+          </a:bodyPr>
+          <a:lstStyle xmlns:a="http://schemas.openxmlformats.org/drawingml/2006/main"/>
+          <a:p xmlns:a="http://schemas.openxmlformats.org/drawingml/2006/main">
+            <a:pPr>
+              <a:defRPr sz="1575" b="0">
+                <a:solidFill>
+                  <a:srgbClr val="111111"/>
+                </a:solidFill>
+                <a:latin typeface="Arial"/>
+                <a:ea typeface="Arial"/>
+                <a:cs typeface="Arial"/>
+              </a:defRPr>
+            </a:pPr>
+            <a:r>
+              <a:rPr sz="1575" b="0">
+                <a:solidFill>
+                  <a:srgbClr val="111111"/>
+                </a:solidFill>
+                <a:latin typeface="Arial"/>
+                <a:ea typeface="Arial"/>
+                <a:cs typeface="Arial"/>
+              </a:rPr>
+              <a:t>Release</a:t>
+            </a:r>
+          </a:p>
+          <a:p xmlns:a="http://schemas.openxmlformats.org/drawingml/2006/main">
+            <a:pPr>
+              <a:defRPr sz="1575" b="0">
+                <a:solidFill>
+                  <a:srgbClr val="111111"/>
+                </a:solidFill>
+                <a:latin typeface="Arial"/>
+                <a:ea typeface="Arial"/>
+                <a:cs typeface="Arial"/>
+              </a:defRPr>
+            </a:pPr>
+            <a:r>
+              <a:rPr sz="1575" b="0">
+                <a:solidFill>
+                  <a:srgbClr val="111111"/>
+                </a:solidFill>
+                <a:latin typeface="Arial"/>
+                <a:ea typeface="Arial"/>
+                <a:cs typeface="Arial"/>
+              </a:rPr>
+              <a:t>0d</a:t>
+            </a:r>
+          </a:p>
+        </p:txBody>
+      </p:sp>
+      <p:sp>
+        <p:nvSpPr>
+          <p:cNvPr id="10" name="training-text-23">
+            <a:extLst xmlns:a="http://schemas.openxmlformats.org/drawingml/2006/main">
+              <a:ext uri="{FF2B5EF4-FFF2-40B4-BE49-F238E27FC236}">
+                <a16:creationId xmlns:a16="http://schemas.microsoft.com/office/drawing/2014/main" id="{7F0A4ACF-1328-4840-B2FB-90AF1A30A97B}"/>
+              </a:ext>
+            </a:extLst>
+          </p:cNvPr>
+          <p:cNvSpPr>
+            <a:spLocks xmlns:a="http://schemas.openxmlformats.org/drawingml/2006/main" noGrp="1"/>
+          </p:cNvSpPr>
+          <p:nvPr/>
+        </p:nvSpPr>
+        <p:spPr>
+          <a:xfrm xmlns:a="http://schemas.openxmlformats.org/drawingml/2006/main">
+            <a:off x="2628900" y="2476500"/>
+            <a:ext cx="219075" cy="333375"/>
+          </a:xfrm>
+          <a:prstGeom xmlns:a="http://schemas.openxmlformats.org/drawingml/2006/main" prst="rect">
+            <a:avLst/>
+          </a:prstGeom>
+          <a:noFill xmlns:a="http://schemas.openxmlformats.org/drawingml/2006/main"/>
+          <a:ln xmlns:a="http://schemas.openxmlformats.org/drawingml/2006/main" w="0">
+            <a:noFill/>
+          </a:ln>
+        </p:spPr>
+        <p:txBody>
+          <a:bodyPr xmlns:a="http://schemas.openxmlformats.org/drawingml/2006/main" lIns="0" tIns="0" rIns="0" bIns="0" anchor="t">
+            <a:noAutofit/>
+          </a:bodyPr>
+          <a:lstStyle xmlns:a="http://schemas.openxmlformats.org/drawingml/2006/main"/>
+          <a:p xmlns:a="http://schemas.openxmlformats.org/drawingml/2006/main">
+            <a:pPr>
+              <a:defRPr sz="1875" b="0">
+                <a:solidFill>
+                  <a:srgbClr val="111111"/>
+                </a:solidFill>
+                <a:latin typeface="Arial"/>
+                <a:ea typeface="Arial"/>
+                <a:cs typeface="Arial"/>
+              </a:defRPr>
+            </a:pPr>
+            <a:r>
+              <a:rPr sz="1875" b="0">
+                <a:solidFill>
+                  <a:srgbClr val="111111"/>
+                </a:solidFill>
+                <a:latin typeface="Arial"/>
+                <a:ea typeface="Arial"/>
+                <a:cs typeface="Arial"/>
+              </a:rPr>
+              <a:t>→</a:t>
+            </a:r>
+          </a:p>
+        </p:txBody>
+      </p:sp>
+      <p:sp>
+        <p:nvSpPr>
+          <p:cNvPr id="11" name="fragnet-node-1">
+            <a:extLst xmlns:a="http://schemas.openxmlformats.org/drawingml/2006/main">
+              <a:ext uri="{FF2B5EF4-FFF2-40B4-BE49-F238E27FC236}">
+                <a16:creationId xmlns:a16="http://schemas.microsoft.com/office/drawing/2014/main" id="{9156C209-33D9-4F42-A087-C4D805F019A2}"/>
+              </a:ext>
+            </a:extLst>
+          </p:cNvPr>
+          <p:cNvSpPr>
+            <a:spLocks xmlns:a="http://schemas.openxmlformats.org/drawingml/2006/main" noGrp="1"/>
+          </p:cNvSpPr>
+          <p:nvPr/>
+        </p:nvSpPr>
+        <p:spPr>
+          <a:xfrm xmlns:a="http://schemas.openxmlformats.org/drawingml/2006/main">
+            <a:off x="2838450" y="2314575"/>
+            <a:ext cx="2000250" cy="647700"/>
+          </a:xfrm>
+          <a:prstGeom xmlns:a="http://schemas.openxmlformats.org/drawingml/2006/main" prst="rect">
+            <a:avLst/>
+          </a:prstGeom>
+          <a:solidFill xmlns:a="http://schemas.openxmlformats.org/drawingml/2006/main">
+            <a:srgbClr val="EDF3FD"/>
+          </a:solidFill>
+          <a:ln xmlns:a="http://schemas.openxmlformats.org/drawingml/2006/main" w="9525">
+            <a:solidFill>
+              <a:srgbClr val="2563EB"/>
+            </a:solidFill>
+          </a:ln>
+        </p:spPr>
+      </p:sp>
+      <p:sp>
+        <p:nvSpPr>
+          <p:cNvPr id="12" name="training-text-24">
+            <a:extLst xmlns:a="http://schemas.openxmlformats.org/drawingml/2006/main">
+              <a:ext uri="{FF2B5EF4-FFF2-40B4-BE49-F238E27FC236}">
+                <a16:creationId xmlns:a16="http://schemas.microsoft.com/office/drawing/2014/main" id="{0B27F3EA-2170-4CB2-985D-F2F5E86781AE}"/>
+              </a:ext>
+            </a:extLst>
+          </p:cNvPr>
+          <p:cNvSpPr>
+            <a:spLocks xmlns:a="http://schemas.openxmlformats.org/drawingml/2006/main" noGrp="1"/>
+          </p:cNvSpPr>
+          <p:nvPr/>
+        </p:nvSpPr>
+        <p:spPr>
+          <a:xfrm xmlns:a="http://schemas.openxmlformats.org/drawingml/2006/main">
+            <a:off x="2952750" y="2400300"/>
+            <a:ext cx="1771650" cy="514350"/>
+          </a:xfrm>
+          <a:prstGeom xmlns:a="http://schemas.openxmlformats.org/drawingml/2006/main" prst="rect">
+            <a:avLst/>
+          </a:prstGeom>
+          <a:noFill xmlns:a="http://schemas.openxmlformats.org/drawingml/2006/main"/>
+          <a:ln xmlns:a="http://schemas.openxmlformats.org/drawingml/2006/main" w="0">
+            <a:noFill/>
+          </a:ln>
+        </p:spPr>
+        <p:txBody>
+          <a:bodyPr xmlns:a="http://schemas.openxmlformats.org/drawingml/2006/main" lIns="0" tIns="0" rIns="0" bIns="0" anchor="t">
+            <a:noAutofit/>
+          </a:bodyPr>
+          <a:lstStyle xmlns:a="http://schemas.openxmlformats.org/drawingml/2006/main"/>
+          <a:p xmlns:a="http://schemas.openxmlformats.org/drawingml/2006/main">
+            <a:pPr>
+              <a:defRPr sz="1575" b="1">
+                <a:solidFill>
+                  <a:srgbClr val="2563EB"/>
+                </a:solidFill>
+                <a:latin typeface="Arial"/>
+                <a:ea typeface="Arial"/>
+                <a:cs typeface="Arial"/>
+              </a:defRPr>
+            </a:pPr>
+            <a:r>
+              <a:rPr sz="1575" b="1">
+                <a:solidFill>
+                  <a:srgbClr val="2563EB"/>
+                </a:solidFill>
+                <a:latin typeface="Arial"/>
+                <a:ea typeface="Arial"/>
+                <a:cs typeface="Arial"/>
+              </a:rPr>
+              <a:t>Clarification</a:t>
+            </a:r>
+          </a:p>
+          <a:p xmlns:a="http://schemas.openxmlformats.org/drawingml/2006/main">
+            <a:pPr>
+              <a:defRPr sz="1575" b="1">
+                <a:solidFill>
+                  <a:srgbClr val="2563EB"/>
+                </a:solidFill>
+                <a:latin typeface="Arial"/>
+                <a:ea typeface="Arial"/>
+                <a:cs typeface="Arial"/>
+              </a:defRPr>
+            </a:pPr>
+            <a:r>
+              <a:rPr sz="1575" b="1">
+                <a:solidFill>
+                  <a:srgbClr val="2563EB"/>
+                </a:solidFill>
+                <a:latin typeface="Arial"/>
+                <a:ea typeface="Arial"/>
+                <a:cs typeface="Arial"/>
+              </a:rPr>
+              <a:t>4d event</a:t>
+            </a:r>
+          </a:p>
+        </p:txBody>
+      </p:sp>
+      <p:sp>
+        <p:nvSpPr>
+          <p:cNvPr id="13" name="training-text-25">
+            <a:extLst xmlns:a="http://schemas.openxmlformats.org/drawingml/2006/main">
+              <a:ext uri="{FF2B5EF4-FFF2-40B4-BE49-F238E27FC236}">
+                <a16:creationId xmlns:a16="http://schemas.microsoft.com/office/drawing/2014/main" id="{89324393-4165-44C8-960E-232C21CF82F1}"/>
+              </a:ext>
+            </a:extLst>
+          </p:cNvPr>
+          <p:cNvSpPr>
+            <a:spLocks xmlns:a="http://schemas.openxmlformats.org/drawingml/2006/main" noGrp="1"/>
+          </p:cNvSpPr>
+          <p:nvPr/>
+        </p:nvSpPr>
+        <p:spPr>
+          <a:xfrm xmlns:a="http://schemas.openxmlformats.org/drawingml/2006/main">
+            <a:off x="4857750" y="2476500"/>
+            <a:ext cx="219075" cy="333375"/>
+          </a:xfrm>
+          <a:prstGeom xmlns:a="http://schemas.openxmlformats.org/drawingml/2006/main" prst="rect">
+            <a:avLst/>
+          </a:prstGeom>
+          <a:noFill xmlns:a="http://schemas.openxmlformats.org/drawingml/2006/main"/>
+          <a:ln xmlns:a="http://schemas.openxmlformats.org/drawingml/2006/main" w="0">
+            <a:noFill/>
+          </a:ln>
+        </p:spPr>
+        <p:txBody>
+          <a:bodyPr xmlns:a="http://schemas.openxmlformats.org/drawingml/2006/main" lIns="0" tIns="0" rIns="0" bIns="0" anchor="t">
+            <a:noAutofit/>
+          </a:bodyPr>
+          <a:lstStyle xmlns:a="http://schemas.openxmlformats.org/drawingml/2006/main"/>
+          <a:p xmlns:a="http://schemas.openxmlformats.org/drawingml/2006/main">
+            <a:pPr>
+              <a:defRPr sz="1875" b="0">
+                <a:solidFill>
+                  <a:srgbClr val="111111"/>
+                </a:solidFill>
+                <a:latin typeface="Arial"/>
+                <a:ea typeface="Arial"/>
+                <a:cs typeface="Arial"/>
+              </a:defRPr>
+            </a:pPr>
+            <a:r>
+              <a:rPr sz="1875" b="0">
+                <a:solidFill>
+                  <a:srgbClr val="111111"/>
+                </a:solidFill>
+                <a:latin typeface="Arial"/>
+                <a:ea typeface="Arial"/>
+                <a:cs typeface="Arial"/>
+              </a:rPr>
+              <a:t>→</a:t>
+            </a:r>
+          </a:p>
+        </p:txBody>
+      </p:sp>
+      <p:sp>
+        <p:nvSpPr>
+          <p:cNvPr id="14" name="fragnet-node-2">
+            <a:extLst xmlns:a="http://schemas.openxmlformats.org/drawingml/2006/main">
+              <a:ext uri="{FF2B5EF4-FFF2-40B4-BE49-F238E27FC236}">
+                <a16:creationId xmlns:a16="http://schemas.microsoft.com/office/drawing/2014/main" id="{70E307BE-EA48-47F3-B562-6C7DC69938B8}"/>
+              </a:ext>
+            </a:extLst>
+          </p:cNvPr>
+          <p:cNvSpPr>
+            <a:spLocks xmlns:a="http://schemas.openxmlformats.org/drawingml/2006/main" noGrp="1"/>
+          </p:cNvSpPr>
+          <p:nvPr/>
+        </p:nvSpPr>
+        <p:spPr>
+          <a:xfrm xmlns:a="http://schemas.openxmlformats.org/drawingml/2006/main">
+            <a:off x="5067300" y="2314575"/>
+            <a:ext cx="2000250" cy="647700"/>
+          </a:xfrm>
+          <a:prstGeom xmlns:a="http://schemas.openxmlformats.org/drawingml/2006/main" prst="rect">
+            <a:avLst/>
+          </a:prstGeom>
+          <a:solidFill xmlns:a="http://schemas.openxmlformats.org/drawingml/2006/main">
+            <a:srgbClr val="FFFFFF"/>
+          </a:solidFill>
+          <a:ln xmlns:a="http://schemas.openxmlformats.org/drawingml/2006/main" w="9525">
+            <a:solidFill>
+              <a:srgbClr val="D8DDE3"/>
+            </a:solidFill>
+          </a:ln>
+        </p:spPr>
+      </p:sp>
+      <p:sp>
+        <p:nvSpPr>
+          <p:cNvPr id="15" name="training-text-26">
+            <a:extLst xmlns:a="http://schemas.openxmlformats.org/drawingml/2006/main">
+              <a:ext uri="{FF2B5EF4-FFF2-40B4-BE49-F238E27FC236}">
+                <a16:creationId xmlns:a16="http://schemas.microsoft.com/office/drawing/2014/main" id="{C3CC65E1-D774-45B3-84C0-9BC5EB7DDF2E}"/>
+              </a:ext>
+            </a:extLst>
+          </p:cNvPr>
+          <p:cNvSpPr>
+            <a:spLocks xmlns:a="http://schemas.openxmlformats.org/drawingml/2006/main" noGrp="1"/>
+          </p:cNvSpPr>
+          <p:nvPr/>
+        </p:nvSpPr>
+        <p:spPr>
+          <a:xfrm xmlns:a="http://schemas.openxmlformats.org/drawingml/2006/main">
+            <a:off x="5181600" y="2400300"/>
+            <a:ext cx="1771650" cy="514350"/>
+          </a:xfrm>
+          <a:prstGeom xmlns:a="http://schemas.openxmlformats.org/drawingml/2006/main" prst="rect">
+            <a:avLst/>
+          </a:prstGeom>
+          <a:noFill xmlns:a="http://schemas.openxmlformats.org/drawingml/2006/main"/>
+          <a:ln xmlns:a="http://schemas.openxmlformats.org/drawingml/2006/main" w="0">
+            <a:noFill/>
+          </a:ln>
+        </p:spPr>
+        <p:txBody>
+          <a:bodyPr xmlns:a="http://schemas.openxmlformats.org/drawingml/2006/main" lIns="0" tIns="0" rIns="0" bIns="0" anchor="t">
+            <a:noAutofit/>
+          </a:bodyPr>
+          <a:lstStyle xmlns:a="http://schemas.openxmlformats.org/drawingml/2006/main"/>
+          <a:p xmlns:a="http://schemas.openxmlformats.org/drawingml/2006/main">
+            <a:pPr>
+              <a:defRPr sz="1575" b="0">
+                <a:solidFill>
+                  <a:srgbClr val="111111"/>
+                </a:solidFill>
+                <a:latin typeface="Arial"/>
+                <a:ea typeface="Arial"/>
+                <a:cs typeface="Arial"/>
+              </a:defRPr>
+            </a:pPr>
+            <a:r>
+              <a:rPr sz="1575" b="0">
+                <a:solidFill>
+                  <a:srgbClr val="111111"/>
+                </a:solidFill>
+                <a:latin typeface="Arial"/>
+                <a:ea typeface="Arial"/>
+                <a:cs typeface="Arial"/>
+              </a:rPr>
+              <a:t>Install</a:t>
+            </a:r>
+          </a:p>
+          <a:p xmlns:a="http://schemas.openxmlformats.org/drawingml/2006/main">
+            <a:pPr>
+              <a:defRPr sz="1575" b="0">
+                <a:solidFill>
+                  <a:srgbClr val="111111"/>
+                </a:solidFill>
+                <a:latin typeface="Arial"/>
+                <a:ea typeface="Arial"/>
+                <a:cs typeface="Arial"/>
+              </a:defRPr>
+            </a:pPr>
+            <a:r>
+              <a:rPr sz="1575" b="0">
+                <a:solidFill>
+                  <a:srgbClr val="111111"/>
+                </a:solidFill>
+                <a:latin typeface="Arial"/>
+                <a:ea typeface="Arial"/>
+                <a:cs typeface="Arial"/>
+              </a:rPr>
+              <a:t>10d</a:t>
+            </a:r>
+          </a:p>
+        </p:txBody>
+      </p:sp>
+      <p:sp>
+        <p:nvSpPr>
+          <p:cNvPr id="16" name="training-text-27">
+            <a:extLst xmlns:a="http://schemas.openxmlformats.org/drawingml/2006/main">
+              <a:ext uri="{FF2B5EF4-FFF2-40B4-BE49-F238E27FC236}">
+                <a16:creationId xmlns:a16="http://schemas.microsoft.com/office/drawing/2014/main" id="{5C6B2E9F-0DAC-40FF-837C-F8C51BC09600}"/>
+              </a:ext>
+            </a:extLst>
+          </p:cNvPr>
+          <p:cNvSpPr>
+            <a:spLocks xmlns:a="http://schemas.openxmlformats.org/drawingml/2006/main" noGrp="1"/>
+          </p:cNvSpPr>
+          <p:nvPr/>
+        </p:nvSpPr>
+        <p:spPr>
+          <a:xfrm xmlns:a="http://schemas.openxmlformats.org/drawingml/2006/main">
+            <a:off x="7086600" y="2476500"/>
+            <a:ext cx="219075" cy="333375"/>
+          </a:xfrm>
+          <a:prstGeom xmlns:a="http://schemas.openxmlformats.org/drawingml/2006/main" prst="rect">
+            <a:avLst/>
+          </a:prstGeom>
+          <a:noFill xmlns:a="http://schemas.openxmlformats.org/drawingml/2006/main"/>
+          <a:ln xmlns:a="http://schemas.openxmlformats.org/drawingml/2006/main" w="0">
+            <a:noFill/>
+          </a:ln>
+        </p:spPr>
+        <p:txBody>
+          <a:bodyPr xmlns:a="http://schemas.openxmlformats.org/drawingml/2006/main" lIns="0" tIns="0" rIns="0" bIns="0" anchor="t">
+            <a:noAutofit/>
+          </a:bodyPr>
+          <a:lstStyle xmlns:a="http://schemas.openxmlformats.org/drawingml/2006/main"/>
+          <a:p xmlns:a="http://schemas.openxmlformats.org/drawingml/2006/main">
+            <a:pPr>
+              <a:defRPr sz="1875" b="0">
+                <a:solidFill>
+                  <a:srgbClr val="111111"/>
+                </a:solidFill>
+                <a:latin typeface="Arial"/>
+                <a:ea typeface="Arial"/>
+                <a:cs typeface="Arial"/>
+              </a:defRPr>
+            </a:pPr>
+            <a:r>
+              <a:rPr sz="1875" b="0">
+                <a:solidFill>
+                  <a:srgbClr val="111111"/>
+                </a:solidFill>
+                <a:latin typeface="Arial"/>
+                <a:ea typeface="Arial"/>
+                <a:cs typeface="Arial"/>
+              </a:rPr>
+              <a:t>→</a:t>
+            </a:r>
+          </a:p>
+        </p:txBody>
+      </p:sp>
+      <p:sp>
+        <p:nvSpPr>
+          <p:cNvPr id="17" name="fragnet-node-3">
+            <a:extLst xmlns:a="http://schemas.openxmlformats.org/drawingml/2006/main">
+              <a:ext uri="{FF2B5EF4-FFF2-40B4-BE49-F238E27FC236}">
+                <a16:creationId xmlns:a16="http://schemas.microsoft.com/office/drawing/2014/main" id="{5E577C9E-0F11-4989-8E77-01E09945F8CE}"/>
+              </a:ext>
+            </a:extLst>
+          </p:cNvPr>
+          <p:cNvSpPr>
+            <a:spLocks xmlns:a="http://schemas.openxmlformats.org/drawingml/2006/main" noGrp="1"/>
+          </p:cNvSpPr>
+          <p:nvPr/>
+        </p:nvSpPr>
+        <p:spPr>
+          <a:xfrm xmlns:a="http://schemas.openxmlformats.org/drawingml/2006/main">
+            <a:off x="7296150" y="2314575"/>
+            <a:ext cx="2000250" cy="647700"/>
+          </a:xfrm>
+          <a:prstGeom xmlns:a="http://schemas.openxmlformats.org/drawingml/2006/main" prst="rect">
+            <a:avLst/>
+          </a:prstGeom>
+          <a:solidFill xmlns:a="http://schemas.openxmlformats.org/drawingml/2006/main">
+            <a:srgbClr val="FFFFFF"/>
+          </a:solidFill>
+          <a:ln xmlns:a="http://schemas.openxmlformats.org/drawingml/2006/main" w="9525">
+            <a:solidFill>
+              <a:srgbClr val="D8DDE3"/>
+            </a:solidFill>
+          </a:ln>
+        </p:spPr>
+      </p:sp>
+      <p:sp>
+        <p:nvSpPr>
+          <p:cNvPr id="18" name="training-text-28">
+            <a:extLst xmlns:a="http://schemas.openxmlformats.org/drawingml/2006/main">
+              <a:ext uri="{FF2B5EF4-FFF2-40B4-BE49-F238E27FC236}">
+                <a16:creationId xmlns:a16="http://schemas.microsoft.com/office/drawing/2014/main" id="{C57BB7C1-1488-45CB-8850-D8CF14F2B438}"/>
+              </a:ext>
+            </a:extLst>
+          </p:cNvPr>
+          <p:cNvSpPr>
+            <a:spLocks xmlns:a="http://schemas.openxmlformats.org/drawingml/2006/main" noGrp="1"/>
+          </p:cNvSpPr>
+          <p:nvPr/>
+        </p:nvSpPr>
+        <p:spPr>
+          <a:xfrm xmlns:a="http://schemas.openxmlformats.org/drawingml/2006/main">
+            <a:off x="7410450" y="2400300"/>
+            <a:ext cx="1771650" cy="514350"/>
+          </a:xfrm>
+          <a:prstGeom xmlns:a="http://schemas.openxmlformats.org/drawingml/2006/main" prst="rect">
+            <a:avLst/>
+          </a:prstGeom>
+          <a:noFill xmlns:a="http://schemas.openxmlformats.org/drawingml/2006/main"/>
+          <a:ln xmlns:a="http://schemas.openxmlformats.org/drawingml/2006/main" w="0">
+            <a:noFill/>
+          </a:ln>
+        </p:spPr>
+        <p:txBody>
+          <a:bodyPr xmlns:a="http://schemas.openxmlformats.org/drawingml/2006/main" lIns="0" tIns="0" rIns="0" bIns="0" anchor="t">
+            <a:noAutofit/>
+          </a:bodyPr>
+          <a:lstStyle xmlns:a="http://schemas.openxmlformats.org/drawingml/2006/main"/>
+          <a:p xmlns:a="http://schemas.openxmlformats.org/drawingml/2006/main">
+            <a:pPr>
+              <a:defRPr sz="1575" b="0">
+                <a:solidFill>
+                  <a:srgbClr val="111111"/>
+                </a:solidFill>
+                <a:latin typeface="Arial"/>
+                <a:ea typeface="Arial"/>
+                <a:cs typeface="Arial"/>
+              </a:defRPr>
+            </a:pPr>
+            <a:r>
+              <a:rPr sz="1575" b="0">
+                <a:solidFill>
+                  <a:srgbClr val="111111"/>
+                </a:solidFill>
+                <a:latin typeface="Arial"/>
+                <a:ea typeface="Arial"/>
+                <a:cs typeface="Arial"/>
+              </a:rPr>
+              <a:t>Test</a:t>
+            </a:r>
+          </a:p>
+          <a:p xmlns:a="http://schemas.openxmlformats.org/drawingml/2006/main">
+            <a:pPr>
+              <a:defRPr sz="1575" b="0">
+                <a:solidFill>
+                  <a:srgbClr val="111111"/>
+                </a:solidFill>
+                <a:latin typeface="Arial"/>
+                <a:ea typeface="Arial"/>
+                <a:cs typeface="Arial"/>
+              </a:defRPr>
+            </a:pPr>
+            <a:r>
+              <a:rPr sz="1575" b="0">
+                <a:solidFill>
+                  <a:srgbClr val="111111"/>
+                </a:solidFill>
+                <a:latin typeface="Arial"/>
+                <a:ea typeface="Arial"/>
+                <a:cs typeface="Arial"/>
+              </a:rPr>
+              <a:t>3d</a:t>
+            </a:r>
+          </a:p>
+        </p:txBody>
+      </p:sp>
+      <p:sp>
+        <p:nvSpPr>
+          <p:cNvPr id="19" name="training-text-29">
+            <a:extLst xmlns:a="http://schemas.openxmlformats.org/drawingml/2006/main">
+              <a:ext uri="{FF2B5EF4-FFF2-40B4-BE49-F238E27FC236}">
+                <a16:creationId xmlns:a16="http://schemas.microsoft.com/office/drawing/2014/main" id="{BA5F7C7E-3441-4883-815E-26821ABFDDE4}"/>
+              </a:ext>
+            </a:extLst>
+          </p:cNvPr>
+          <p:cNvSpPr>
+            <a:spLocks xmlns:a="http://schemas.openxmlformats.org/drawingml/2006/main" noGrp="1"/>
+          </p:cNvSpPr>
+          <p:nvPr/>
+        </p:nvSpPr>
+        <p:spPr>
+          <a:xfrm xmlns:a="http://schemas.openxmlformats.org/drawingml/2006/main">
+            <a:off x="9315450" y="2476500"/>
+            <a:ext cx="219075" cy="333375"/>
+          </a:xfrm>
+          <a:prstGeom xmlns:a="http://schemas.openxmlformats.org/drawingml/2006/main" prst="rect">
+            <a:avLst/>
+          </a:prstGeom>
+          <a:noFill xmlns:a="http://schemas.openxmlformats.org/drawingml/2006/main"/>
+          <a:ln xmlns:a="http://schemas.openxmlformats.org/drawingml/2006/main" w="0">
+            <a:noFill/>
+          </a:ln>
+        </p:spPr>
+        <p:txBody>
+          <a:bodyPr xmlns:a="http://schemas.openxmlformats.org/drawingml/2006/main" lIns="0" tIns="0" rIns="0" bIns="0" anchor="t">
+            <a:noAutofit/>
+          </a:bodyPr>
+          <a:lstStyle xmlns:a="http://schemas.openxmlformats.org/drawingml/2006/main"/>
+          <a:p xmlns:a="http://schemas.openxmlformats.org/drawingml/2006/main">
+            <a:pPr>
+              <a:defRPr sz="1875" b="0">
+                <a:solidFill>
+                  <a:srgbClr val="111111"/>
+                </a:solidFill>
+                <a:latin typeface="Arial"/>
+                <a:ea typeface="Arial"/>
+                <a:cs typeface="Arial"/>
+              </a:defRPr>
+            </a:pPr>
+            <a:r>
+              <a:rPr sz="1875" b="0">
+                <a:solidFill>
+                  <a:srgbClr val="111111"/>
+                </a:solidFill>
+                <a:latin typeface="Arial"/>
+                <a:ea typeface="Arial"/>
+                <a:cs typeface="Arial"/>
+              </a:rPr>
+              <a:t>→</a:t>
+            </a:r>
+          </a:p>
+        </p:txBody>
+      </p:sp>
+      <p:sp>
+        <p:nvSpPr>
+          <p:cNvPr id="20" name="fragnet-node-4">
+            <a:extLst xmlns:a="http://schemas.openxmlformats.org/drawingml/2006/main">
+              <a:ext uri="{FF2B5EF4-FFF2-40B4-BE49-F238E27FC236}">
+                <a16:creationId xmlns:a16="http://schemas.microsoft.com/office/drawing/2014/main" id="{5068B1D6-5D75-4846-96F5-7E3AAF97A695}"/>
+              </a:ext>
+            </a:extLst>
+          </p:cNvPr>
+          <p:cNvSpPr>
+            <a:spLocks xmlns:a="http://schemas.openxmlformats.org/drawingml/2006/main" noGrp="1"/>
+          </p:cNvSpPr>
+          <p:nvPr/>
+        </p:nvSpPr>
+        <p:spPr>
+          <a:xfrm xmlns:a="http://schemas.openxmlformats.org/drawingml/2006/main">
+            <a:off x="9525000" y="2314575"/>
+            <a:ext cx="2000250" cy="647700"/>
+          </a:xfrm>
+          <a:prstGeom xmlns:a="http://schemas.openxmlformats.org/drawingml/2006/main" prst="rect">
+            <a:avLst/>
+          </a:prstGeom>
+          <a:solidFill xmlns:a="http://schemas.openxmlformats.org/drawingml/2006/main">
+            <a:srgbClr val="FFFFFF"/>
+          </a:solidFill>
+          <a:ln xmlns:a="http://schemas.openxmlformats.org/drawingml/2006/main" w="9525">
+            <a:solidFill>
+              <a:srgbClr val="D8DDE3"/>
+            </a:solidFill>
+          </a:ln>
+        </p:spPr>
+      </p:sp>
+      <p:sp>
+        <p:nvSpPr>
+          <p:cNvPr id="21" name="training-text-30">
+            <a:extLst xmlns:a="http://schemas.openxmlformats.org/drawingml/2006/main">
+              <a:ext uri="{FF2B5EF4-FFF2-40B4-BE49-F238E27FC236}">
+                <a16:creationId xmlns:a16="http://schemas.microsoft.com/office/drawing/2014/main" id="{4765D0AB-3DE6-4710-B0A1-57BD777E17CC}"/>
+              </a:ext>
+            </a:extLst>
+          </p:cNvPr>
+          <p:cNvSpPr>
+            <a:spLocks xmlns:a="http://schemas.openxmlformats.org/drawingml/2006/main" noGrp="1"/>
+          </p:cNvSpPr>
+          <p:nvPr/>
+        </p:nvSpPr>
+        <p:spPr>
+          <a:xfrm xmlns:a="http://schemas.openxmlformats.org/drawingml/2006/main">
+            <a:off x="9639300" y="2400300"/>
+            <a:ext cx="1771650" cy="514350"/>
+          </a:xfrm>
+          <a:prstGeom xmlns:a="http://schemas.openxmlformats.org/drawingml/2006/main" prst="rect">
+            <a:avLst/>
+          </a:prstGeom>
+          <a:noFill xmlns:a="http://schemas.openxmlformats.org/drawingml/2006/main"/>
+          <a:ln xmlns:a="http://schemas.openxmlformats.org/drawingml/2006/main" w="0">
+            <a:noFill/>
+          </a:ln>
+        </p:spPr>
+        <p:txBody>
+          <a:bodyPr xmlns:a="http://schemas.openxmlformats.org/drawingml/2006/main" lIns="0" tIns="0" rIns="0" bIns="0" anchor="t">
+            <a:noAutofit/>
+          </a:bodyPr>
+          <a:lstStyle xmlns:a="http://schemas.openxmlformats.org/drawingml/2006/main"/>
+          <a:p xmlns:a="http://schemas.openxmlformats.org/drawingml/2006/main">
+            <a:pPr>
+              <a:defRPr sz="1575" b="0">
+                <a:solidFill>
+                  <a:srgbClr val="111111"/>
+                </a:solidFill>
+                <a:latin typeface="Arial"/>
+                <a:ea typeface="Arial"/>
+                <a:cs typeface="Arial"/>
+              </a:defRPr>
+            </a:pPr>
+            <a:r>
+              <a:rPr sz="1575" b="0">
+                <a:solidFill>
+                  <a:srgbClr val="111111"/>
+                </a:solidFill>
+                <a:latin typeface="Arial"/>
+                <a:ea typeface="Arial"/>
+                <a:cs typeface="Arial"/>
+              </a:rPr>
+              <a:t>Handover</a:t>
+            </a:r>
+          </a:p>
+          <a:p xmlns:a="http://schemas.openxmlformats.org/drawingml/2006/main">
+            <a:pPr>
+              <a:defRPr sz="1575" b="0">
+                <a:solidFill>
+                  <a:srgbClr val="111111"/>
+                </a:solidFill>
+                <a:latin typeface="Arial"/>
+                <a:ea typeface="Arial"/>
+                <a:cs typeface="Arial"/>
+              </a:defRPr>
+            </a:pPr>
+            <a:r>
+              <a:rPr sz="1575" b="0">
+                <a:solidFill>
+                  <a:srgbClr val="111111"/>
+                </a:solidFill>
+                <a:latin typeface="Arial"/>
+                <a:ea typeface="Arial"/>
+                <a:cs typeface="Arial"/>
+              </a:rPr>
+              <a:t>0d</a:t>
+            </a:r>
+          </a:p>
+        </p:txBody>
+      </p:sp>
+      <p:sp>
+        <p:nvSpPr>
+          <p:cNvPr id="22" name="training-text-31">
+            <a:extLst xmlns:a="http://schemas.openxmlformats.org/drawingml/2006/main">
+              <a:ext uri="{FF2B5EF4-FFF2-40B4-BE49-F238E27FC236}">
+                <a16:creationId xmlns:a16="http://schemas.microsoft.com/office/drawing/2014/main" id="{64544276-0394-4651-8CC5-AE397D2CCD80}"/>
+              </a:ext>
+            </a:extLst>
+          </p:cNvPr>
+          <p:cNvSpPr>
+            <a:spLocks xmlns:a="http://schemas.openxmlformats.org/drawingml/2006/main" noGrp="1"/>
+          </p:cNvSpPr>
+          <p:nvPr/>
+        </p:nvSpPr>
+        <p:spPr>
+          <a:xfrm xmlns:a="http://schemas.openxmlformats.org/drawingml/2006/main">
+            <a:off x="609600" y="3028950"/>
+            <a:ext cx="10972800" cy="285750"/>
+          </a:xfrm>
+          <a:prstGeom xmlns:a="http://schemas.openxmlformats.org/drawingml/2006/main" prst="rect">
+            <a:avLst/>
+          </a:prstGeom>
+          <a:noFill xmlns:a="http://schemas.openxmlformats.org/drawingml/2006/main"/>
+          <a:ln xmlns:a="http://schemas.openxmlformats.org/drawingml/2006/main" w="0">
+            <a:noFill/>
+          </a:ln>
+        </p:spPr>
+        <p:txBody>
+          <a:bodyPr xmlns:a="http://schemas.openxmlformats.org/drawingml/2006/main" lIns="0" tIns="0" rIns="0" bIns="0" anchor="t">
+            <a:noAutofit/>
+          </a:bodyPr>
+          <a:lstStyle xmlns:a="http://schemas.openxmlformats.org/drawingml/2006/main"/>
+          <a:p xmlns:a="http://schemas.openxmlformats.org/drawingml/2006/main">
+            <a:pPr>
+              <a:defRPr sz="1500" b="0">
+                <a:solidFill>
+                  <a:srgbClr val="565E68"/>
+                </a:solidFill>
+                <a:latin typeface="Arial"/>
+                <a:ea typeface="Arial"/>
+                <a:cs typeface="Arial"/>
+              </a:defRPr>
+            </a:pPr>
+            <a:r>
+              <a:rPr sz="1500" b="0">
+                <a:solidFill>
+                  <a:srgbClr val="565E68"/>
+                </a:solidFill>
+                <a:latin typeface="Arial"/>
+                <a:ea typeface="Arial"/>
+                <a:cs typeface="Arial"/>
+              </a:rPr>
+              <a:t>Inserted fragnet: clarification before installation. All links FS, zero lag.</a:t>
+            </a:r>
+          </a:p>
+        </p:txBody>
+      </p:sp>
+      <p:graphicFrame>
+        <p:nvGraphicFramePr>
+          <p:cNvPr id="49" name=""/>
+          <p:cNvGraphicFramePr/>
+          <p:nvPr/>
+        </p:nvGraphicFramePr>
+        <p:xfrm>
+          <a:off xmlns:a="http://schemas.openxmlformats.org/drawingml/2006/main" x="609600" y="3419475"/>
+          <a:ext xmlns:a="http://schemas.openxmlformats.org/drawingml/2006/main" cx="10972800" cy="1666875"/>
+        </p:xfrm>
+        <a:graphic xmlns:a="http://schemas.openxmlformats.org/drawingml/2006/main">
+          <a:graphicData uri="http://schemas.openxmlformats.org/drawingml/2006/table">
+            <a:tbl>
+              <a:tblPr/>
+              <a:tblGrid>
+                <a:gridCol w="4286250"/>
+                <a:gridCol w="3343275"/>
+                <a:gridCol w="3343275"/>
+              </a:tblGrid>
+              <a:tr h="416719">
+                <a:tc>
+                  <a:txBody>
+                    <a:bodyPr lIns="114300" tIns="76200" rIns="95250" bIns="76200"/>
+                    <a:lstStyle/>
+                    <a:p>
+                      <a:r>
+                        <a:rPr sz="1725" b="1">
+                          <a:solidFill>
+                            <a:srgbClr val="FFFFFF"/>
+                          </a:solidFill>
+                          <a:latin typeface="Arial"/>
+                          <a:ea typeface="Arial"/>
+                          <a:cs typeface="Arial"/>
+                        </a:rPr>
+                        <a:t>Remaining work</a:t>
+                      </a:r>
+                    </a:p>
+                  </a:txBody>
+                  <a:tcPr marL="91440" marR="91440" marT="45720" marB="45720" anchor="ctr">
+                    <a:solidFill>
+                      <a:srgbClr val="111111"/>
+                    </a:solidFill>
+                  </a:tcPr>
+                </a:tc>
+                <a:tc>
+                  <a:txBody>
+                    <a:bodyPr lIns="114300" tIns="76200" rIns="95250" bIns="76200"/>
+                    <a:lstStyle/>
+                    <a:p>
+                      <a:r>
+                        <a:rPr sz="1725" b="1">
+                          <a:solidFill>
+                            <a:srgbClr val="FFFFFF"/>
+                          </a:solidFill>
+                          <a:latin typeface="Arial"/>
+                          <a:ea typeface="Arial"/>
+                          <a:cs typeface="Arial"/>
+                        </a:rPr>
+                        <a:t>Before event</a:t>
+                      </a:r>
+                    </a:p>
+                  </a:txBody>
+                  <a:tcPr marL="91440" marR="91440" marT="45720" marB="45720" anchor="ctr">
+                    <a:solidFill>
+                      <a:srgbClr val="111111"/>
+                    </a:solidFill>
+                  </a:tcPr>
+                </a:tc>
+                <a:tc>
+                  <a:txBody>
+                    <a:bodyPr lIns="114300" tIns="76200" rIns="95250" bIns="76200"/>
+                    <a:lstStyle/>
+                    <a:p>
+                      <a:r>
+                        <a:rPr sz="1725" b="1">
+                          <a:solidFill>
+                            <a:srgbClr val="FFFFFF"/>
+                          </a:solidFill>
+                          <a:latin typeface="Arial"/>
+                          <a:ea typeface="Arial"/>
+                          <a:cs typeface="Arial"/>
+                        </a:rPr>
+                        <a:t>After event</a:t>
+                      </a:r>
+                    </a:p>
+                  </a:txBody>
+                  <a:tcPr marL="91440" marR="91440" marT="45720" marB="45720" anchor="ctr">
+                    <a:solidFill>
+                      <a:srgbClr val="111111"/>
+                    </a:solidFill>
+                  </a:tcPr>
+                </a:tc>
+              </a:tr>
+              <a:tr h="416719">
+                <a:tc>
+                  <a:txBody>
+                    <a:bodyPr lIns="114300" tIns="76200" rIns="95250" bIns="76200"/>
+                    <a:lstStyle/>
+                    <a:p>
+                      <a:r>
+                        <a:rPr sz="1725" b="0">
+                          <a:solidFill>
+                            <a:srgbClr val="111111"/>
+                          </a:solidFill>
+                          <a:latin typeface="Arial"/>
+                          <a:ea typeface="Arial"/>
+                          <a:cs typeface="Arial"/>
+                        </a:rPr>
+                        <a:t>Installation, 10 working days</a:t>
+                      </a:r>
+                    </a:p>
+                  </a:txBody>
+                  <a:tcPr marL="91440" marR="91440" marT="45720" marB="45720" anchor="ctr">
+                    <a:solidFill>
+                      <a:srgbClr val="F2F3F5"/>
+                    </a:solidFill>
+                  </a:tcPr>
+                </a:tc>
+                <a:tc>
+                  <a:txBody>
+                    <a:bodyPr lIns="114300" tIns="76200" rIns="95250" bIns="76200"/>
+                    <a:lstStyle/>
+                    <a:p>
+                      <a:r>
+                        <a:rPr sz="1725" b="0">
+                          <a:solidFill>
+                            <a:srgbClr val="111111"/>
+                          </a:solidFill>
+                          <a:latin typeface="Arial"/>
+                          <a:ea typeface="Arial"/>
+                          <a:cs typeface="Arial"/>
+                        </a:rPr>
+                        <a:t>05–16 Apr 2027</a:t>
+                      </a:r>
+                    </a:p>
+                  </a:txBody>
+                  <a:tcPr marL="91440" marR="91440" marT="45720" marB="45720" anchor="ctr">
+                    <a:solidFill>
+                      <a:srgbClr val="F2F3F5"/>
+                    </a:solidFill>
+                  </a:tcPr>
+                </a:tc>
+                <a:tc>
+                  <a:txBody>
+                    <a:bodyPr lIns="114300" tIns="76200" rIns="95250" bIns="76200"/>
+                    <a:lstStyle/>
+                    <a:p>
+                      <a:r>
+                        <a:rPr sz="1725" b="0">
+                          <a:solidFill>
+                            <a:srgbClr val="111111"/>
+                          </a:solidFill>
+                          <a:latin typeface="Arial"/>
+                          <a:ea typeface="Arial"/>
+                          <a:cs typeface="Arial"/>
+                        </a:rPr>
+                        <a:t>09–22 Apr 2027</a:t>
+                      </a:r>
+                    </a:p>
+                  </a:txBody>
+                  <a:tcPr marL="91440" marR="91440" marT="45720" marB="45720" anchor="ctr">
+                    <a:solidFill>
+                      <a:srgbClr val="F2F3F5"/>
+                    </a:solidFill>
+                  </a:tcPr>
+                </a:tc>
+              </a:tr>
+              <a:tr h="416719">
+                <a:tc>
+                  <a:txBody>
+                    <a:bodyPr lIns="114300" tIns="76200" rIns="95250" bIns="76200"/>
+                    <a:lstStyle/>
+                    <a:p>
+                      <a:r>
+                        <a:rPr sz="1725" b="0">
+                          <a:solidFill>
+                            <a:srgbClr val="111111"/>
+                          </a:solidFill>
+                          <a:latin typeface="Arial"/>
+                          <a:ea typeface="Arial"/>
+                          <a:cs typeface="Arial"/>
+                        </a:rPr>
+                        <a:t>Testing, 3 working days</a:t>
+                      </a:r>
+                    </a:p>
+                  </a:txBody>
+                  <a:tcPr marL="91440" marR="91440" marT="45720" marB="45720" anchor="ctr">
+                    <a:solidFill>
+                      <a:srgbClr val="FFFFFF"/>
+                    </a:solidFill>
+                  </a:tcPr>
+                </a:tc>
+                <a:tc>
+                  <a:txBody>
+                    <a:bodyPr lIns="114300" tIns="76200" rIns="95250" bIns="76200"/>
+                    <a:lstStyle/>
+                    <a:p>
+                      <a:r>
+                        <a:rPr sz="1725" b="0">
+                          <a:solidFill>
+                            <a:srgbClr val="111111"/>
+                          </a:solidFill>
+                          <a:latin typeface="Arial"/>
+                          <a:ea typeface="Arial"/>
+                          <a:cs typeface="Arial"/>
+                        </a:rPr>
+                        <a:t>19–21 Apr 2027</a:t>
+                      </a:r>
+                    </a:p>
+                  </a:txBody>
+                  <a:tcPr marL="91440" marR="91440" marT="45720" marB="45720" anchor="ctr">
+                    <a:solidFill>
+                      <a:srgbClr val="FFFFFF"/>
+                    </a:solidFill>
+                  </a:tcPr>
+                </a:tc>
+                <a:tc>
+                  <a:txBody>
+                    <a:bodyPr lIns="114300" tIns="76200" rIns="95250" bIns="76200"/>
+                    <a:lstStyle/>
+                    <a:p>
+                      <a:r>
+                        <a:rPr sz="1725" b="0">
+                          <a:solidFill>
+                            <a:srgbClr val="111111"/>
+                          </a:solidFill>
+                          <a:latin typeface="Arial"/>
+                          <a:ea typeface="Arial"/>
+                          <a:cs typeface="Arial"/>
+                        </a:rPr>
+                        <a:t>23–27 Apr 2027</a:t>
+                      </a:r>
+                    </a:p>
+                  </a:txBody>
+                  <a:tcPr marL="91440" marR="91440" marT="45720" marB="45720" anchor="ctr">
+                    <a:solidFill>
+                      <a:srgbClr val="FFFFFF"/>
+                    </a:solidFill>
+                  </a:tcPr>
+                </a:tc>
+              </a:tr>
+              <a:tr h="416719">
+                <a:tc>
+                  <a:txBody>
+                    <a:bodyPr lIns="114300" tIns="76200" rIns="95250" bIns="76200"/>
+                    <a:lstStyle/>
+                    <a:p>
+                      <a:r>
+                        <a:rPr sz="1725" b="0">
+                          <a:solidFill>
+                            <a:srgbClr val="111111"/>
+                          </a:solidFill>
+                          <a:latin typeface="Arial"/>
+                          <a:ea typeface="Arial"/>
+                          <a:cs typeface="Arial"/>
+                        </a:rPr>
+                        <a:t>Training handover, M-TR01</a:t>
+                      </a:r>
+                    </a:p>
+                  </a:txBody>
+                  <a:tcPr marL="91440" marR="91440" marT="45720" marB="45720" anchor="ctr">
+                    <a:solidFill>
+                      <a:srgbClr val="F2F3F5"/>
+                    </a:solidFill>
+                  </a:tcPr>
+                </a:tc>
+                <a:tc>
+                  <a:txBody>
+                    <a:bodyPr lIns="114300" tIns="76200" rIns="95250" bIns="76200"/>
+                    <a:lstStyle/>
+                    <a:p>
+                      <a:r>
+                        <a:rPr sz="1725" b="0">
+                          <a:solidFill>
+                            <a:srgbClr val="111111"/>
+                          </a:solidFill>
+                          <a:latin typeface="Arial"/>
+                          <a:ea typeface="Arial"/>
+                          <a:cs typeface="Arial"/>
+                        </a:rPr>
+                        <a:t>21 Apr 2027, 17:00</a:t>
+                      </a:r>
+                    </a:p>
+                  </a:txBody>
+                  <a:tcPr marL="91440" marR="91440" marT="45720" marB="45720" anchor="ctr">
+                    <a:solidFill>
+                      <a:srgbClr val="F2F3F5"/>
+                    </a:solidFill>
+                  </a:tcPr>
+                </a:tc>
+                <a:tc>
+                  <a:txBody>
+                    <a:bodyPr lIns="114300" tIns="76200" rIns="95250" bIns="76200"/>
+                    <a:lstStyle/>
+                    <a:p>
+                      <a:r>
+                        <a:rPr sz="1725" b="0">
+                          <a:solidFill>
+                            <a:srgbClr val="111111"/>
+                          </a:solidFill>
+                          <a:latin typeface="Arial"/>
+                          <a:ea typeface="Arial"/>
+                          <a:cs typeface="Arial"/>
+                        </a:rPr>
+                        <a:t>27 Apr 2027, 17:00</a:t>
+                      </a:r>
+                    </a:p>
+                  </a:txBody>
+                  <a:tcPr marL="91440" marR="91440" marT="45720" marB="45720" anchor="ctr">
+                    <a:solidFill>
+                      <a:srgbClr val="F2F3F5"/>
+                    </a:solidFill>
+                  </a:tcPr>
+                </a:tc>
+              </a:tr>
+            </a:tbl>
+          </a:graphicData>
+        </a:graphic>
+      </p:graphicFrame>
+      <p:sp>
+        <p:nvSpPr>
+          <p:cNvPr id="24" name="training-text-32">
+            <a:extLst xmlns:a="http://schemas.openxmlformats.org/drawingml/2006/main">
+              <a:ext uri="{FF2B5EF4-FFF2-40B4-BE49-F238E27FC236}">
+                <a16:creationId xmlns:a16="http://schemas.microsoft.com/office/drawing/2014/main" id="{25677C3D-57A2-49C3-9F9F-DC33485D99DA}"/>
+              </a:ext>
+            </a:extLst>
+          </p:cNvPr>
+          <p:cNvSpPr>
+            <a:spLocks xmlns:a="http://schemas.openxmlformats.org/drawingml/2006/main" noGrp="1"/>
+          </p:cNvSpPr>
+          <p:nvPr/>
+        </p:nvSpPr>
+        <p:spPr>
+          <a:xfrm xmlns:a="http://schemas.openxmlformats.org/drawingml/2006/main">
+            <a:off x="609600" y="5219700"/>
+            <a:ext cx="10972800" cy="381000"/>
+          </a:xfrm>
+          <a:prstGeom xmlns:a="http://schemas.openxmlformats.org/drawingml/2006/main" prst="rect">
+            <a:avLst/>
+          </a:prstGeom>
+          <a:noFill xmlns:a="http://schemas.openxmlformats.org/drawingml/2006/main"/>
+          <a:ln xmlns:a="http://schemas.openxmlformats.org/drawingml/2006/main" w="0">
+            <a:noFill/>
+          </a:ln>
+        </p:spPr>
+        <p:txBody>
+          <a:bodyPr xmlns:a="http://schemas.openxmlformats.org/drawingml/2006/main" lIns="0" tIns="0" rIns="0" bIns="0" anchor="t">
+            <a:noAutofit/>
+          </a:bodyPr>
+          <a:lstStyle xmlns:a="http://schemas.openxmlformats.org/drawingml/2006/main"/>
+          <a:p xmlns:a="http://schemas.openxmlformats.org/drawingml/2006/main">
+            <a:pPr>
+              <a:defRPr sz="2325" b="1">
+                <a:solidFill>
+                  <a:srgbClr val="2563EB"/>
+                </a:solidFill>
+                <a:latin typeface="Arial"/>
+                <a:ea typeface="Arial"/>
+                <a:cs typeface="Arial"/>
+              </a:defRPr>
+            </a:pPr>
+            <a:r>
+              <a:rPr sz="2325" b="1">
+                <a:solidFill>
+                  <a:srgbClr val="2563EB"/>
+                </a:solidFill>
+                <a:latin typeface="Arial"/>
+                <a:ea typeface="Arial"/>
+                <a:cs typeface="Arial"/>
+              </a:rPr>
+              <a:t>Impact: +4 working days / +6 calendar days</a:t>
+            </a:r>
+          </a:p>
+        </p:txBody>
+      </p:sp>
+      <p:sp>
+        <p:nvSpPr>
+          <p:cNvPr id="25" name="training-text-33">
+            <a:extLst xmlns:a="http://schemas.openxmlformats.org/drawingml/2006/main">
+              <a:ext uri="{FF2B5EF4-FFF2-40B4-BE49-F238E27FC236}">
+                <a16:creationId xmlns:a16="http://schemas.microsoft.com/office/drawing/2014/main" id="{E89EA73F-F050-49B3-B32C-05B22320663E}"/>
+              </a:ext>
+            </a:extLst>
+          </p:cNvPr>
+          <p:cNvSpPr>
+            <a:spLocks xmlns:a="http://schemas.openxmlformats.org/drawingml/2006/main" noGrp="1"/>
+          </p:cNvSpPr>
+          <p:nvPr/>
+        </p:nvSpPr>
+        <p:spPr>
+          <a:xfrm xmlns:a="http://schemas.openxmlformats.org/drawingml/2006/main">
+            <a:off x="609600" y="5610225"/>
+            <a:ext cx="10972800" cy="276225"/>
+          </a:xfrm>
+          <a:prstGeom xmlns:a="http://schemas.openxmlformats.org/drawingml/2006/main" prst="rect">
+            <a:avLst/>
+          </a:prstGeom>
+          <a:noFill xmlns:a="http://schemas.openxmlformats.org/drawingml/2006/main"/>
+          <a:ln xmlns:a="http://schemas.openxmlformats.org/drawingml/2006/main" w="0">
+            <a:noFill/>
+          </a:ln>
+        </p:spPr>
+        <p:txBody>
+          <a:bodyPr xmlns:a="http://schemas.openxmlformats.org/drawingml/2006/main" lIns="0" tIns="0" rIns="0" bIns="0" anchor="t">
+            <a:noAutofit/>
+          </a:bodyPr>
+          <a:lstStyle xmlns:a="http://schemas.openxmlformats.org/drawingml/2006/main"/>
+          <a:p xmlns:a="http://schemas.openxmlformats.org/drawingml/2006/main">
+            <a:pPr>
+              <a:defRPr sz="1575" b="0">
+                <a:solidFill>
+                  <a:srgbClr val="565E68"/>
+                </a:solidFill>
+                <a:latin typeface="Arial"/>
+                <a:ea typeface="Arial"/>
+                <a:cs typeface="Arial"/>
+              </a:defRPr>
+            </a:pPr>
+            <a:r>
+              <a:rPr sz="1575" b="0">
+                <a:solidFill>
+                  <a:srgbClr val="565E68"/>
+                </a:solidFill>
+                <a:latin typeface="Arial"/>
+                <a:ea typeface="Arial"/>
+                <a:cs typeface="Arial"/>
+              </a:rPr>
+              <a:t>EOT review also needs the contract, event responsibility and supporting records.</a:t>
+            </a:r>
+          </a:p>
+        </p:txBody>
+      </p:sp>
+      <p:sp>
+        <p:nvSpPr>
+          <p:cNvPr id="26" name="training-text-34">
+            <a:extLst xmlns:a="http://schemas.openxmlformats.org/drawingml/2006/main">
+              <a:ext uri="{FF2B5EF4-FFF2-40B4-BE49-F238E27FC236}">
+                <a16:creationId xmlns:a16="http://schemas.microsoft.com/office/drawing/2014/main" id="{23E6D8B5-A60E-4B06-BDF5-1D7E78142498}"/>
+              </a:ext>
+            </a:extLst>
+          </p:cNvPr>
+          <p:cNvSpPr>
+            <a:spLocks xmlns:a="http://schemas.openxmlformats.org/drawingml/2006/main" noGrp="1"/>
+          </p:cNvSpPr>
+          <p:nvPr/>
+        </p:nvSpPr>
+        <p:spPr>
+          <a:xfrm xmlns:a="http://schemas.openxmlformats.org/drawingml/2006/main">
+            <a:off x="609600" y="5895975"/>
+            <a:ext cx="10972800" cy="238125"/>
+          </a:xfrm>
+          <a:prstGeom xmlns:a="http://schemas.openxmlformats.org/drawingml/2006/main" prst="rect">
+            <a:avLst/>
+          </a:prstGeom>
+          <a:noFill xmlns:a="http://schemas.openxmlformats.org/drawingml/2006/main"/>
+          <a:ln xmlns:a="http://schemas.openxmlformats.org/drawingml/2006/main" w="0">
+            <a:noFill/>
+          </a:ln>
+        </p:spPr>
+        <p:txBody>
+          <a:bodyPr xmlns:a="http://schemas.openxmlformats.org/drawingml/2006/main" lIns="0" tIns="0" rIns="0" bIns="0" anchor="t">
+            <a:noAutofit/>
+          </a:bodyPr>
+          <a:lstStyle xmlns:a="http://schemas.openxmlformats.org/drawingml/2006/main"/>
+          <a:p xmlns:a="http://schemas.openxmlformats.org/drawingml/2006/main">
+            <a:pPr>
+              <a:defRPr sz="1350" b="0">
+                <a:solidFill>
+                  <a:srgbClr val="565E68"/>
+                </a:solidFill>
+                <a:latin typeface="Arial"/>
+                <a:ea typeface="Arial"/>
+                <a:cs typeface="Arial"/>
+              </a:defRPr>
+            </a:pPr>
+            <a:r>
+              <a:rPr sz="1350" b="0">
+                <a:solidFill>
+                  <a:srgbClr val="565E68"/>
+                </a:solidFill>
+                <a:latin typeface="Arial"/>
+                <a:ea typeface="Arial"/>
+                <a:cs typeface="Arial"/>
+              </a:rPr>
+              <a:t>FIDIC procedure learning: confirm form, edition and Particular Conditions.</a:t>
+            </a:r>
+          </a:p>
+        </p:txBody>
+      </p:sp>
+    </p:spTree>
+    <p:extLst>
+      <p:ext uri="{BB962C8B-B14F-4D97-AF65-F5344CB8AC3E}">
+        <p14:creationId xmlns:p14="http://schemas.microsoft.com/office/powerpoint/2010/main" val="1167915339"/>
       </p:ext>
     </p:extLst>
   </p:cSld>
@@ -9011,6 +13196,7 @@
           <a:lstStyle xmlns:a="http://schemas.openxmlformats.org/drawingml/2006/main"/>
           <a:p xmlns:a="http://schemas.openxmlformats.org/drawingml/2006/main">
             <a:pPr algn="l">
+              <a:buNone/>
               <a:defRPr sz="1275" b="1">
                 <a:solidFill>
                   <a:srgbClr val="2563EB"/>
@@ -9068,6 +13254,7 @@
           <a:lstStyle xmlns:a="http://schemas.openxmlformats.org/drawingml/2006/main"/>
           <a:p xmlns:a="http://schemas.openxmlformats.org/drawingml/2006/main">
             <a:pPr algn="l">
+              <a:buNone/>
               <a:defRPr sz="3600" b="1">
                 <a:solidFill>
                   <a:srgbClr val="111111"/>
@@ -9156,6 +13343,7 @@
           <a:lstStyle xmlns:a="http://schemas.openxmlformats.org/drawingml/2006/main"/>
           <a:p xmlns:a="http://schemas.openxmlformats.org/drawingml/2006/main">
             <a:pPr algn="l">
+              <a:buNone/>
               <a:defRPr sz="975" b="0">
                 <a:solidFill>
                   <a:srgbClr val="565E68"/>
@@ -9213,6 +13401,7 @@
           <a:lstStyle xmlns:a="http://schemas.openxmlformats.org/drawingml/2006/main"/>
           <a:p xmlns:a="http://schemas.openxmlformats.org/drawingml/2006/main">
             <a:pPr algn="r">
+              <a:buNone/>
               <a:defRPr sz="975" b="0">
                 <a:solidFill>
                   <a:srgbClr val="565E68"/>
@@ -9270,6 +13459,7 @@
           <a:lstStyle xmlns:a="http://schemas.openxmlformats.org/drawingml/2006/main"/>
           <a:p xmlns:a="http://schemas.openxmlformats.org/drawingml/2006/main">
             <a:pPr algn="r">
+              <a:buNone/>
               <a:defRPr sz="1350" b="0">
                 <a:solidFill>
                   <a:srgbClr val="111111"/>
@@ -9327,6 +13517,7 @@
           <a:lstStyle xmlns:a="http://schemas.openxmlformats.org/drawingml/2006/main"/>
           <a:p xmlns:a="http://schemas.openxmlformats.org/drawingml/2006/main">
             <a:pPr algn="l">
+              <a:buNone/>
               <a:defRPr sz="10800" b="1">
                 <a:solidFill>
                   <a:srgbClr val="111111"/>
@@ -9384,6 +13575,7 @@
           <a:lstStyle xmlns:a="http://schemas.openxmlformats.org/drawingml/2006/main"/>
           <a:p xmlns:a="http://schemas.openxmlformats.org/drawingml/2006/main">
             <a:pPr algn="l">
+              <a:buNone/>
               <a:defRPr sz="1650" b="0">
                 <a:solidFill>
                   <a:srgbClr val="565E68"/>
@@ -9441,6 +13633,7 @@
           <a:lstStyle xmlns:a="http://schemas.openxmlformats.org/drawingml/2006/main"/>
           <a:p xmlns:a="http://schemas.openxmlformats.org/drawingml/2006/main">
             <a:pPr algn="l">
+              <a:buNone/>
               <a:defRPr sz="2400" b="0">
                 <a:solidFill>
                   <a:srgbClr val="565E68"/>
@@ -9464,6 +13657,7 @@
           </a:p>
           <a:p xmlns:a="http://schemas.openxmlformats.org/drawingml/2006/main">
             <a:pPr algn="l">
+              <a:buNone/>
               <a:defRPr sz="2400" b="0">
                 <a:solidFill>
                   <a:srgbClr val="565E68"/>
@@ -9521,6 +13715,7 @@
           <a:lstStyle xmlns:a="http://schemas.openxmlformats.org/drawingml/2006/main"/>
           <a:p xmlns:a="http://schemas.openxmlformats.org/drawingml/2006/main">
             <a:pPr algn="l">
+              <a:buNone/>
               <a:defRPr sz="4575" b="1">
                 <a:solidFill>
                   <a:srgbClr val="111111"/>
@@ -9578,6 +13773,7 @@
           <a:lstStyle xmlns:a="http://schemas.openxmlformats.org/drawingml/2006/main"/>
           <a:p xmlns:a="http://schemas.openxmlformats.org/drawingml/2006/main">
             <a:pPr algn="l">
+              <a:buNone/>
               <a:defRPr sz="1650" b="0">
                 <a:solidFill>
                   <a:srgbClr val="565E68"/>
@@ -9666,6 +13862,7 @@
           <a:lstStyle xmlns:a="http://schemas.openxmlformats.org/drawingml/2006/main"/>
           <a:p xmlns:a="http://schemas.openxmlformats.org/drawingml/2006/main">
             <a:pPr algn="l">
+              <a:buNone/>
               <a:defRPr sz="4575" b="1">
                 <a:solidFill>
                   <a:srgbClr val="111111"/>
@@ -9723,6 +13920,7 @@
           <a:lstStyle xmlns:a="http://schemas.openxmlformats.org/drawingml/2006/main"/>
           <a:p xmlns:a="http://schemas.openxmlformats.org/drawingml/2006/main">
             <a:pPr algn="l">
+              <a:buNone/>
               <a:defRPr sz="1650" b="0">
                 <a:solidFill>
                   <a:srgbClr val="565E68"/>
@@ -9811,6 +14009,7 @@
           <a:lstStyle xmlns:a="http://schemas.openxmlformats.org/drawingml/2006/main"/>
           <a:p xmlns:a="http://schemas.openxmlformats.org/drawingml/2006/main">
             <a:pPr algn="l">
+              <a:buNone/>
               <a:defRPr sz="4575" b="1">
                 <a:solidFill>
                   <a:srgbClr val="111111"/>
@@ -9868,6 +14067,7 @@
           <a:lstStyle xmlns:a="http://schemas.openxmlformats.org/drawingml/2006/main"/>
           <a:p xmlns:a="http://schemas.openxmlformats.org/drawingml/2006/main">
             <a:pPr algn="l">
+              <a:buNone/>
               <a:defRPr sz="1650" b="0">
                 <a:solidFill>
                   <a:srgbClr val="565E68"/>
@@ -9925,6 +14125,7 @@
           <a:lstStyle xmlns:a="http://schemas.openxmlformats.org/drawingml/2006/main"/>
           <a:p xmlns:a="http://schemas.openxmlformats.org/drawingml/2006/main">
             <a:pPr algn="l">
+              <a:buNone/>
               <a:defRPr sz="1650" b="0">
                 <a:solidFill>
                   <a:srgbClr val="565E68"/>
@@ -10011,6 +14212,7 @@
           <a:lstStyle xmlns:a="http://schemas.openxmlformats.org/drawingml/2006/main"/>
           <a:p xmlns:a="http://schemas.openxmlformats.org/drawingml/2006/main">
             <a:pPr algn="l">
+              <a:buNone/>
               <a:defRPr sz="1275" b="1">
                 <a:solidFill>
                   <a:srgbClr val="2563EB"/>
@@ -10068,6 +14270,7 @@
           <a:lstStyle xmlns:a="http://schemas.openxmlformats.org/drawingml/2006/main"/>
           <a:p xmlns:a="http://schemas.openxmlformats.org/drawingml/2006/main">
             <a:pPr algn="l">
+              <a:buNone/>
               <a:defRPr sz="3600" b="1">
                 <a:solidFill>
                   <a:srgbClr val="111111"/>
@@ -10156,6 +14359,7 @@
           <a:lstStyle xmlns:a="http://schemas.openxmlformats.org/drawingml/2006/main"/>
           <a:p xmlns:a="http://schemas.openxmlformats.org/drawingml/2006/main">
             <a:pPr algn="l">
+              <a:buNone/>
               <a:defRPr sz="975" b="0">
                 <a:solidFill>
                   <a:srgbClr val="565E68"/>
@@ -10213,6 +14417,7 @@
           <a:lstStyle xmlns:a="http://schemas.openxmlformats.org/drawingml/2006/main"/>
           <a:p xmlns:a="http://schemas.openxmlformats.org/drawingml/2006/main">
             <a:pPr algn="r">
+              <a:buNone/>
               <a:defRPr sz="975" b="0">
                 <a:solidFill>
                   <a:srgbClr val="565E68"/>
@@ -10270,6 +14475,7 @@
           <a:lstStyle xmlns:a="http://schemas.openxmlformats.org/drawingml/2006/main"/>
           <a:p xmlns:a="http://schemas.openxmlformats.org/drawingml/2006/main">
             <a:pPr algn="r">
+              <a:buNone/>
               <a:defRPr sz="1350" b="0">
                 <a:solidFill>
                   <a:srgbClr val="111111"/>
@@ -10327,6 +14533,7 @@
           <a:lstStyle xmlns:a="http://schemas.openxmlformats.org/drawingml/2006/main"/>
           <a:p xmlns:a="http://schemas.openxmlformats.org/drawingml/2006/main">
             <a:pPr algn="l">
+              <a:buNone/>
               <a:defRPr sz="1950" b="0">
                 <a:solidFill>
                   <a:srgbClr val="565E68"/>
@@ -10445,6 +14652,7 @@
           <a:lstStyle xmlns:a="http://schemas.openxmlformats.org/drawingml/2006/main"/>
           <a:p xmlns:a="http://schemas.openxmlformats.org/drawingml/2006/main">
             <a:pPr algn="l">
+              <a:buNone/>
               <a:defRPr sz="3000" b="1">
                 <a:solidFill>
                   <a:srgbClr val="111111"/>
@@ -10502,6 +14710,7 @@
           <a:lstStyle xmlns:a="http://schemas.openxmlformats.org/drawingml/2006/main"/>
           <a:p xmlns:a="http://schemas.openxmlformats.org/drawingml/2006/main">
             <a:pPr algn="l">
+              <a:buNone/>
               <a:defRPr sz="2400" b="1">
                 <a:solidFill>
                   <a:srgbClr val="111111"/>
@@ -10559,6 +14768,7 @@
           <a:lstStyle xmlns:a="http://schemas.openxmlformats.org/drawingml/2006/main"/>
           <a:p xmlns:a="http://schemas.openxmlformats.org/drawingml/2006/main">
             <a:pPr algn="l">
+              <a:buNone/>
               <a:defRPr sz="1800" b="0">
                 <a:solidFill>
                   <a:srgbClr val="565E68"/>
@@ -10582,6 +14792,7 @@
           </a:p>
           <a:p xmlns:a="http://schemas.openxmlformats.org/drawingml/2006/main">
             <a:pPr algn="l">
+              <a:buNone/>
               <a:defRPr sz="1800" b="0">
                 <a:solidFill>
                   <a:srgbClr val="565E68"/>
@@ -10669,6 +14880,7 @@
           <a:lstStyle xmlns:a="http://schemas.openxmlformats.org/drawingml/2006/main"/>
           <a:p xmlns:a="http://schemas.openxmlformats.org/drawingml/2006/main">
             <a:pPr algn="l">
+              <a:buNone/>
               <a:defRPr sz="3000" b="1">
                 <a:solidFill>
                   <a:srgbClr val="111111"/>
@@ -10726,6 +14938,7 @@
           <a:lstStyle xmlns:a="http://schemas.openxmlformats.org/drawingml/2006/main"/>
           <a:p xmlns:a="http://schemas.openxmlformats.org/drawingml/2006/main">
             <a:pPr algn="l">
+              <a:buNone/>
               <a:defRPr sz="2400" b="1">
                 <a:solidFill>
                   <a:srgbClr val="111111"/>
@@ -10783,6 +14996,7 @@
           <a:lstStyle xmlns:a="http://schemas.openxmlformats.org/drawingml/2006/main"/>
           <a:p xmlns:a="http://schemas.openxmlformats.org/drawingml/2006/main">
             <a:pPr algn="l">
+              <a:buNone/>
               <a:defRPr sz="1800" b="0">
                 <a:solidFill>
                   <a:srgbClr val="565E68"/>
@@ -10806,6 +15020,7 @@
           </a:p>
           <a:p xmlns:a="http://schemas.openxmlformats.org/drawingml/2006/main">
             <a:pPr algn="l">
+              <a:buNone/>
               <a:defRPr sz="1800" b="0">
                 <a:solidFill>
                   <a:srgbClr val="565E68"/>
@@ -10893,6 +15108,7 @@
           <a:lstStyle xmlns:a="http://schemas.openxmlformats.org/drawingml/2006/main"/>
           <a:p xmlns:a="http://schemas.openxmlformats.org/drawingml/2006/main">
             <a:pPr algn="l">
+              <a:buNone/>
               <a:defRPr sz="3000" b="1">
                 <a:solidFill>
                   <a:srgbClr val="111111"/>
@@ -10950,6 +15166,7 @@
           <a:lstStyle xmlns:a="http://schemas.openxmlformats.org/drawingml/2006/main"/>
           <a:p xmlns:a="http://schemas.openxmlformats.org/drawingml/2006/main">
             <a:pPr algn="l">
+              <a:buNone/>
               <a:defRPr sz="2400" b="1">
                 <a:solidFill>
                   <a:srgbClr val="111111"/>
@@ -11007,6 +15224,7 @@
           <a:lstStyle xmlns:a="http://schemas.openxmlformats.org/drawingml/2006/main"/>
           <a:p xmlns:a="http://schemas.openxmlformats.org/drawingml/2006/main">
             <a:pPr algn="l">
+              <a:buNone/>
               <a:defRPr sz="1800" b="0">
                 <a:solidFill>
                   <a:srgbClr val="565E68"/>
@@ -11030,6 +15248,7 @@
           </a:p>
           <a:p xmlns:a="http://schemas.openxmlformats.org/drawingml/2006/main">
             <a:pPr algn="l">
+              <a:buNone/>
               <a:defRPr sz="1800" b="0">
                 <a:solidFill>
                   <a:srgbClr val="565E68"/>
@@ -11116,6 +15335,7 @@
           <a:lstStyle xmlns:a="http://schemas.openxmlformats.org/drawingml/2006/main"/>
           <a:p xmlns:a="http://schemas.openxmlformats.org/drawingml/2006/main">
             <a:pPr algn="l">
+              <a:buNone/>
               <a:defRPr sz="1275" b="1">
                 <a:solidFill>
                   <a:srgbClr val="2563EB"/>
@@ -11173,6 +15393,7 @@
           <a:lstStyle xmlns:a="http://schemas.openxmlformats.org/drawingml/2006/main"/>
           <a:p xmlns:a="http://schemas.openxmlformats.org/drawingml/2006/main">
             <a:pPr algn="l">
+              <a:buNone/>
               <a:defRPr sz="3600" b="1">
                 <a:solidFill>
                   <a:srgbClr val="111111"/>
@@ -11261,6 +15482,7 @@
           <a:lstStyle xmlns:a="http://schemas.openxmlformats.org/drawingml/2006/main"/>
           <a:p xmlns:a="http://schemas.openxmlformats.org/drawingml/2006/main">
             <a:pPr algn="l">
+              <a:buNone/>
               <a:defRPr sz="975" b="0">
                 <a:solidFill>
                   <a:srgbClr val="565E68"/>
@@ -11318,6 +15540,7 @@
           <a:lstStyle xmlns:a="http://schemas.openxmlformats.org/drawingml/2006/main"/>
           <a:p xmlns:a="http://schemas.openxmlformats.org/drawingml/2006/main">
             <a:pPr algn="r">
+              <a:buNone/>
               <a:defRPr sz="975" b="0">
                 <a:solidFill>
                   <a:srgbClr val="565E68"/>
@@ -11375,6 +15598,7 @@
           <a:lstStyle xmlns:a="http://schemas.openxmlformats.org/drawingml/2006/main"/>
           <a:p xmlns:a="http://schemas.openxmlformats.org/drawingml/2006/main">
             <a:pPr algn="r">
+              <a:buNone/>
               <a:defRPr sz="1350" b="0">
                 <a:solidFill>
                   <a:srgbClr val="111111"/>
@@ -11400,7 +15624,7 @@
       </p:sp>
       <p:graphicFrame>
         <p:nvGraphicFramePr>
-          <p:cNvPr id="19" name="Chart"/>
+          <p:cNvPr id="21" name="Chart"/>
           <p:cNvGraphicFramePr/>
           <p:nvPr/>
         </p:nvGraphicFramePr>
@@ -11410,7 +15634,7 @@
         </p:xfrm>
         <a:graphic xmlns:a="http://schemas.openxmlformats.org/drawingml/2006/main">
           <a:graphicData uri="http://schemas.openxmlformats.org/drawingml/2006/chart">
-            <c:chart xmlns:r="http://schemas.openxmlformats.org/officeDocument/2006/relationships" xmlns:c="http://schemas.openxmlformats.org/drawingml/2006/chart" r:id="R0837e8eee213439a"/>
+            <c:chart xmlns:r="http://schemas.openxmlformats.org/officeDocument/2006/relationships" xmlns:c="http://schemas.openxmlformats.org/drawingml/2006/chart" r:id="R2769987aedfc4d32"/>
           </a:graphicData>
         </a:graphic>
       </p:graphicFrame>
@@ -11448,6 +15672,7 @@
           <a:lstStyle xmlns:a="http://schemas.openxmlformats.org/drawingml/2006/main"/>
           <a:p xmlns:a="http://schemas.openxmlformats.org/drawingml/2006/main">
             <a:pPr algn="l">
+              <a:buNone/>
               <a:defRPr sz="2700" b="1">
                 <a:solidFill>
                   <a:srgbClr val="111111"/>
@@ -11505,6 +15730,7 @@
           <a:lstStyle xmlns:a="http://schemas.openxmlformats.org/drawingml/2006/main"/>
           <a:p xmlns:a="http://schemas.openxmlformats.org/drawingml/2006/main">
             <a:pPr algn="l">
+              <a:buNone/>
               <a:defRPr sz="1950" b="0">
                 <a:solidFill>
                   <a:srgbClr val="565E68"/>
@@ -11528,6 +15754,7 @@
           </a:p>
           <a:p xmlns:a="http://schemas.openxmlformats.org/drawingml/2006/main">
             <a:pPr algn="l">
+              <a:buNone/>
               <a:defRPr sz="1950" b="0">
                 <a:solidFill>
                   <a:srgbClr val="565E68"/>
@@ -11585,6 +15812,7 @@
           <a:lstStyle xmlns:a="http://schemas.openxmlformats.org/drawingml/2006/main"/>
           <a:p xmlns:a="http://schemas.openxmlformats.org/drawingml/2006/main">
             <a:pPr algn="l">
+              <a:buNone/>
               <a:defRPr sz="6450" b="1">
                 <a:solidFill>
                   <a:srgbClr val="111111"/>
@@ -11642,6 +15870,7 @@
           <a:lstStyle xmlns:a="http://schemas.openxmlformats.org/drawingml/2006/main"/>
           <a:p xmlns:a="http://schemas.openxmlformats.org/drawingml/2006/main">
             <a:pPr algn="l">
+              <a:buNone/>
               <a:defRPr sz="1650" b="0">
                 <a:solidFill>
                   <a:srgbClr val="565E68"/>
@@ -11699,6 +15928,7 @@
           <a:lstStyle xmlns:a="http://schemas.openxmlformats.org/drawingml/2006/main"/>
           <a:p xmlns:a="http://schemas.openxmlformats.org/drawingml/2006/main">
             <a:pPr algn="l">
+              <a:buNone/>
               <a:defRPr sz="1650" b="0">
                 <a:solidFill>
                   <a:srgbClr val="565E68"/>
@@ -11785,6 +16015,7 @@
           <a:lstStyle xmlns:a="http://schemas.openxmlformats.org/drawingml/2006/main"/>
           <a:p xmlns:a="http://schemas.openxmlformats.org/drawingml/2006/main">
             <a:pPr algn="l">
+              <a:buNone/>
               <a:defRPr sz="1275" b="1">
                 <a:solidFill>
                   <a:srgbClr val="2563EB"/>
@@ -11842,6 +16073,7 @@
           <a:lstStyle xmlns:a="http://schemas.openxmlformats.org/drawingml/2006/main"/>
           <a:p xmlns:a="http://schemas.openxmlformats.org/drawingml/2006/main">
             <a:pPr algn="l">
+              <a:buNone/>
               <a:defRPr sz="3600" b="1">
                 <a:solidFill>
                   <a:srgbClr val="111111"/>
@@ -11930,6 +16162,7 @@
           <a:lstStyle xmlns:a="http://schemas.openxmlformats.org/drawingml/2006/main"/>
           <a:p xmlns:a="http://schemas.openxmlformats.org/drawingml/2006/main">
             <a:pPr algn="l">
+              <a:buNone/>
               <a:defRPr sz="975" b="0">
                 <a:solidFill>
                   <a:srgbClr val="565E68"/>
@@ -11987,6 +16220,7 @@
           <a:lstStyle xmlns:a="http://schemas.openxmlformats.org/drawingml/2006/main"/>
           <a:p xmlns:a="http://schemas.openxmlformats.org/drawingml/2006/main">
             <a:pPr algn="r">
+              <a:buNone/>
               <a:defRPr sz="975" b="0">
                 <a:solidFill>
                   <a:srgbClr val="565E68"/>
@@ -12044,6 +16278,7 @@
           <a:lstStyle xmlns:a="http://schemas.openxmlformats.org/drawingml/2006/main"/>
           <a:p xmlns:a="http://schemas.openxmlformats.org/drawingml/2006/main">
             <a:pPr algn="r">
+              <a:buNone/>
               <a:defRPr sz="1350" b="0">
                 <a:solidFill>
                   <a:srgbClr val="111111"/>
@@ -12101,6 +16336,7 @@
           <a:lstStyle xmlns:a="http://schemas.openxmlformats.org/drawingml/2006/main"/>
           <a:p xmlns:a="http://schemas.openxmlformats.org/drawingml/2006/main">
             <a:pPr algn="l">
+              <a:buNone/>
               <a:defRPr sz="1950" b="0">
                 <a:solidFill>
                   <a:srgbClr val="565E68"/>
@@ -12219,6 +16455,7 @@
           <a:lstStyle xmlns:a="http://schemas.openxmlformats.org/drawingml/2006/main"/>
           <a:p xmlns:a="http://schemas.openxmlformats.org/drawingml/2006/main">
             <a:pPr algn="l">
+              <a:buNone/>
               <a:defRPr sz="3000" b="1">
                 <a:solidFill>
                   <a:srgbClr val="111111"/>
@@ -12276,6 +16513,7 @@
           <a:lstStyle xmlns:a="http://schemas.openxmlformats.org/drawingml/2006/main"/>
           <a:p xmlns:a="http://schemas.openxmlformats.org/drawingml/2006/main">
             <a:pPr algn="l">
+              <a:buNone/>
               <a:defRPr sz="2400" b="1">
                 <a:solidFill>
                   <a:srgbClr val="111111"/>
@@ -12333,6 +16571,7 @@
           <a:lstStyle xmlns:a="http://schemas.openxmlformats.org/drawingml/2006/main"/>
           <a:p xmlns:a="http://schemas.openxmlformats.org/drawingml/2006/main">
             <a:pPr algn="l">
+              <a:buNone/>
               <a:defRPr sz="1800" b="0">
                 <a:solidFill>
                   <a:srgbClr val="565E68"/>
@@ -12420,6 +16659,7 @@
           <a:lstStyle xmlns:a="http://schemas.openxmlformats.org/drawingml/2006/main"/>
           <a:p xmlns:a="http://schemas.openxmlformats.org/drawingml/2006/main">
             <a:pPr algn="l">
+              <a:buNone/>
               <a:defRPr sz="3000" b="1">
                 <a:solidFill>
                   <a:srgbClr val="111111"/>
@@ -12477,6 +16717,7 @@
           <a:lstStyle xmlns:a="http://schemas.openxmlformats.org/drawingml/2006/main"/>
           <a:p xmlns:a="http://schemas.openxmlformats.org/drawingml/2006/main">
             <a:pPr algn="l">
+              <a:buNone/>
               <a:defRPr sz="2400" b="1">
                 <a:solidFill>
                   <a:srgbClr val="111111"/>
@@ -12534,6 +16775,7 @@
           <a:lstStyle xmlns:a="http://schemas.openxmlformats.org/drawingml/2006/main"/>
           <a:p xmlns:a="http://schemas.openxmlformats.org/drawingml/2006/main">
             <a:pPr algn="l">
+              <a:buNone/>
               <a:defRPr sz="1800" b="0">
                 <a:solidFill>
                   <a:srgbClr val="565E68"/>
@@ -12621,6 +16863,7 @@
           <a:lstStyle xmlns:a="http://schemas.openxmlformats.org/drawingml/2006/main"/>
           <a:p xmlns:a="http://schemas.openxmlformats.org/drawingml/2006/main">
             <a:pPr algn="l">
+              <a:buNone/>
               <a:defRPr sz="3000" b="1">
                 <a:solidFill>
                   <a:srgbClr val="111111"/>
@@ -12678,6 +16921,7 @@
           <a:lstStyle xmlns:a="http://schemas.openxmlformats.org/drawingml/2006/main"/>
           <a:p xmlns:a="http://schemas.openxmlformats.org/drawingml/2006/main">
             <a:pPr algn="l">
+              <a:buNone/>
               <a:defRPr sz="2400" b="1">
                 <a:solidFill>
                   <a:srgbClr val="111111"/>
@@ -12735,6 +16979,7 @@
           <a:lstStyle xmlns:a="http://schemas.openxmlformats.org/drawingml/2006/main"/>
           <a:p xmlns:a="http://schemas.openxmlformats.org/drawingml/2006/main">
             <a:pPr algn="l">
+              <a:buNone/>
               <a:defRPr sz="1800" b="0">
                 <a:solidFill>
                   <a:srgbClr val="565E68"/>
@@ -12792,6 +17037,7 @@
           <a:lstStyle xmlns:a="http://schemas.openxmlformats.org/drawingml/2006/main"/>
           <a:p xmlns:a="http://schemas.openxmlformats.org/drawingml/2006/main">
             <a:pPr algn="l">
+              <a:buNone/>
               <a:defRPr sz="1650" b="0">
                 <a:solidFill>
                   <a:srgbClr val="565E68"/>
@@ -12878,6 +17124,7 @@
           <a:lstStyle xmlns:a="http://schemas.openxmlformats.org/drawingml/2006/main"/>
           <a:p xmlns:a="http://schemas.openxmlformats.org/drawingml/2006/main">
             <a:pPr algn="l">
+              <a:buNone/>
               <a:defRPr sz="1275" b="1">
                 <a:solidFill>
                   <a:srgbClr val="2563EB"/>
@@ -12935,6 +17182,7 @@
           <a:lstStyle xmlns:a="http://schemas.openxmlformats.org/drawingml/2006/main"/>
           <a:p xmlns:a="http://schemas.openxmlformats.org/drawingml/2006/main">
             <a:pPr algn="l">
+              <a:buNone/>
               <a:defRPr sz="3600" b="1">
                 <a:solidFill>
                   <a:srgbClr val="111111"/>
@@ -13023,6 +17271,7 @@
           <a:lstStyle xmlns:a="http://schemas.openxmlformats.org/drawingml/2006/main"/>
           <a:p xmlns:a="http://schemas.openxmlformats.org/drawingml/2006/main">
             <a:pPr algn="l">
+              <a:buNone/>
               <a:defRPr sz="975" b="0">
                 <a:solidFill>
                   <a:srgbClr val="565E68"/>
@@ -13080,6 +17329,7 @@
           <a:lstStyle xmlns:a="http://schemas.openxmlformats.org/drawingml/2006/main"/>
           <a:p xmlns:a="http://schemas.openxmlformats.org/drawingml/2006/main">
             <a:pPr algn="r">
+              <a:buNone/>
               <a:defRPr sz="975" b="0">
                 <a:solidFill>
                   <a:srgbClr val="565E68"/>
@@ -13137,6 +17387,7 @@
           <a:lstStyle xmlns:a="http://schemas.openxmlformats.org/drawingml/2006/main"/>
           <a:p xmlns:a="http://schemas.openxmlformats.org/drawingml/2006/main">
             <a:pPr algn="r">
+              <a:buNone/>
               <a:defRPr sz="1350" b="0">
                 <a:solidFill>
                   <a:srgbClr val="111111"/>
@@ -13194,6 +17445,7 @@
           <a:lstStyle xmlns:a="http://schemas.openxmlformats.org/drawingml/2006/main"/>
           <a:p xmlns:a="http://schemas.openxmlformats.org/drawingml/2006/main">
             <a:pPr algn="l">
+              <a:buNone/>
               <a:defRPr sz="1650" b="0">
                 <a:solidFill>
                   <a:srgbClr val="565E68"/>
@@ -13219,7 +17471,7 @@
       </p:sp>
       <p:graphicFrame>
         <p:nvGraphicFramePr>
-          <p:cNvPr id="21" name="Chart"/>
+          <p:cNvPr id="23" name="Chart"/>
           <p:cNvGraphicFramePr/>
           <p:nvPr/>
         </p:nvGraphicFramePr>
@@ -13229,7 +17481,7 @@
         </p:xfrm>
         <a:graphic xmlns:a="http://schemas.openxmlformats.org/drawingml/2006/main">
           <a:graphicData uri="http://schemas.openxmlformats.org/drawingml/2006/chart">
-            <c:chart xmlns:r="http://schemas.openxmlformats.org/officeDocument/2006/relationships" xmlns:c="http://schemas.openxmlformats.org/drawingml/2006/chart" r:id="R9514d2c58f6645e8"/>
+            <c:chart xmlns:r="http://schemas.openxmlformats.org/officeDocument/2006/relationships" xmlns:c="http://schemas.openxmlformats.org/drawingml/2006/chart" r:id="R1d95660345184fe5"/>
           </a:graphicData>
         </a:graphic>
       </p:graphicFrame>
@@ -13267,6 +17519,7 @@
           <a:lstStyle xmlns:a="http://schemas.openxmlformats.org/drawingml/2006/main"/>
           <a:p xmlns:a="http://schemas.openxmlformats.org/drawingml/2006/main">
             <a:pPr algn="l">
+              <a:buNone/>
               <a:defRPr sz="5700" b="1">
                 <a:solidFill>
                   <a:srgbClr val="111111"/>
@@ -13324,6 +17577,7 @@
           <a:lstStyle xmlns:a="http://schemas.openxmlformats.org/drawingml/2006/main"/>
           <a:p xmlns:a="http://schemas.openxmlformats.org/drawingml/2006/main">
             <a:pPr algn="l">
+              <a:buNone/>
               <a:defRPr sz="1650" b="0">
                 <a:solidFill>
                   <a:srgbClr val="565E68"/>
@@ -13381,6 +17635,7 @@
           <a:lstStyle xmlns:a="http://schemas.openxmlformats.org/drawingml/2006/main"/>
           <a:p xmlns:a="http://schemas.openxmlformats.org/drawingml/2006/main">
             <a:pPr algn="l">
+              <a:buNone/>
               <a:defRPr sz="5700" b="1">
                 <a:solidFill>
                   <a:srgbClr val="111111"/>
@@ -13438,6 +17693,7 @@
           <a:lstStyle xmlns:a="http://schemas.openxmlformats.org/drawingml/2006/main"/>
           <a:p xmlns:a="http://schemas.openxmlformats.org/drawingml/2006/main">
             <a:pPr algn="l">
+              <a:buNone/>
               <a:defRPr sz="1650" b="0">
                 <a:solidFill>
                   <a:srgbClr val="565E68"/>
@@ -13495,6 +17751,7 @@
           <a:lstStyle xmlns:a="http://schemas.openxmlformats.org/drawingml/2006/main"/>
           <a:p xmlns:a="http://schemas.openxmlformats.org/drawingml/2006/main">
             <a:pPr algn="l">
+              <a:buNone/>
               <a:defRPr sz="1725" b="0">
                 <a:solidFill>
                   <a:srgbClr val="565E68"/>
@@ -13581,6 +17838,7 @@
           <a:lstStyle xmlns:a="http://schemas.openxmlformats.org/drawingml/2006/main"/>
           <a:p xmlns:a="http://schemas.openxmlformats.org/drawingml/2006/main">
             <a:pPr algn="l">
+              <a:buNone/>
               <a:defRPr sz="1275" b="1">
                 <a:solidFill>
                   <a:srgbClr val="2563EB"/>
@@ -13638,6 +17896,7 @@
           <a:lstStyle xmlns:a="http://schemas.openxmlformats.org/drawingml/2006/main"/>
           <a:p xmlns:a="http://schemas.openxmlformats.org/drawingml/2006/main">
             <a:pPr algn="l">
+              <a:buNone/>
               <a:defRPr sz="3600" b="1">
                 <a:solidFill>
                   <a:srgbClr val="111111"/>
@@ -13726,6 +17985,7 @@
           <a:lstStyle xmlns:a="http://schemas.openxmlformats.org/drawingml/2006/main"/>
           <a:p xmlns:a="http://schemas.openxmlformats.org/drawingml/2006/main">
             <a:pPr algn="l">
+              <a:buNone/>
               <a:defRPr sz="975" b="0">
                 <a:solidFill>
                   <a:srgbClr val="565E68"/>
@@ -13783,6 +18043,7 @@
           <a:lstStyle xmlns:a="http://schemas.openxmlformats.org/drawingml/2006/main"/>
           <a:p xmlns:a="http://schemas.openxmlformats.org/drawingml/2006/main">
             <a:pPr algn="r">
+              <a:buNone/>
               <a:defRPr sz="975" b="0">
                 <a:solidFill>
                   <a:srgbClr val="565E68"/>
@@ -13840,6 +18101,7 @@
           <a:lstStyle xmlns:a="http://schemas.openxmlformats.org/drawingml/2006/main"/>
           <a:p xmlns:a="http://schemas.openxmlformats.org/drawingml/2006/main">
             <a:pPr algn="r">
+              <a:buNone/>
               <a:defRPr sz="1350" b="0">
                 <a:solidFill>
                   <a:srgbClr val="111111"/>
@@ -13897,6 +18159,7 @@
           <a:lstStyle xmlns:a="http://schemas.openxmlformats.org/drawingml/2006/main"/>
           <a:p xmlns:a="http://schemas.openxmlformats.org/drawingml/2006/main">
             <a:pPr algn="l">
+              <a:buNone/>
               <a:defRPr sz="6300" b="1">
                 <a:solidFill>
                   <a:srgbClr val="2563EB"/>
@@ -13954,6 +18217,7 @@
           <a:lstStyle xmlns:a="http://schemas.openxmlformats.org/drawingml/2006/main"/>
           <a:p xmlns:a="http://schemas.openxmlformats.org/drawingml/2006/main">
             <a:pPr algn="l">
+              <a:buNone/>
               <a:defRPr sz="2400" b="1">
                 <a:solidFill>
                   <a:srgbClr val="111111"/>
@@ -14011,6 +18275,7 @@
           <a:lstStyle xmlns:a="http://schemas.openxmlformats.org/drawingml/2006/main"/>
           <a:p xmlns:a="http://schemas.openxmlformats.org/drawingml/2006/main">
             <a:pPr algn="l">
+              <a:buNone/>
               <a:defRPr sz="2250" b="0">
                 <a:solidFill>
                   <a:srgbClr val="565E68"/>
@@ -14034,6 +18299,7 @@
           </a:p>
           <a:p xmlns:a="http://schemas.openxmlformats.org/drawingml/2006/main">
             <a:pPr algn="l">
+              <a:buNone/>
               <a:defRPr sz="2250" b="0">
                 <a:solidFill>
                   <a:srgbClr val="565E68"/>
@@ -14059,7 +18325,7 @@
       </p:sp>
       <p:graphicFrame>
         <p:nvGraphicFramePr>
-          <p:cNvPr id="23" name=""/>
+          <p:cNvPr id="25" name=""/>
           <p:cNvGraphicFramePr/>
           <p:nvPr/>
         </p:nvGraphicFramePr>
@@ -14263,6 +18529,7 @@
           <a:lstStyle xmlns:a="http://schemas.openxmlformats.org/drawingml/2006/main"/>
           <a:p xmlns:a="http://schemas.openxmlformats.org/drawingml/2006/main">
             <a:pPr algn="l">
+              <a:buNone/>
               <a:defRPr sz="2400" b="1">
                 <a:solidFill>
                   <a:srgbClr val="111111"/>
@@ -14320,6 +18587,7 @@
           <a:lstStyle xmlns:a="http://schemas.openxmlformats.org/drawingml/2006/main"/>
           <a:p xmlns:a="http://schemas.openxmlformats.org/drawingml/2006/main">
             <a:pPr algn="l">
+              <a:buNone/>
               <a:defRPr sz="1875" b="0">
                 <a:solidFill>
                   <a:srgbClr val="565E68"/>
@@ -14377,6 +18645,7 @@
           <a:lstStyle xmlns:a="http://schemas.openxmlformats.org/drawingml/2006/main"/>
           <a:p xmlns:a="http://schemas.openxmlformats.org/drawingml/2006/main">
             <a:pPr algn="l">
+              <a:buNone/>
               <a:defRPr sz="1650" b="0">
                 <a:solidFill>
                   <a:srgbClr val="565E68"/>
@@ -14463,6 +18732,7 @@
           <a:lstStyle xmlns:a="http://schemas.openxmlformats.org/drawingml/2006/main"/>
           <a:p xmlns:a="http://schemas.openxmlformats.org/drawingml/2006/main">
             <a:pPr algn="l">
+              <a:buNone/>
               <a:defRPr sz="1275" b="1">
                 <a:solidFill>
                   <a:srgbClr val="2563EB"/>
@@ -14520,6 +18790,7 @@
           <a:lstStyle xmlns:a="http://schemas.openxmlformats.org/drawingml/2006/main"/>
           <a:p xmlns:a="http://schemas.openxmlformats.org/drawingml/2006/main">
             <a:pPr algn="l">
+              <a:buNone/>
               <a:defRPr sz="3600" b="1">
                 <a:solidFill>
                   <a:srgbClr val="111111"/>
@@ -14608,6 +18879,7 @@
           <a:lstStyle xmlns:a="http://schemas.openxmlformats.org/drawingml/2006/main"/>
           <a:p xmlns:a="http://schemas.openxmlformats.org/drawingml/2006/main">
             <a:pPr algn="l">
+              <a:buNone/>
               <a:defRPr sz="975" b="0">
                 <a:solidFill>
                   <a:srgbClr val="565E68"/>
@@ -14665,6 +18937,7 @@
           <a:lstStyle xmlns:a="http://schemas.openxmlformats.org/drawingml/2006/main"/>
           <a:p xmlns:a="http://schemas.openxmlformats.org/drawingml/2006/main">
             <a:pPr algn="r">
+              <a:buNone/>
               <a:defRPr sz="975" b="0">
                 <a:solidFill>
                   <a:srgbClr val="565E68"/>
@@ -14722,6 +18995,7 @@
           <a:lstStyle xmlns:a="http://schemas.openxmlformats.org/drawingml/2006/main"/>
           <a:p xmlns:a="http://schemas.openxmlformats.org/drawingml/2006/main">
             <a:pPr algn="r">
+              <a:buNone/>
               <a:defRPr sz="1350" b="0">
                 <a:solidFill>
                   <a:srgbClr val="111111"/>
@@ -14779,6 +19053,7 @@
           <a:lstStyle xmlns:a="http://schemas.openxmlformats.org/drawingml/2006/main"/>
           <a:p xmlns:a="http://schemas.openxmlformats.org/drawingml/2006/main">
             <a:pPr algn="l">
+              <a:buNone/>
               <a:defRPr sz="1650" b="0">
                 <a:solidFill>
                   <a:srgbClr val="565E68"/>
@@ -14804,7 +19079,7 @@
       </p:sp>
       <p:graphicFrame>
         <p:nvGraphicFramePr>
-          <p:cNvPr id="22" name="Chart"/>
+          <p:cNvPr id="24" name="Chart"/>
           <p:cNvGraphicFramePr/>
           <p:nvPr/>
         </p:nvGraphicFramePr>
@@ -14814,7 +19089,7 @@
         </p:xfrm>
         <a:graphic xmlns:a="http://schemas.openxmlformats.org/drawingml/2006/main">
           <a:graphicData uri="http://schemas.openxmlformats.org/drawingml/2006/chart">
-            <c:chart xmlns:r="http://schemas.openxmlformats.org/officeDocument/2006/relationships" xmlns:c="http://schemas.openxmlformats.org/drawingml/2006/chart" r:id="R209261288d494627"/>
+            <c:chart xmlns:r="http://schemas.openxmlformats.org/officeDocument/2006/relationships" xmlns:c="http://schemas.openxmlformats.org/drawingml/2006/chart" r:id="Re54d8823efc242cb"/>
           </a:graphicData>
         </a:graphic>
       </p:graphicFrame>
@@ -14852,6 +19127,7 @@
           <a:lstStyle xmlns:a="http://schemas.openxmlformats.org/drawingml/2006/main"/>
           <a:p xmlns:a="http://schemas.openxmlformats.org/drawingml/2006/main">
             <a:pPr algn="l">
+              <a:buNone/>
               <a:defRPr sz="5625" b="1">
                 <a:solidFill>
                   <a:srgbClr val="111111"/>
@@ -14909,6 +19185,7 @@
           <a:lstStyle xmlns:a="http://schemas.openxmlformats.org/drawingml/2006/main"/>
           <a:p xmlns:a="http://schemas.openxmlformats.org/drawingml/2006/main">
             <a:pPr algn="l">
+              <a:buNone/>
               <a:defRPr sz="1650" b="0">
                 <a:solidFill>
                   <a:srgbClr val="565E68"/>
@@ -14966,6 +19243,7 @@
           <a:lstStyle xmlns:a="http://schemas.openxmlformats.org/drawingml/2006/main"/>
           <a:p xmlns:a="http://schemas.openxmlformats.org/drawingml/2006/main">
             <a:pPr algn="l">
+              <a:buNone/>
               <a:defRPr sz="2100" b="0">
                 <a:solidFill>
                   <a:srgbClr val="565E68"/>
@@ -14989,6 +19267,7 @@
           </a:p>
           <a:p xmlns:a="http://schemas.openxmlformats.org/drawingml/2006/main">
             <a:pPr algn="l">
+              <a:buNone/>
               <a:defRPr sz="2100" b="0">
                 <a:solidFill>
                   <a:srgbClr val="565E68"/>
@@ -15046,6 +19325,7 @@
           <a:lstStyle xmlns:a="http://schemas.openxmlformats.org/drawingml/2006/main"/>
           <a:p xmlns:a="http://schemas.openxmlformats.org/drawingml/2006/main">
             <a:pPr algn="l">
+              <a:buNone/>
               <a:defRPr sz="2400" b="1">
                 <a:solidFill>
                   <a:srgbClr val="111111"/>
@@ -15103,6 +19383,7 @@
           <a:lstStyle xmlns:a="http://schemas.openxmlformats.org/drawingml/2006/main"/>
           <a:p xmlns:a="http://schemas.openxmlformats.org/drawingml/2006/main">
             <a:pPr algn="l">
+              <a:buNone/>
               <a:defRPr sz="1650" b="0">
                 <a:solidFill>
                   <a:srgbClr val="565E68"/>
@@ -15160,6 +19441,7 @@
           <a:lstStyle xmlns:a="http://schemas.openxmlformats.org/drawingml/2006/main"/>
           <a:p xmlns:a="http://schemas.openxmlformats.org/drawingml/2006/main">
             <a:pPr algn="l">
+              <a:buNone/>
               <a:defRPr sz="1650" b="0">
                 <a:solidFill>
                   <a:srgbClr val="565E68"/>
@@ -15246,6 +19528,7 @@
           <a:lstStyle xmlns:a="http://schemas.openxmlformats.org/drawingml/2006/main"/>
           <a:p xmlns:a="http://schemas.openxmlformats.org/drawingml/2006/main">
             <a:pPr algn="l">
+              <a:buNone/>
               <a:defRPr sz="1275" b="1">
                 <a:solidFill>
                   <a:srgbClr val="2563EB"/>
@@ -15303,6 +19586,7 @@
           <a:lstStyle xmlns:a="http://schemas.openxmlformats.org/drawingml/2006/main"/>
           <a:p xmlns:a="http://schemas.openxmlformats.org/drawingml/2006/main">
             <a:pPr algn="l">
+              <a:buNone/>
               <a:defRPr sz="3600" b="1">
                 <a:solidFill>
                   <a:srgbClr val="111111"/>
@@ -15391,6 +19675,7 @@
           <a:lstStyle xmlns:a="http://schemas.openxmlformats.org/drawingml/2006/main"/>
           <a:p xmlns:a="http://schemas.openxmlformats.org/drawingml/2006/main">
             <a:pPr algn="l">
+              <a:buNone/>
               <a:defRPr sz="975" b="0">
                 <a:solidFill>
                   <a:srgbClr val="565E68"/>
@@ -15448,6 +19733,7 @@
           <a:lstStyle xmlns:a="http://schemas.openxmlformats.org/drawingml/2006/main"/>
           <a:p xmlns:a="http://schemas.openxmlformats.org/drawingml/2006/main">
             <a:pPr algn="r">
+              <a:buNone/>
               <a:defRPr sz="975" b="0">
                 <a:solidFill>
                   <a:srgbClr val="565E68"/>
@@ -15505,6 +19791,7 @@
           <a:lstStyle xmlns:a="http://schemas.openxmlformats.org/drawingml/2006/main"/>
           <a:p xmlns:a="http://schemas.openxmlformats.org/drawingml/2006/main">
             <a:pPr algn="r">
+              <a:buNone/>
               <a:defRPr sz="1350" b="0">
                 <a:solidFill>
                   <a:srgbClr val="111111"/>
@@ -15562,6 +19849,7 @@
           <a:lstStyle xmlns:a="http://schemas.openxmlformats.org/drawingml/2006/main"/>
           <a:p xmlns:a="http://schemas.openxmlformats.org/drawingml/2006/main">
             <a:pPr algn="l">
+              <a:buNone/>
               <a:defRPr sz="1950" b="0">
                 <a:solidFill>
                   <a:srgbClr val="565E68"/>
@@ -15680,6 +19968,7 @@
           <a:lstStyle xmlns:a="http://schemas.openxmlformats.org/drawingml/2006/main"/>
           <a:p xmlns:a="http://schemas.openxmlformats.org/drawingml/2006/main">
             <a:pPr algn="l">
+              <a:buNone/>
               <a:defRPr sz="3000" b="1">
                 <a:solidFill>
                   <a:srgbClr val="111111"/>
@@ -15737,6 +20026,7 @@
           <a:lstStyle xmlns:a="http://schemas.openxmlformats.org/drawingml/2006/main"/>
           <a:p xmlns:a="http://schemas.openxmlformats.org/drawingml/2006/main">
             <a:pPr algn="l">
+              <a:buNone/>
               <a:defRPr sz="2400" b="1">
                 <a:solidFill>
                   <a:srgbClr val="111111"/>
@@ -15794,6 +20084,7 @@
           <a:lstStyle xmlns:a="http://schemas.openxmlformats.org/drawingml/2006/main"/>
           <a:p xmlns:a="http://schemas.openxmlformats.org/drawingml/2006/main">
             <a:pPr algn="l">
+              <a:buNone/>
               <a:defRPr sz="1800" b="0">
                 <a:solidFill>
                   <a:srgbClr val="565E68"/>
@@ -15817,6 +20108,7 @@
           </a:p>
           <a:p xmlns:a="http://schemas.openxmlformats.org/drawingml/2006/main">
             <a:pPr algn="l">
+              <a:buNone/>
               <a:defRPr sz="1800" b="0">
                 <a:solidFill>
                   <a:srgbClr val="565E68"/>
@@ -15840,6 +20132,7 @@
           </a:p>
           <a:p xmlns:a="http://schemas.openxmlformats.org/drawingml/2006/main">
             <a:pPr algn="l">
+              <a:buNone/>
               <a:defRPr sz="1800" b="0">
                 <a:solidFill>
                   <a:srgbClr val="565E68"/>
@@ -15927,6 +20220,7 @@
           <a:lstStyle xmlns:a="http://schemas.openxmlformats.org/drawingml/2006/main"/>
           <a:p xmlns:a="http://schemas.openxmlformats.org/drawingml/2006/main">
             <a:pPr algn="l">
+              <a:buNone/>
               <a:defRPr sz="3000" b="1">
                 <a:solidFill>
                   <a:srgbClr val="111111"/>
@@ -15984,6 +20278,7 @@
           <a:lstStyle xmlns:a="http://schemas.openxmlformats.org/drawingml/2006/main"/>
           <a:p xmlns:a="http://schemas.openxmlformats.org/drawingml/2006/main">
             <a:pPr algn="l">
+              <a:buNone/>
               <a:defRPr sz="2400" b="1">
                 <a:solidFill>
                   <a:srgbClr val="111111"/>
@@ -16041,6 +20336,7 @@
           <a:lstStyle xmlns:a="http://schemas.openxmlformats.org/drawingml/2006/main"/>
           <a:p xmlns:a="http://schemas.openxmlformats.org/drawingml/2006/main">
             <a:pPr algn="l">
+              <a:buNone/>
               <a:defRPr sz="1800" b="0">
                 <a:solidFill>
                   <a:srgbClr val="565E68"/>
@@ -16064,6 +20360,7 @@
           </a:p>
           <a:p xmlns:a="http://schemas.openxmlformats.org/drawingml/2006/main">
             <a:pPr algn="l">
+              <a:buNone/>
               <a:defRPr sz="1800" b="0">
                 <a:solidFill>
                   <a:srgbClr val="565E68"/>
@@ -16087,6 +20384,7 @@
           </a:p>
           <a:p xmlns:a="http://schemas.openxmlformats.org/drawingml/2006/main">
             <a:pPr algn="l">
+              <a:buNone/>
               <a:defRPr sz="1800" b="0">
                 <a:solidFill>
                   <a:srgbClr val="565E68"/>
@@ -16174,6 +20472,7 @@
           <a:lstStyle xmlns:a="http://schemas.openxmlformats.org/drawingml/2006/main"/>
           <a:p xmlns:a="http://schemas.openxmlformats.org/drawingml/2006/main">
             <a:pPr algn="l">
+              <a:buNone/>
               <a:defRPr sz="3000" b="1">
                 <a:solidFill>
                   <a:srgbClr val="111111"/>
@@ -16231,6 +20530,7 @@
           <a:lstStyle xmlns:a="http://schemas.openxmlformats.org/drawingml/2006/main"/>
           <a:p xmlns:a="http://schemas.openxmlformats.org/drawingml/2006/main">
             <a:pPr algn="l">
+              <a:buNone/>
               <a:defRPr sz="2400" b="1">
                 <a:solidFill>
                   <a:srgbClr val="111111"/>
@@ -16288,6 +20588,7 @@
           <a:lstStyle xmlns:a="http://schemas.openxmlformats.org/drawingml/2006/main"/>
           <a:p xmlns:a="http://schemas.openxmlformats.org/drawingml/2006/main">
             <a:pPr algn="l">
+              <a:buNone/>
               <a:defRPr sz="1800" b="0">
                 <a:solidFill>
                   <a:srgbClr val="565E68"/>
@@ -16311,6 +20612,7 @@
           </a:p>
           <a:p xmlns:a="http://schemas.openxmlformats.org/drawingml/2006/main">
             <a:pPr algn="l">
+              <a:buNone/>
               <a:defRPr sz="1800" b="0">
                 <a:solidFill>
                   <a:srgbClr val="565E68"/>
@@ -16334,6 +20636,7 @@
           </a:p>
           <a:p xmlns:a="http://schemas.openxmlformats.org/drawingml/2006/main">
             <a:pPr algn="l">
+              <a:buNone/>
               <a:defRPr sz="1800" b="0">
                 <a:solidFill>
                   <a:srgbClr val="565E68"/>
@@ -16391,6 +20694,7 @@
           <a:lstStyle xmlns:a="http://schemas.openxmlformats.org/drawingml/2006/main"/>
           <a:p xmlns:a="http://schemas.openxmlformats.org/drawingml/2006/main">
             <a:pPr algn="l">
+              <a:buNone/>
               <a:defRPr sz="1650" b="0">
                 <a:solidFill>
                   <a:srgbClr val="565E68"/>
